--- a/SouMaisOlimpia-pitch.pptx
+++ b/SouMaisOlimpia-pitch.pptx
@@ -14,11 +14,6 @@
     <p:sldId id="262" r:id="rId13"/>
     <p:sldId id="263" r:id="rId14"/>
     <p:sldId id="264" r:id="rId15"/>
-    <p:sldId id="265" r:id="rId16"/>
-    <p:sldId id="266" r:id="rId17"/>
-    <p:sldId id="267" r:id="rId18"/>
-    <p:sldId id="268" r:id="rId19"/>
-    <p:sldId id="269" r:id="rId20"/>
   </p:sldIdLst>
   <p:sldSz cx="12191695" cy="6858000" type="screen4x3"/>
   <p:notesSz cx="6858000" cy="9144000"/>
@@ -3205,7 +3200,7 @@
         </p:blipFill>
         <p:spPr>
           <a:xfrm>
-            <a:off x="914400" y="1051560"/>
+            <a:off x="914400" y="1188720"/>
             <a:ext cx="4447642" cy="1737360"/>
           </a:xfrm>
           <a:prstGeom prst="rect">
@@ -3221,8 +3216,8 @@
         </p:nvSpPr>
         <p:spPr>
           <a:xfrm>
-            <a:off x="914400" y="3063240"/>
-            <a:ext cx="9601200" cy="1097280"/>
+            <a:off x="914400" y="3200400"/>
+            <a:ext cx="9875520" cy="1097280"/>
           </a:xfrm>
           <a:prstGeom prst="rect">
             <a:avLst/>
@@ -3276,8 +3271,8 @@
         </p:nvSpPr>
         <p:spPr>
           <a:xfrm>
-            <a:off x="914400" y="4434840"/>
-            <a:ext cx="8778240" cy="822960"/>
+            <a:off x="914400" y="4572000"/>
+            <a:ext cx="8961120" cy="822960"/>
           </a:xfrm>
           <a:prstGeom prst="rect">
             <a:avLst/>
@@ -3302,7 +3297,7 @@
                 </a:solidFill>
                 <a:latin typeface="Trebuchet MS"/>
               </a:rPr>
-              <a:t>Uma camada que permite pequenos negócios provarem quem são e</a:t>
+              <a:t>Pequenos negócios provando quem são e verificando uns aos outros —</a:t>
             </a:r>
           </a:p>
           <a:p>
@@ -3318,7 +3313,7 @@
                 </a:solidFill>
                 <a:latin typeface="Trebuchet MS"/>
               </a:rPr>
-              <a:t>verificarem uns aos outros — sem planilha e sem grupo de WhatsApp.</a:t>
+              <a:t>sem planilha e sem grupo de WhatsApp.</a:t>
             </a:r>
           </a:p>
         </p:txBody>
@@ -3331,8 +3326,8 @@
         </p:nvSpPr>
         <p:spPr>
           <a:xfrm>
-            <a:off x="914400" y="5440680"/>
-            <a:ext cx="4023360" cy="566928"/>
+            <a:off x="914400" y="5532120"/>
+            <a:ext cx="4023360" cy="548640"/>
           </a:xfrm>
           <a:prstGeom prst="roundRect">
             <a:avLst>
@@ -3375,7 +3370,7 @@
         </p:nvSpPr>
         <p:spPr>
           <a:xfrm>
-            <a:off x="1143000" y="5596128"/>
+            <a:off x="1143000" y="5678424"/>
             <a:ext cx="3657600" cy="365760"/>
           </a:xfrm>
           <a:prstGeom prst="rect">
@@ -3414,2506 +3409,8 @@
         </p:nvSpPr>
         <p:spPr>
           <a:xfrm>
-            <a:off x="5394960" y="5596128"/>
-            <a:ext cx="5486400" cy="365760"/>
-          </a:xfrm>
-          <a:prstGeom prst="rect">
-            <a:avLst/>
-          </a:prstGeom>
-          <a:noFill/>
-        </p:spPr>
-        <p:txBody>
-          <a:bodyPr wrap="square" lIns="0" rIns="0" tIns="0" bIns="0" anchor="t">
-            <a:spAutoFit/>
-          </a:bodyPr>
-          <a:lstStyle/>
-          <a:p>
-            <a:pPr algn="l">
-              <a:lnSpc>
-                <a:spcPct val="100000"/>
-              </a:lnSpc>
-            </a:pPr>
-            <a:r>
-              <a:rPr sz="1200" b="0">
-                <a:solidFill>
-                  <a:srgbClr val="8A939E"/>
-                </a:solidFill>
-                <a:latin typeface="Trebuchet MS"/>
-              </a:rPr>
-              <a:t>Grupo 4  ·  Geise · Bruno · Alan · Naisa · Renan · Alan · Eduardo</a:t>
-            </a:r>
-          </a:p>
-        </p:txBody>
-      </p:sp>
-    </p:spTree>
-  </p:cSld>
-  <p:clrMapOvr>
-    <a:masterClrMapping/>
-  </p:clrMapOvr>
-</p:sld>
-</file>
-
-<file path=ppt/slides/slide10.xml><?xml version="1.0" encoding="utf-8"?>
-<p:sld xmlns:a="http://schemas.openxmlformats.org/drawingml/2006/main" xmlns:p="http://schemas.openxmlformats.org/presentationml/2006/main" xmlns:r="http://schemas.openxmlformats.org/officeDocument/2006/relationships">
-  <p:cSld>
-    <p:spTree>
-      <p:nvGrpSpPr>
-        <p:cNvPr id="1" name=""/>
-        <p:cNvGrpSpPr/>
-        <p:nvPr/>
-      </p:nvGrpSpPr>
-      <p:grpSpPr/>
-      <p:sp>
-        <p:nvSpPr>
-          <p:cNvPr id="2" name="Rectangle 1"/>
-          <p:cNvSpPr/>
-          <p:nvPr/>
-        </p:nvSpPr>
-        <p:spPr>
-          <a:xfrm>
-            <a:off x="0" y="0"/>
-            <a:ext cx="12191695" cy="6858000"/>
-          </a:xfrm>
-          <a:prstGeom prst="rect">
-            <a:avLst/>
-          </a:prstGeom>
-          <a:solidFill>
-            <a:srgbClr val="FFFFFF"/>
-          </a:solidFill>
-          <a:ln>
-            <a:noFill/>
-          </a:ln>
-          <a:effectLst/>
-        </p:spPr>
-        <p:style>
-          <a:lnRef idx="1">
-            <a:schemeClr val="accent1"/>
-          </a:lnRef>
-          <a:fillRef idx="3">
-            <a:schemeClr val="accent1"/>
-          </a:fillRef>
-          <a:effectRef idx="2">
-            <a:schemeClr val="accent1"/>
-          </a:effectRef>
-          <a:fontRef idx="minor">
-            <a:schemeClr val="lt1"/>
-          </a:fontRef>
-        </p:style>
-        <p:txBody>
-          <a:bodyPr rtlCol="0" anchor="ctr"/>
-          <a:lstStyle/>
-          <a:p>
-            <a:pPr algn="ctr"/>
-          </a:p>
-        </p:txBody>
-      </p:sp>
-      <p:sp>
-        <p:nvSpPr>
-          <p:cNvPr id="3" name="TextBox 2"/>
-          <p:cNvSpPr txBox="1"/>
-          <p:nvPr/>
-        </p:nvSpPr>
-        <p:spPr>
-          <a:xfrm>
-            <a:off x="777240" y="502920"/>
-            <a:ext cx="10607040" cy="274320"/>
-          </a:xfrm>
-          <a:prstGeom prst="rect">
-            <a:avLst/>
-          </a:prstGeom>
-          <a:noFill/>
-        </p:spPr>
-        <p:txBody>
-          <a:bodyPr wrap="square" lIns="0" rIns="0" tIns="0" bIns="0" anchor="t">
-            <a:spAutoFit/>
-          </a:bodyPr>
-          <a:lstStyle/>
-          <a:p>
-            <a:pPr algn="l">
-              <a:lnSpc>
-                <a:spcPct val="100000"/>
-              </a:lnSpc>
-            </a:pPr>
-            <a:r>
-              <a:rPr sz="1100" b="1">
-                <a:solidFill>
-                  <a:srgbClr val="0E6FD8"/>
-                </a:solidFill>
-                <a:latin typeface="Trebuchet MS"/>
-              </a:rPr>
-              <a:t>GOVERNANÇA</a:t>
-            </a:r>
-          </a:p>
-        </p:txBody>
-      </p:sp>
-      <p:sp>
-        <p:nvSpPr>
-          <p:cNvPr id="4" name="TextBox 3"/>
-          <p:cNvSpPr txBox="1"/>
-          <p:nvPr/>
-        </p:nvSpPr>
-        <p:spPr>
-          <a:xfrm>
-            <a:off x="777240" y="841248"/>
-            <a:ext cx="10607040" cy="914400"/>
-          </a:xfrm>
-          <a:prstGeom prst="rect">
-            <a:avLst/>
-          </a:prstGeom>
-          <a:noFill/>
-        </p:spPr>
-        <p:txBody>
-          <a:bodyPr wrap="square" lIns="0" rIns="0" tIns="0" bIns="0" anchor="t">
-            <a:spAutoFit/>
-          </a:bodyPr>
-          <a:lstStyle/>
-          <a:p>
-            <a:pPr algn="l">
-              <a:lnSpc>
-                <a:spcPct val="102000"/>
-              </a:lnSpc>
-            </a:pPr>
-            <a:r>
-              <a:rPr sz="3400" b="1">
-                <a:solidFill>
-                  <a:srgbClr val="10151C"/>
-                </a:solidFill>
-                <a:latin typeface="Trebuchet MS"/>
-              </a:rPr>
-              <a:t>A prefeitura coordena — e não paga</a:t>
-            </a:r>
-          </a:p>
-        </p:txBody>
-      </p:sp>
-      <p:sp>
-        <p:nvSpPr>
-          <p:cNvPr id="5" name="Rectangle 4"/>
-          <p:cNvSpPr/>
-          <p:nvPr/>
-        </p:nvSpPr>
-        <p:spPr>
-          <a:xfrm>
-            <a:off x="777240" y="1719072"/>
-            <a:ext cx="1005840" cy="54864"/>
-          </a:xfrm>
-          <a:prstGeom prst="rect">
-            <a:avLst/>
-          </a:prstGeom>
-          <a:solidFill>
-            <a:srgbClr val="0E6FD8"/>
-          </a:solidFill>
-          <a:ln>
-            <a:noFill/>
-          </a:ln>
-          <a:effectLst/>
-        </p:spPr>
-        <p:style>
-          <a:lnRef idx="1">
-            <a:schemeClr val="accent1"/>
-          </a:lnRef>
-          <a:fillRef idx="3">
-            <a:schemeClr val="accent1"/>
-          </a:fillRef>
-          <a:effectRef idx="2">
-            <a:schemeClr val="accent1"/>
-          </a:effectRef>
-          <a:fontRef idx="minor">
-            <a:schemeClr val="lt1"/>
-          </a:fontRef>
-        </p:style>
-        <p:txBody>
-          <a:bodyPr rtlCol="0" anchor="ctr"/>
-          <a:lstStyle/>
-          <a:p>
-            <a:pPr algn="ctr"/>
-          </a:p>
-        </p:txBody>
-      </p:sp>
-      <p:sp>
-        <p:nvSpPr>
-          <p:cNvPr id="6" name="Rounded Rectangle 5"/>
-          <p:cNvSpPr/>
-          <p:nvPr/>
-        </p:nvSpPr>
-        <p:spPr>
-          <a:xfrm>
-            <a:off x="777240" y="2514600"/>
-            <a:ext cx="5120640" cy="1828800"/>
-          </a:xfrm>
-          <a:prstGeom prst="roundRect">
-            <a:avLst>
-              <a:gd name="adj" fmla="val 6000"/>
-            </a:avLst>
-          </a:prstGeom>
-          <a:solidFill>
-            <a:srgbClr val="FFFFFF"/>
-          </a:solidFill>
-          <a:ln w="12700">
-            <a:solidFill>
-              <a:srgbClr val="D9E0E9"/>
-            </a:solidFill>
-          </a:ln>
-          <a:effectLst/>
-        </p:spPr>
-        <p:style>
-          <a:lnRef idx="1">
-            <a:schemeClr val="accent1"/>
-          </a:lnRef>
-          <a:fillRef idx="3">
-            <a:schemeClr val="accent1"/>
-          </a:fillRef>
-          <a:effectRef idx="2">
-            <a:schemeClr val="accent1"/>
-          </a:effectRef>
-          <a:fontRef idx="minor">
-            <a:schemeClr val="lt1"/>
-          </a:fontRef>
-        </p:style>
-        <p:txBody>
-          <a:bodyPr rtlCol="0" anchor="ctr"/>
-          <a:lstStyle/>
-          <a:p/>
-        </p:txBody>
-      </p:sp>
-      <p:sp>
-        <p:nvSpPr>
-          <p:cNvPr id="7" name="TextBox 6"/>
-          <p:cNvSpPr txBox="1"/>
-          <p:nvPr/>
-        </p:nvSpPr>
-        <p:spPr>
-          <a:xfrm>
-            <a:off x="1097280" y="2743200"/>
-            <a:ext cx="4572000" cy="320040"/>
-          </a:xfrm>
-          <a:prstGeom prst="rect">
-            <a:avLst/>
-          </a:prstGeom>
-          <a:noFill/>
-        </p:spPr>
-        <p:txBody>
-          <a:bodyPr wrap="square" lIns="0" rIns="0" tIns="0" bIns="0" anchor="t">
-            <a:spAutoFit/>
-          </a:bodyPr>
-          <a:lstStyle/>
-          <a:p>
-            <a:pPr algn="l">
-              <a:lnSpc>
-                <a:spcPct val="100000"/>
-              </a:lnSpc>
-            </a:pPr>
-            <a:r>
-              <a:rPr sz="1700" b="1">
-                <a:solidFill>
-                  <a:srgbClr val="0A4C96"/>
-                </a:solidFill>
-                <a:latin typeface="Trebuchet MS"/>
-              </a:rPr>
-              <a:t>O que a prefeitura faz</a:t>
-            </a:r>
-          </a:p>
-        </p:txBody>
-      </p:sp>
-      <p:sp>
-        <p:nvSpPr>
-          <p:cNvPr id="8" name="TextBox 7"/>
-          <p:cNvSpPr txBox="1"/>
-          <p:nvPr/>
-        </p:nvSpPr>
-        <p:spPr>
-          <a:xfrm>
-            <a:off x="1097280" y="3154680"/>
-            <a:ext cx="4526280" cy="1097280"/>
-          </a:xfrm>
-          <a:prstGeom prst="rect">
-            <a:avLst/>
-          </a:prstGeom>
-          <a:noFill/>
-        </p:spPr>
-        <p:txBody>
-          <a:bodyPr wrap="square" lIns="0" rIns="0" tIns="0" bIns="0" anchor="t">
-            <a:spAutoFit/>
-          </a:bodyPr>
-          <a:lstStyle/>
-          <a:p>
-            <a:pPr algn="l">
-              <a:lnSpc>
-                <a:spcPct val="130000"/>
-              </a:lnSpc>
-            </a:pPr>
-            <a:r>
-              <a:rPr sz="1400" b="0">
-                <a:solidFill>
-                  <a:srgbClr val="49535F"/>
-                </a:solidFill>
-                <a:latin typeface="Trebuchet MS"/>
-              </a:rPr>
-              <a:t>Assina credenciais, chancela o programa e recebe os indicadores de circulação. Nada mais que isso.</a:t>
-            </a:r>
-          </a:p>
-        </p:txBody>
-      </p:sp>
-      <p:sp>
-        <p:nvSpPr>
-          <p:cNvPr id="9" name="Rounded Rectangle 8"/>
-          <p:cNvSpPr/>
-          <p:nvPr/>
-        </p:nvSpPr>
-        <p:spPr>
-          <a:xfrm>
-            <a:off x="6263640" y="2514600"/>
-            <a:ext cx="5120640" cy="1828800"/>
-          </a:xfrm>
-          <a:prstGeom prst="roundRect">
-            <a:avLst>
-              <a:gd name="adj" fmla="val 6000"/>
-            </a:avLst>
-          </a:prstGeom>
-          <a:solidFill>
-            <a:srgbClr val="FFFFFF"/>
-          </a:solidFill>
-          <a:ln w="12700">
-            <a:solidFill>
-              <a:srgbClr val="D9E0E9"/>
-            </a:solidFill>
-          </a:ln>
-          <a:effectLst/>
-        </p:spPr>
-        <p:style>
-          <a:lnRef idx="1">
-            <a:schemeClr val="accent1"/>
-          </a:lnRef>
-          <a:fillRef idx="3">
-            <a:schemeClr val="accent1"/>
-          </a:fillRef>
-          <a:effectRef idx="2">
-            <a:schemeClr val="accent1"/>
-          </a:effectRef>
-          <a:fontRef idx="minor">
-            <a:schemeClr val="lt1"/>
-          </a:fontRef>
-        </p:style>
-        <p:txBody>
-          <a:bodyPr rtlCol="0" anchor="ctr"/>
-          <a:lstStyle/>
-          <a:p/>
-        </p:txBody>
-      </p:sp>
-      <p:sp>
-        <p:nvSpPr>
-          <p:cNvPr id="10" name="TextBox 9"/>
-          <p:cNvSpPr txBox="1"/>
-          <p:nvPr/>
-        </p:nvSpPr>
-        <p:spPr>
-          <a:xfrm>
-            <a:off x="6583680" y="2743200"/>
-            <a:ext cx="4572000" cy="320040"/>
-          </a:xfrm>
-          <a:prstGeom prst="rect">
-            <a:avLst/>
-          </a:prstGeom>
-          <a:noFill/>
-        </p:spPr>
-        <p:txBody>
-          <a:bodyPr wrap="square" lIns="0" rIns="0" tIns="0" bIns="0" anchor="t">
-            <a:spAutoFit/>
-          </a:bodyPr>
-          <a:lstStyle/>
-          <a:p>
-            <a:pPr algn="l">
-              <a:lnSpc>
-                <a:spcPct val="100000"/>
-              </a:lnSpc>
-            </a:pPr>
-            <a:r>
-              <a:rPr sz="1700" b="1">
-                <a:solidFill>
-                  <a:srgbClr val="D62718"/>
-                </a:solidFill>
-                <a:latin typeface="Trebuchet MS"/>
-              </a:rPr>
-              <a:t>O que ela não faz</a:t>
-            </a:r>
-          </a:p>
-        </p:txBody>
-      </p:sp>
-      <p:sp>
-        <p:nvSpPr>
-          <p:cNvPr id="11" name="TextBox 10"/>
-          <p:cNvSpPr txBox="1"/>
-          <p:nvPr/>
-        </p:nvSpPr>
-        <p:spPr>
-          <a:xfrm>
-            <a:off x="6583680" y="3154680"/>
-            <a:ext cx="4526280" cy="1097280"/>
-          </a:xfrm>
-          <a:prstGeom prst="rect">
-            <a:avLst/>
-          </a:prstGeom>
-          <a:noFill/>
-        </p:spPr>
-        <p:txBody>
-          <a:bodyPr wrap="square" lIns="0" rIns="0" tIns="0" bIns="0" anchor="t">
-            <a:spAutoFit/>
-          </a:bodyPr>
-          <a:lstStyle/>
-          <a:p>
-            <a:pPr algn="l">
-              <a:lnSpc>
-                <a:spcPct val="130000"/>
-              </a:lnSpc>
-            </a:pPr>
-            <a:r>
-              <a:rPr sz="1400" b="0">
-                <a:solidFill>
-                  <a:srgbClr val="49535F"/>
-                </a:solidFill>
-                <a:latin typeface="Trebuchet MS"/>
-              </a:rPr>
-              <a:t>Não custeia desconto. Se custeasse, viraria subsídio a consumo — exigindo lei, dotação, licitação e prestação de contas ao TCE.</a:t>
-            </a:r>
-          </a:p>
-        </p:txBody>
-      </p:sp>
-      <p:sp>
-        <p:nvSpPr>
-          <p:cNvPr id="12" name="Rounded Rectangle 11"/>
-          <p:cNvSpPr/>
-          <p:nvPr/>
-        </p:nvSpPr>
-        <p:spPr>
-          <a:xfrm>
-            <a:off x="777240" y="4617720"/>
-            <a:ext cx="10607040" cy="1234440"/>
-          </a:xfrm>
-          <a:prstGeom prst="roundRect">
-            <a:avLst>
-              <a:gd name="adj" fmla="val 8000"/>
-            </a:avLst>
-          </a:prstGeom>
-          <a:solidFill>
-            <a:srgbClr val="E7F1FD"/>
-          </a:solidFill>
-          <a:ln>
-            <a:noFill/>
-          </a:ln>
-          <a:effectLst/>
-        </p:spPr>
-        <p:style>
-          <a:lnRef idx="1">
-            <a:schemeClr val="accent1"/>
-          </a:lnRef>
-          <a:fillRef idx="3">
-            <a:schemeClr val="accent1"/>
-          </a:fillRef>
-          <a:effectRef idx="2">
-            <a:schemeClr val="accent1"/>
-          </a:effectRef>
-          <a:fontRef idx="minor">
-            <a:schemeClr val="lt1"/>
-          </a:fontRef>
-        </p:style>
-        <p:txBody>
-          <a:bodyPr rtlCol="0" anchor="ctr"/>
-          <a:lstStyle/>
-          <a:p/>
-        </p:txBody>
-      </p:sp>
-      <p:sp>
-        <p:nvSpPr>
-          <p:cNvPr id="13" name="TextBox 12"/>
-          <p:cNvSpPr txBox="1"/>
-          <p:nvPr/>
-        </p:nvSpPr>
-        <p:spPr>
-          <a:xfrm>
-            <a:off x="1097280" y="4828032"/>
-            <a:ext cx="10058400" cy="868680"/>
-          </a:xfrm>
-          <a:prstGeom prst="rect">
-            <a:avLst/>
-          </a:prstGeom>
-          <a:noFill/>
-        </p:spPr>
-        <p:txBody>
-          <a:bodyPr wrap="square" lIns="0" rIns="0" tIns="0" bIns="0" anchor="t">
-            <a:spAutoFit/>
-          </a:bodyPr>
-          <a:lstStyle/>
-          <a:p>
-            <a:pPr algn="l">
-              <a:lnSpc>
-                <a:spcPct val="130000"/>
-              </a:lnSpc>
-            </a:pPr>
-            <a:r>
-              <a:rPr sz="1450" b="0">
-                <a:solidFill>
-                  <a:srgbClr val="0A4C96"/>
-                </a:solidFill>
-                <a:latin typeface="Trebuchet MS"/>
-              </a:rPr>
-              <a:t>Encaixe legal: Olímpia já tem o Observatório do Turismo (Lei 5.060/2025) e o SMITS (Lei 5.343/2026), cuja finalidade é produzir e integrar informação estratégica.</a:t>
-            </a:r>
-          </a:p>
-          <a:p>
-            <a:pPr algn="l">
-              <a:lnSpc>
-                <a:spcPct val="130000"/>
-              </a:lnSpc>
-            </a:pPr>
-            <a:r>
-              <a:rPr sz="1450" b="0">
-                <a:solidFill>
-                  <a:srgbClr val="0A4C96"/>
-                </a:solidFill>
-                <a:latin typeface="Trebuchet MS"/>
-              </a:rPr>
-              <a:t>O programa entra como módulo de varejo — estender uma lei que existe, em vez de aprovar uma nova. A confirmar com a procuradoria.</a:t>
-            </a:r>
-          </a:p>
-        </p:txBody>
-      </p:sp>
-      <p:sp>
-        <p:nvSpPr>
-          <p:cNvPr id="14" name="TextBox 13"/>
-          <p:cNvSpPr txBox="1"/>
-          <p:nvPr/>
-        </p:nvSpPr>
-        <p:spPr>
-          <a:xfrm>
-            <a:off x="777240" y="6327648"/>
-            <a:ext cx="6400800" cy="256032"/>
-          </a:xfrm>
-          <a:prstGeom prst="rect">
-            <a:avLst/>
-          </a:prstGeom>
-          <a:noFill/>
-        </p:spPr>
-        <p:txBody>
-          <a:bodyPr wrap="square" lIns="0" rIns="0" tIns="0" bIns="0" anchor="t">
-            <a:spAutoFit/>
-          </a:bodyPr>
-          <a:lstStyle/>
-          <a:p>
-            <a:pPr algn="l">
-              <a:lnSpc>
-                <a:spcPct val="100000"/>
-              </a:lnSpc>
-            </a:pPr>
-            <a:r>
-              <a:rPr sz="900" b="0">
-                <a:solidFill>
-                  <a:srgbClr val="8A939E"/>
-                </a:solidFill>
-                <a:latin typeface="Trebuchet MS"/>
-              </a:rPr>
-              <a:t>SOU+OLÍMPIA · GRUPO 4 · IDEATHON OLIMPIALAB 2026</a:t>
-            </a:r>
-          </a:p>
-        </p:txBody>
-      </p:sp>
-      <p:sp>
-        <p:nvSpPr>
-          <p:cNvPr id="15" name="TextBox 14"/>
-          <p:cNvSpPr txBox="1"/>
-          <p:nvPr/>
-        </p:nvSpPr>
-        <p:spPr>
-          <a:xfrm>
-            <a:off x="10058400" y="6327648"/>
-            <a:ext cx="1371600" cy="256032"/>
-          </a:xfrm>
-          <a:prstGeom prst="rect">
-            <a:avLst/>
-          </a:prstGeom>
-          <a:noFill/>
-        </p:spPr>
-        <p:txBody>
-          <a:bodyPr wrap="square" lIns="0" rIns="0" tIns="0" bIns="0" anchor="t">
-            <a:spAutoFit/>
-          </a:bodyPr>
-          <a:lstStyle/>
-          <a:p>
-            <a:pPr algn="r">
-              <a:lnSpc>
-                <a:spcPct val="100000"/>
-              </a:lnSpc>
-            </a:pPr>
-            <a:r>
-              <a:rPr sz="900" b="0">
-                <a:solidFill>
-                  <a:srgbClr val="8A939E"/>
-                </a:solidFill>
-                <a:latin typeface="Trebuchet MS"/>
-              </a:rPr>
-              <a:t>10</a:t>
-            </a:r>
-          </a:p>
-        </p:txBody>
-      </p:sp>
-    </p:spTree>
-  </p:cSld>
-  <p:clrMapOvr>
-    <a:masterClrMapping/>
-  </p:clrMapOvr>
-</p:sld>
-</file>
-
-<file path=ppt/slides/slide11.xml><?xml version="1.0" encoding="utf-8"?>
-<p:sld xmlns:a="http://schemas.openxmlformats.org/drawingml/2006/main" xmlns:p="http://schemas.openxmlformats.org/presentationml/2006/main" xmlns:r="http://schemas.openxmlformats.org/officeDocument/2006/relationships">
-  <p:cSld>
-    <p:spTree>
-      <p:nvGrpSpPr>
-        <p:cNvPr id="1" name=""/>
-        <p:cNvGrpSpPr/>
-        <p:nvPr/>
-      </p:nvGrpSpPr>
-      <p:grpSpPr/>
-      <p:sp>
-        <p:nvSpPr>
-          <p:cNvPr id="2" name="Rectangle 1"/>
-          <p:cNvSpPr/>
-          <p:nvPr/>
-        </p:nvSpPr>
-        <p:spPr>
-          <a:xfrm>
-            <a:off x="0" y="0"/>
-            <a:ext cx="12191695" cy="6858000"/>
-          </a:xfrm>
-          <a:prstGeom prst="rect">
-            <a:avLst/>
-          </a:prstGeom>
-          <a:solidFill>
-            <a:srgbClr val="F1F4F8"/>
-          </a:solidFill>
-          <a:ln>
-            <a:noFill/>
-          </a:ln>
-          <a:effectLst/>
-        </p:spPr>
-        <p:style>
-          <a:lnRef idx="1">
-            <a:schemeClr val="accent1"/>
-          </a:lnRef>
-          <a:fillRef idx="3">
-            <a:schemeClr val="accent1"/>
-          </a:fillRef>
-          <a:effectRef idx="2">
-            <a:schemeClr val="accent1"/>
-          </a:effectRef>
-          <a:fontRef idx="minor">
-            <a:schemeClr val="lt1"/>
-          </a:fontRef>
-        </p:style>
-        <p:txBody>
-          <a:bodyPr rtlCol="0" anchor="ctr"/>
-          <a:lstStyle/>
-          <a:p>
-            <a:pPr algn="ctr"/>
-          </a:p>
-        </p:txBody>
-      </p:sp>
-      <p:sp>
-        <p:nvSpPr>
-          <p:cNvPr id="3" name="TextBox 2"/>
-          <p:cNvSpPr txBox="1"/>
-          <p:nvPr/>
-        </p:nvSpPr>
-        <p:spPr>
-          <a:xfrm>
-            <a:off x="777240" y="502920"/>
-            <a:ext cx="10607040" cy="274320"/>
-          </a:xfrm>
-          <a:prstGeom prst="rect">
-            <a:avLst/>
-          </a:prstGeom>
-          <a:noFill/>
-        </p:spPr>
-        <p:txBody>
-          <a:bodyPr wrap="square" lIns="0" rIns="0" tIns="0" bIns="0" anchor="t">
-            <a:spAutoFit/>
-          </a:bodyPr>
-          <a:lstStyle/>
-          <a:p>
-            <a:pPr algn="l">
-              <a:lnSpc>
-                <a:spcPct val="100000"/>
-              </a:lnSpc>
-            </a:pPr>
-            <a:r>
-              <a:rPr sz="1100" b="1">
-                <a:solidFill>
-                  <a:srgbClr val="0E6FD8"/>
-                </a:solidFill>
-                <a:latin typeface="Trebuchet MS"/>
-              </a:rPr>
-              <a:t>O QUE AINDA NÃO SABEMOS</a:t>
-            </a:r>
-          </a:p>
-        </p:txBody>
-      </p:sp>
-      <p:sp>
-        <p:nvSpPr>
-          <p:cNvPr id="4" name="TextBox 3"/>
-          <p:cNvSpPr txBox="1"/>
-          <p:nvPr/>
-        </p:nvSpPr>
-        <p:spPr>
-          <a:xfrm>
-            <a:off x="777240" y="841248"/>
-            <a:ext cx="10607040" cy="914400"/>
-          </a:xfrm>
-          <a:prstGeom prst="rect">
-            <a:avLst/>
-          </a:prstGeom>
-          <a:noFill/>
-        </p:spPr>
-        <p:txBody>
-          <a:bodyPr wrap="square" lIns="0" rIns="0" tIns="0" bIns="0" anchor="t">
-            <a:spAutoFit/>
-          </a:bodyPr>
-          <a:lstStyle/>
-          <a:p>
-            <a:pPr algn="l">
-              <a:lnSpc>
-                <a:spcPct val="102000"/>
-              </a:lnSpc>
-            </a:pPr>
-            <a:r>
-              <a:rPr sz="3400" b="1">
-                <a:solidFill>
-                  <a:srgbClr val="10151C"/>
-                </a:solidFill>
-                <a:latin typeface="Trebuchet MS"/>
-              </a:rPr>
-              <a:t>Os limites, ditos por nós</a:t>
-            </a:r>
-          </a:p>
-          <a:p>
-            <a:pPr algn="l">
-              <a:lnSpc>
-                <a:spcPct val="102000"/>
-              </a:lnSpc>
-            </a:pPr>
-            <a:r>
-              <a:rPr sz="3400" b="1">
-                <a:solidFill>
-                  <a:srgbClr val="10151C"/>
-                </a:solidFill>
-                <a:latin typeface="Trebuchet MS"/>
-              </a:rPr>
-              <a:t>antes de alguém perguntar</a:t>
-            </a:r>
-          </a:p>
-        </p:txBody>
-      </p:sp>
-      <p:sp>
-        <p:nvSpPr>
-          <p:cNvPr id="5" name="Rectangle 4"/>
-          <p:cNvSpPr/>
-          <p:nvPr/>
-        </p:nvSpPr>
-        <p:spPr>
-          <a:xfrm>
-            <a:off x="777240" y="1719072"/>
-            <a:ext cx="1005840" cy="54864"/>
-          </a:xfrm>
-          <a:prstGeom prst="rect">
-            <a:avLst/>
-          </a:prstGeom>
-          <a:solidFill>
-            <a:srgbClr val="0E6FD8"/>
-          </a:solidFill>
-          <a:ln>
-            <a:noFill/>
-          </a:ln>
-          <a:effectLst/>
-        </p:spPr>
-        <p:style>
-          <a:lnRef idx="1">
-            <a:schemeClr val="accent1"/>
-          </a:lnRef>
-          <a:fillRef idx="3">
-            <a:schemeClr val="accent1"/>
-          </a:fillRef>
-          <a:effectRef idx="2">
-            <a:schemeClr val="accent1"/>
-          </a:effectRef>
-          <a:fontRef idx="minor">
-            <a:schemeClr val="lt1"/>
-          </a:fontRef>
-        </p:style>
-        <p:txBody>
-          <a:bodyPr rtlCol="0" anchor="ctr"/>
-          <a:lstStyle/>
-          <a:p>
-            <a:pPr algn="ctr"/>
-          </a:p>
-        </p:txBody>
-      </p:sp>
-      <p:sp>
-        <p:nvSpPr>
-          <p:cNvPr id="6" name="Rounded Rectangle 5"/>
-          <p:cNvSpPr/>
-          <p:nvPr/>
-        </p:nvSpPr>
-        <p:spPr>
-          <a:xfrm>
-            <a:off x="777240" y="2423160"/>
-            <a:ext cx="10607040" cy="1051560"/>
-          </a:xfrm>
-          <a:prstGeom prst="roundRect">
-            <a:avLst>
-              <a:gd name="adj" fmla="val 8000"/>
-            </a:avLst>
-          </a:prstGeom>
-          <a:solidFill>
-            <a:srgbClr val="FFFFFF"/>
-          </a:solidFill>
-          <a:ln w="12700">
-            <a:solidFill>
-              <a:srgbClr val="E8C6C4"/>
-            </a:solidFill>
-          </a:ln>
-          <a:effectLst/>
-        </p:spPr>
-        <p:style>
-          <a:lnRef idx="1">
-            <a:schemeClr val="accent1"/>
-          </a:lnRef>
-          <a:fillRef idx="3">
-            <a:schemeClr val="accent1"/>
-          </a:fillRef>
-          <a:effectRef idx="2">
-            <a:schemeClr val="accent1"/>
-          </a:effectRef>
-          <a:fontRef idx="minor">
-            <a:schemeClr val="lt1"/>
-          </a:fontRef>
-        </p:style>
-        <p:txBody>
-          <a:bodyPr rtlCol="0" anchor="ctr"/>
-          <a:lstStyle/>
-          <a:p/>
-        </p:txBody>
-      </p:sp>
-      <p:sp>
-        <p:nvSpPr>
-          <p:cNvPr id="7" name="Rectangle 6"/>
-          <p:cNvSpPr/>
-          <p:nvPr/>
-        </p:nvSpPr>
-        <p:spPr>
-          <a:xfrm>
-            <a:off x="777240" y="2423160"/>
-            <a:ext cx="73152" cy="1051560"/>
-          </a:xfrm>
-          <a:prstGeom prst="rect">
-            <a:avLst/>
-          </a:prstGeom>
-          <a:solidFill>
-            <a:srgbClr val="E07A00"/>
-          </a:solidFill>
-          <a:ln>
-            <a:noFill/>
-          </a:ln>
-          <a:effectLst/>
-        </p:spPr>
-        <p:style>
-          <a:lnRef idx="1">
-            <a:schemeClr val="accent1"/>
-          </a:lnRef>
-          <a:fillRef idx="3">
-            <a:schemeClr val="accent1"/>
-          </a:fillRef>
-          <a:effectRef idx="2">
-            <a:schemeClr val="accent1"/>
-          </a:effectRef>
-          <a:fontRef idx="minor">
-            <a:schemeClr val="lt1"/>
-          </a:fontRef>
-        </p:style>
-        <p:txBody>
-          <a:bodyPr rtlCol="0" anchor="ctr"/>
-          <a:lstStyle/>
-          <a:p>
-            <a:pPr algn="ctr"/>
-          </a:p>
-        </p:txBody>
-      </p:sp>
-      <p:sp>
-        <p:nvSpPr>
-          <p:cNvPr id="8" name="TextBox 7"/>
-          <p:cNvSpPr txBox="1"/>
-          <p:nvPr/>
-        </p:nvSpPr>
-        <p:spPr>
-          <a:xfrm>
-            <a:off x="1143000" y="2587752"/>
-            <a:ext cx="9966960" cy="292608"/>
-          </a:xfrm>
-          <a:prstGeom prst="rect">
-            <a:avLst/>
-          </a:prstGeom>
-          <a:noFill/>
-        </p:spPr>
-        <p:txBody>
-          <a:bodyPr wrap="square" lIns="0" rIns="0" tIns="0" bIns="0" anchor="t">
-            <a:spAutoFit/>
-          </a:bodyPr>
-          <a:lstStyle/>
-          <a:p>
-            <a:pPr algn="l">
-              <a:lnSpc>
-                <a:spcPct val="100000"/>
-              </a:lnSpc>
-            </a:pPr>
-            <a:r>
-              <a:rPr sz="1600" b="1">
-                <a:solidFill>
-                  <a:srgbClr val="10151C"/>
-                </a:solidFill>
-                <a:latin typeface="Trebuchet MS"/>
-              </a:rPr>
-              <a:t>Não temos evidência de que o varejo caia na baixa</a:t>
-            </a:r>
-          </a:p>
-        </p:txBody>
-      </p:sp>
-      <p:sp>
-        <p:nvSpPr>
-          <p:cNvPr id="9" name="TextBox 8"/>
-          <p:cNvSpPr txBox="1"/>
-          <p:nvPr/>
-        </p:nvSpPr>
-        <p:spPr>
-          <a:xfrm>
-            <a:off x="1143000" y="2953512"/>
-            <a:ext cx="9966960" cy="411480"/>
-          </a:xfrm>
-          <a:prstGeom prst="rect">
-            <a:avLst/>
-          </a:prstGeom>
-          <a:noFill/>
-        </p:spPr>
-        <p:txBody>
-          <a:bodyPr wrap="square" lIns="0" rIns="0" tIns="0" bIns="0" anchor="t">
-            <a:spAutoFit/>
-          </a:bodyPr>
-          <a:lstStyle/>
-          <a:p>
-            <a:pPr algn="l">
-              <a:lnSpc>
-                <a:spcPct val="120000"/>
-              </a:lnSpc>
-            </a:pPr>
-            <a:r>
-              <a:rPr sz="1350" b="0">
-                <a:solidFill>
-                  <a:srgbClr val="49535F"/>
-                </a:solidFill>
-                <a:latin typeface="Trebuchet MS"/>
-              </a:rPr>
-              <a:t>A sazonalidade medida é de serviços. Fomos verificar o varejo e o emprego formal é plano o ano todo.</a:t>
-            </a:r>
-          </a:p>
-        </p:txBody>
-      </p:sp>
-      <p:sp>
-        <p:nvSpPr>
-          <p:cNvPr id="10" name="Rounded Rectangle 9"/>
-          <p:cNvSpPr/>
-          <p:nvPr/>
-        </p:nvSpPr>
-        <p:spPr>
-          <a:xfrm>
-            <a:off x="777240" y="3611880"/>
-            <a:ext cx="10607040" cy="1051560"/>
-          </a:xfrm>
-          <a:prstGeom prst="roundRect">
-            <a:avLst>
-              <a:gd name="adj" fmla="val 8000"/>
-            </a:avLst>
-          </a:prstGeom>
-          <a:solidFill>
-            <a:srgbClr val="FFFFFF"/>
-          </a:solidFill>
-          <a:ln w="12700">
-            <a:solidFill>
-              <a:srgbClr val="E8C6C4"/>
-            </a:solidFill>
-          </a:ln>
-          <a:effectLst/>
-        </p:spPr>
-        <p:style>
-          <a:lnRef idx="1">
-            <a:schemeClr val="accent1"/>
-          </a:lnRef>
-          <a:fillRef idx="3">
-            <a:schemeClr val="accent1"/>
-          </a:fillRef>
-          <a:effectRef idx="2">
-            <a:schemeClr val="accent1"/>
-          </a:effectRef>
-          <a:fontRef idx="minor">
-            <a:schemeClr val="lt1"/>
-          </a:fontRef>
-        </p:style>
-        <p:txBody>
-          <a:bodyPr rtlCol="0" anchor="ctr"/>
-          <a:lstStyle/>
-          <a:p/>
-        </p:txBody>
-      </p:sp>
-      <p:sp>
-        <p:nvSpPr>
-          <p:cNvPr id="11" name="Rectangle 10"/>
-          <p:cNvSpPr/>
-          <p:nvPr/>
-        </p:nvSpPr>
-        <p:spPr>
-          <a:xfrm>
-            <a:off x="777240" y="3611880"/>
-            <a:ext cx="73152" cy="1051560"/>
-          </a:xfrm>
-          <a:prstGeom prst="rect">
-            <a:avLst/>
-          </a:prstGeom>
-          <a:solidFill>
-            <a:srgbClr val="E07A00"/>
-          </a:solidFill>
-          <a:ln>
-            <a:noFill/>
-          </a:ln>
-          <a:effectLst/>
-        </p:spPr>
-        <p:style>
-          <a:lnRef idx="1">
-            <a:schemeClr val="accent1"/>
-          </a:lnRef>
-          <a:fillRef idx="3">
-            <a:schemeClr val="accent1"/>
-          </a:fillRef>
-          <a:effectRef idx="2">
-            <a:schemeClr val="accent1"/>
-          </a:effectRef>
-          <a:fontRef idx="minor">
-            <a:schemeClr val="lt1"/>
-          </a:fontRef>
-        </p:style>
-        <p:txBody>
-          <a:bodyPr rtlCol="0" anchor="ctr"/>
-          <a:lstStyle/>
-          <a:p>
-            <a:pPr algn="ctr"/>
-          </a:p>
-        </p:txBody>
-      </p:sp>
-      <p:sp>
-        <p:nvSpPr>
-          <p:cNvPr id="12" name="TextBox 11"/>
-          <p:cNvSpPr txBox="1"/>
-          <p:nvPr/>
-        </p:nvSpPr>
-        <p:spPr>
-          <a:xfrm>
-            <a:off x="1143000" y="3776472"/>
-            <a:ext cx="9966960" cy="292608"/>
-          </a:xfrm>
-          <a:prstGeom prst="rect">
-            <a:avLst/>
-          </a:prstGeom>
-          <a:noFill/>
-        </p:spPr>
-        <p:txBody>
-          <a:bodyPr wrap="square" lIns="0" rIns="0" tIns="0" bIns="0" anchor="t">
-            <a:spAutoFit/>
-          </a:bodyPr>
-          <a:lstStyle/>
-          <a:p>
-            <a:pPr algn="l">
-              <a:lnSpc>
-                <a:spcPct val="100000"/>
-              </a:lnSpc>
-            </a:pPr>
-            <a:r>
-              <a:rPr sz="1600" b="1">
-                <a:solidFill>
-                  <a:srgbClr val="10151C"/>
-                </a:solidFill>
-                <a:latin typeface="Trebuchet MS"/>
-              </a:rPr>
-              <a:t>O programa não fecha o vale, e nenhuma tática fecha</a:t>
-            </a:r>
-          </a:p>
-        </p:txBody>
-      </p:sp>
-      <p:sp>
-        <p:nvSpPr>
-          <p:cNvPr id="13" name="TextBox 12"/>
-          <p:cNvSpPr txBox="1"/>
-          <p:nvPr/>
-        </p:nvSpPr>
-        <p:spPr>
-          <a:xfrm>
-            <a:off x="1143000" y="4142232"/>
-            <a:ext cx="9966960" cy="411480"/>
-          </a:xfrm>
-          <a:prstGeom prst="rect">
-            <a:avLst/>
-          </a:prstGeom>
-          <a:noFill/>
-        </p:spPr>
-        <p:txBody>
-          <a:bodyPr wrap="square" lIns="0" rIns="0" tIns="0" bIns="0" anchor="t">
-            <a:spAutoFit/>
-          </a:bodyPr>
-          <a:lstStyle/>
-          <a:p>
-            <a:pPr algn="l">
-              <a:lnSpc>
-                <a:spcPct val="120000"/>
-              </a:lnSpc>
-            </a:pPr>
-            <a:r>
-              <a:rPr sz="1350" b="0">
-                <a:solidFill>
-                  <a:srgbClr val="49535F"/>
-                </a:solidFill>
-                <a:latin typeface="Trebuchet MS"/>
-              </a:rPr>
-              <a:t>Olímpia tem uma loja para cada 49 habitantes, capacidade dimensionada para o turista. Dá para reduzir a amplitude.</a:t>
-            </a:r>
-          </a:p>
-        </p:txBody>
-      </p:sp>
-      <p:sp>
-        <p:nvSpPr>
-          <p:cNvPr id="14" name="Rounded Rectangle 13"/>
-          <p:cNvSpPr/>
-          <p:nvPr/>
-        </p:nvSpPr>
-        <p:spPr>
-          <a:xfrm>
-            <a:off x="777240" y="4800600"/>
-            <a:ext cx="10607040" cy="1051560"/>
-          </a:xfrm>
-          <a:prstGeom prst="roundRect">
-            <a:avLst>
-              <a:gd name="adj" fmla="val 8000"/>
-            </a:avLst>
-          </a:prstGeom>
-          <a:solidFill>
-            <a:srgbClr val="FFFFFF"/>
-          </a:solidFill>
-          <a:ln w="12700">
-            <a:solidFill>
-              <a:srgbClr val="E8C6C4"/>
-            </a:solidFill>
-          </a:ln>
-          <a:effectLst/>
-        </p:spPr>
-        <p:style>
-          <a:lnRef idx="1">
-            <a:schemeClr val="accent1"/>
-          </a:lnRef>
-          <a:fillRef idx="3">
-            <a:schemeClr val="accent1"/>
-          </a:fillRef>
-          <a:effectRef idx="2">
-            <a:schemeClr val="accent1"/>
-          </a:effectRef>
-          <a:fontRef idx="minor">
-            <a:schemeClr val="lt1"/>
-          </a:fontRef>
-        </p:style>
-        <p:txBody>
-          <a:bodyPr rtlCol="0" anchor="ctr"/>
-          <a:lstStyle/>
-          <a:p/>
-        </p:txBody>
-      </p:sp>
-      <p:sp>
-        <p:nvSpPr>
-          <p:cNvPr id="15" name="Rectangle 14"/>
-          <p:cNvSpPr/>
-          <p:nvPr/>
-        </p:nvSpPr>
-        <p:spPr>
-          <a:xfrm>
-            <a:off x="777240" y="4800600"/>
-            <a:ext cx="73152" cy="1051560"/>
-          </a:xfrm>
-          <a:prstGeom prst="rect">
-            <a:avLst/>
-          </a:prstGeom>
-          <a:solidFill>
-            <a:srgbClr val="E07A00"/>
-          </a:solidFill>
-          <a:ln>
-            <a:noFill/>
-          </a:ln>
-          <a:effectLst/>
-        </p:spPr>
-        <p:style>
-          <a:lnRef idx="1">
-            <a:schemeClr val="accent1"/>
-          </a:lnRef>
-          <a:fillRef idx="3">
-            <a:schemeClr val="accent1"/>
-          </a:fillRef>
-          <a:effectRef idx="2">
-            <a:schemeClr val="accent1"/>
-          </a:effectRef>
-          <a:fontRef idx="minor">
-            <a:schemeClr val="lt1"/>
-          </a:fontRef>
-        </p:style>
-        <p:txBody>
-          <a:bodyPr rtlCol="0" anchor="ctr"/>
-          <a:lstStyle/>
-          <a:p>
-            <a:pPr algn="ctr"/>
-          </a:p>
-        </p:txBody>
-      </p:sp>
-      <p:sp>
-        <p:nvSpPr>
-          <p:cNvPr id="16" name="TextBox 15"/>
-          <p:cNvSpPr txBox="1"/>
-          <p:nvPr/>
-        </p:nvSpPr>
-        <p:spPr>
-          <a:xfrm>
-            <a:off x="1143000" y="4965192"/>
-            <a:ext cx="9966960" cy="292608"/>
-          </a:xfrm>
-          <a:prstGeom prst="rect">
-            <a:avLst/>
-          </a:prstGeom>
-          <a:noFill/>
-        </p:spPr>
-        <p:txBody>
-          <a:bodyPr wrap="square" lIns="0" rIns="0" tIns="0" bIns="0" anchor="t">
-            <a:spAutoFit/>
-          </a:bodyPr>
-          <a:lstStyle/>
-          <a:p>
-            <a:pPr algn="l">
-              <a:lnSpc>
-                <a:spcPct val="100000"/>
-              </a:lnSpc>
-            </a:pPr>
-            <a:r>
-              <a:rPr sz="1600" b="1">
-                <a:solidFill>
-                  <a:srgbClr val="10151C"/>
-                </a:solidFill>
-                <a:latin typeface="Trebuchet MS"/>
-              </a:rPr>
-              <a:t>A premissa mais arriscada ainda não foi testada</a:t>
-            </a:r>
-          </a:p>
-        </p:txBody>
-      </p:sp>
-      <p:sp>
-        <p:nvSpPr>
-          <p:cNvPr id="17" name="TextBox 16"/>
-          <p:cNvSpPr txBox="1"/>
-          <p:nvPr/>
-        </p:nvSpPr>
-        <p:spPr>
-          <a:xfrm>
-            <a:off x="1143000" y="5330952"/>
-            <a:ext cx="9966960" cy="411480"/>
-          </a:xfrm>
-          <a:prstGeom prst="rect">
-            <a:avLst/>
-          </a:prstGeom>
-          <a:noFill/>
-        </p:spPr>
-        <p:txBody>
-          <a:bodyPr wrap="square" lIns="0" rIns="0" tIns="0" bIns="0" anchor="t">
-            <a:spAutoFit/>
-          </a:bodyPr>
-          <a:lstStyle/>
-          <a:p>
-            <a:pPr algn="l">
-              <a:lnSpc>
-                <a:spcPct val="120000"/>
-              </a:lnSpc>
-            </a:pPr>
-            <a:r>
-              <a:rPr sz="1350" b="0">
-                <a:solidFill>
-                  <a:srgbClr val="49535F"/>
-                </a:solidFill>
-                <a:latin typeface="Trebuchet MS"/>
-              </a:rPr>
-              <a:t>Se existe demanda adiável do morador que responda a desconto. Testável com 3 a 5 lojas e um grupo de controle.</a:t>
-            </a:r>
-          </a:p>
-        </p:txBody>
-      </p:sp>
-      <p:sp>
-        <p:nvSpPr>
-          <p:cNvPr id="18" name="TextBox 17"/>
-          <p:cNvSpPr txBox="1"/>
-          <p:nvPr/>
-        </p:nvSpPr>
-        <p:spPr>
-          <a:xfrm>
-            <a:off x="777240" y="6080759"/>
-            <a:ext cx="10607040" cy="457200"/>
-          </a:xfrm>
-          <a:prstGeom prst="rect">
-            <a:avLst/>
-          </a:prstGeom>
-          <a:noFill/>
-        </p:spPr>
-        <p:txBody>
-          <a:bodyPr wrap="square" lIns="0" rIns="0" tIns="0" bIns="0" anchor="t">
-            <a:spAutoFit/>
-          </a:bodyPr>
-          <a:lstStyle/>
-          <a:p>
-            <a:pPr algn="l">
-              <a:lnSpc>
-                <a:spcPct val="120000"/>
-              </a:lnSpc>
-            </a:pPr>
-            <a:r>
-              <a:rPr sz="1400" b="0">
-                <a:solidFill>
-                  <a:srgbClr val="49535F"/>
-                </a:solidFill>
-                <a:latin typeface="Trebuchet MS"/>
-              </a:rPr>
-              <a:t>Dizer isso pontua mais do que fingir certeza — e é o que separa diagnóstico de chute.</a:t>
-            </a:r>
-          </a:p>
-        </p:txBody>
-      </p:sp>
-      <p:sp>
-        <p:nvSpPr>
-          <p:cNvPr id="19" name="TextBox 18"/>
-          <p:cNvSpPr txBox="1"/>
-          <p:nvPr/>
-        </p:nvSpPr>
-        <p:spPr>
-          <a:xfrm>
-            <a:off x="777240" y="6327648"/>
-            <a:ext cx="6400800" cy="256032"/>
-          </a:xfrm>
-          <a:prstGeom prst="rect">
-            <a:avLst/>
-          </a:prstGeom>
-          <a:noFill/>
-        </p:spPr>
-        <p:txBody>
-          <a:bodyPr wrap="square" lIns="0" rIns="0" tIns="0" bIns="0" anchor="t">
-            <a:spAutoFit/>
-          </a:bodyPr>
-          <a:lstStyle/>
-          <a:p>
-            <a:pPr algn="l">
-              <a:lnSpc>
-                <a:spcPct val="100000"/>
-              </a:lnSpc>
-            </a:pPr>
-            <a:r>
-              <a:rPr sz="900" b="0">
-                <a:solidFill>
-                  <a:srgbClr val="8A939E"/>
-                </a:solidFill>
-                <a:latin typeface="Trebuchet MS"/>
-              </a:rPr>
-              <a:t>SOU+OLÍMPIA · GRUPO 4 · IDEATHON OLIMPIALAB 2026</a:t>
-            </a:r>
-          </a:p>
-        </p:txBody>
-      </p:sp>
-      <p:sp>
-        <p:nvSpPr>
-          <p:cNvPr id="20" name="TextBox 19"/>
-          <p:cNvSpPr txBox="1"/>
-          <p:nvPr/>
-        </p:nvSpPr>
-        <p:spPr>
-          <a:xfrm>
-            <a:off x="10058400" y="6327648"/>
-            <a:ext cx="1371600" cy="256032"/>
-          </a:xfrm>
-          <a:prstGeom prst="rect">
-            <a:avLst/>
-          </a:prstGeom>
-          <a:noFill/>
-        </p:spPr>
-        <p:txBody>
-          <a:bodyPr wrap="square" lIns="0" rIns="0" tIns="0" bIns="0" anchor="t">
-            <a:spAutoFit/>
-          </a:bodyPr>
-          <a:lstStyle/>
-          <a:p>
-            <a:pPr algn="r">
-              <a:lnSpc>
-                <a:spcPct val="100000"/>
-              </a:lnSpc>
-            </a:pPr>
-            <a:r>
-              <a:rPr sz="900" b="0">
-                <a:solidFill>
-                  <a:srgbClr val="8A939E"/>
-                </a:solidFill>
-                <a:latin typeface="Trebuchet MS"/>
-              </a:rPr>
-              <a:t>11</a:t>
-            </a:r>
-          </a:p>
-        </p:txBody>
-      </p:sp>
-    </p:spTree>
-  </p:cSld>
-  <p:clrMapOvr>
-    <a:masterClrMapping/>
-  </p:clrMapOvr>
-</p:sld>
-</file>
-
-<file path=ppt/slides/slide12.xml><?xml version="1.0" encoding="utf-8"?>
-<p:sld xmlns:a="http://schemas.openxmlformats.org/drawingml/2006/main" xmlns:p="http://schemas.openxmlformats.org/presentationml/2006/main" xmlns:r="http://schemas.openxmlformats.org/officeDocument/2006/relationships">
-  <p:cSld>
-    <p:spTree>
-      <p:nvGrpSpPr>
-        <p:cNvPr id="1" name=""/>
-        <p:cNvGrpSpPr/>
-        <p:nvPr/>
-      </p:nvGrpSpPr>
-      <p:grpSpPr/>
-      <p:sp>
-        <p:nvSpPr>
-          <p:cNvPr id="2" name="Rectangle 1"/>
-          <p:cNvSpPr/>
-          <p:nvPr/>
-        </p:nvSpPr>
-        <p:spPr>
-          <a:xfrm>
-            <a:off x="0" y="0"/>
-            <a:ext cx="12191695" cy="6858000"/>
-          </a:xfrm>
-          <a:prstGeom prst="rect">
-            <a:avLst/>
-          </a:prstGeom>
-          <a:solidFill>
-            <a:srgbClr val="F1F4F8"/>
-          </a:solidFill>
-          <a:ln>
-            <a:noFill/>
-          </a:ln>
-          <a:effectLst/>
-        </p:spPr>
-        <p:style>
-          <a:lnRef idx="1">
-            <a:schemeClr val="accent1"/>
-          </a:lnRef>
-          <a:fillRef idx="3">
-            <a:schemeClr val="accent1"/>
-          </a:fillRef>
-          <a:effectRef idx="2">
-            <a:schemeClr val="accent1"/>
-          </a:effectRef>
-          <a:fontRef idx="minor">
-            <a:schemeClr val="lt1"/>
-          </a:fontRef>
-        </p:style>
-        <p:txBody>
-          <a:bodyPr rtlCol="0" anchor="ctr"/>
-          <a:lstStyle/>
-          <a:p>
-            <a:pPr algn="ctr"/>
-          </a:p>
-        </p:txBody>
-      </p:sp>
-      <p:sp>
-        <p:nvSpPr>
-          <p:cNvPr id="3" name="TextBox 2"/>
-          <p:cNvSpPr txBox="1"/>
-          <p:nvPr/>
-        </p:nvSpPr>
-        <p:spPr>
-          <a:xfrm>
-            <a:off x="777240" y="502920"/>
-            <a:ext cx="10607040" cy="274320"/>
-          </a:xfrm>
-          <a:prstGeom prst="rect">
-            <a:avLst/>
-          </a:prstGeom>
-          <a:noFill/>
-        </p:spPr>
-        <p:txBody>
-          <a:bodyPr wrap="square" lIns="0" rIns="0" tIns="0" bIns="0" anchor="t">
-            <a:spAutoFit/>
-          </a:bodyPr>
-          <a:lstStyle/>
-          <a:p>
-            <a:pPr algn="l">
-              <a:lnSpc>
-                <a:spcPct val="100000"/>
-              </a:lnSpc>
-            </a:pPr>
-            <a:r>
-              <a:rPr sz="1100" b="1">
-                <a:solidFill>
-                  <a:srgbClr val="0E6FD8"/>
-                </a:solidFill>
-                <a:latin typeface="Trebuchet MS"/>
-              </a:rPr>
-              <a:t>O PROTÓTIPO</a:t>
-            </a:r>
-          </a:p>
-        </p:txBody>
-      </p:sp>
-      <p:sp>
-        <p:nvSpPr>
-          <p:cNvPr id="4" name="TextBox 3"/>
-          <p:cNvSpPr txBox="1"/>
-          <p:nvPr/>
-        </p:nvSpPr>
-        <p:spPr>
-          <a:xfrm>
-            <a:off x="777240" y="841248"/>
-            <a:ext cx="10607040" cy="914400"/>
-          </a:xfrm>
-          <a:prstGeom prst="rect">
-            <a:avLst/>
-          </a:prstGeom>
-          <a:noFill/>
-        </p:spPr>
-        <p:txBody>
-          <a:bodyPr wrap="square" lIns="0" rIns="0" tIns="0" bIns="0" anchor="t">
-            <a:spAutoFit/>
-          </a:bodyPr>
-          <a:lstStyle/>
-          <a:p>
-            <a:pPr algn="l">
-              <a:lnSpc>
-                <a:spcPct val="102000"/>
-              </a:lnSpc>
-            </a:pPr>
-            <a:r>
-              <a:rPr sz="3400" b="1">
-                <a:solidFill>
-                  <a:srgbClr val="10151C"/>
-                </a:solidFill>
-                <a:latin typeface="Trebuchet MS"/>
-              </a:rPr>
-              <a:t>A Loja B verificando o carimbo</a:t>
-            </a:r>
-          </a:p>
-          <a:p>
-            <a:pPr algn="l">
-              <a:lnSpc>
-                <a:spcPct val="102000"/>
-              </a:lnSpc>
-            </a:pPr>
-            <a:r>
-              <a:rPr sz="3400" b="1">
-                <a:solidFill>
-                  <a:srgbClr val="10151C"/>
-                </a:solidFill>
-                <a:latin typeface="Trebuchet MS"/>
-              </a:rPr>
-              <a:t>da Loja A, sozinha</a:t>
-            </a:r>
-          </a:p>
-        </p:txBody>
-      </p:sp>
-      <p:sp>
-        <p:nvSpPr>
-          <p:cNvPr id="5" name="Rectangle 4"/>
-          <p:cNvSpPr/>
-          <p:nvPr/>
-        </p:nvSpPr>
-        <p:spPr>
-          <a:xfrm>
-            <a:off x="777240" y="1719072"/>
-            <a:ext cx="1005840" cy="54864"/>
-          </a:xfrm>
-          <a:prstGeom prst="rect">
-            <a:avLst/>
-          </a:prstGeom>
-          <a:solidFill>
-            <a:srgbClr val="0E6FD8"/>
-          </a:solidFill>
-          <a:ln>
-            <a:noFill/>
-          </a:ln>
-          <a:effectLst/>
-        </p:spPr>
-        <p:style>
-          <a:lnRef idx="1">
-            <a:schemeClr val="accent1"/>
-          </a:lnRef>
-          <a:fillRef idx="3">
-            <a:schemeClr val="accent1"/>
-          </a:fillRef>
-          <a:effectRef idx="2">
-            <a:schemeClr val="accent1"/>
-          </a:effectRef>
-          <a:fontRef idx="minor">
-            <a:schemeClr val="lt1"/>
-          </a:fontRef>
-        </p:style>
-        <p:txBody>
-          <a:bodyPr rtlCol="0" anchor="ctr"/>
-          <a:lstStyle/>
-          <a:p>
-            <a:pPr algn="ctr"/>
-          </a:p>
-        </p:txBody>
-      </p:sp>
-      <p:pic>
-        <p:nvPicPr>
-          <p:cNvPr id="6" name="Picture 5" descr="mvp-verifica.png"/>
-          <p:cNvPicPr>
-            <a:picLocks noChangeAspect="1"/>
-          </p:cNvPicPr>
-          <p:nvPr/>
-        </p:nvPicPr>
-        <p:blipFill>
-          <a:blip r:embed="rId2"/>
-          <a:stretch>
-            <a:fillRect/>
-          </a:stretch>
-        </p:blipFill>
-        <p:spPr>
-          <a:xfrm>
-            <a:off x="2331720" y="2148840"/>
-            <a:ext cx="4341412" cy="3566160"/>
-          </a:xfrm>
-          <a:prstGeom prst="rect">
-            <a:avLst/>
-          </a:prstGeom>
-        </p:spPr>
-      </p:pic>
-      <p:sp>
-        <p:nvSpPr>
-          <p:cNvPr id="7" name="TextBox 6"/>
-          <p:cNvSpPr txBox="1"/>
-          <p:nvPr/>
-        </p:nvSpPr>
-        <p:spPr>
-          <a:xfrm>
-            <a:off x="777240" y="5897880"/>
-            <a:ext cx="10607040" cy="457200"/>
-          </a:xfrm>
-          <a:prstGeom prst="rect">
-            <a:avLst/>
-          </a:prstGeom>
-          <a:noFill/>
-        </p:spPr>
-        <p:txBody>
-          <a:bodyPr wrap="square" lIns="0" rIns="0" tIns="0" bIns="0" anchor="t">
-            <a:spAutoFit/>
-          </a:bodyPr>
-          <a:lstStyle/>
-          <a:p>
-            <a:pPr algn="ctr">
-              <a:lnSpc>
-                <a:spcPct val="120000"/>
-              </a:lnSpc>
-            </a:pPr>
-            <a:r>
-              <a:rPr sz="1400" b="0">
-                <a:solidFill>
-                  <a:srgbClr val="49535F"/>
-                </a:solidFill>
-                <a:latin typeface="Trebuchet MS"/>
-              </a:rPr>
-              <a:t>Sem servidor, sem internet e sem planilha: a validação usa só a chave pública da prefeitura, no próprio aparelho.</a:t>
-            </a:r>
-          </a:p>
-        </p:txBody>
-      </p:sp>
-      <p:sp>
-        <p:nvSpPr>
-          <p:cNvPr id="8" name="TextBox 7"/>
-          <p:cNvSpPr txBox="1"/>
-          <p:nvPr/>
-        </p:nvSpPr>
-        <p:spPr>
-          <a:xfrm>
-            <a:off x="777240" y="6327648"/>
-            <a:ext cx="6400800" cy="256032"/>
-          </a:xfrm>
-          <a:prstGeom prst="rect">
-            <a:avLst/>
-          </a:prstGeom>
-          <a:noFill/>
-        </p:spPr>
-        <p:txBody>
-          <a:bodyPr wrap="square" lIns="0" rIns="0" tIns="0" bIns="0" anchor="t">
-            <a:spAutoFit/>
-          </a:bodyPr>
-          <a:lstStyle/>
-          <a:p>
-            <a:pPr algn="l">
-              <a:lnSpc>
-                <a:spcPct val="100000"/>
-              </a:lnSpc>
-            </a:pPr>
-            <a:r>
-              <a:rPr sz="900" b="0">
-                <a:solidFill>
-                  <a:srgbClr val="8A939E"/>
-                </a:solidFill>
-                <a:latin typeface="Trebuchet MS"/>
-              </a:rPr>
-              <a:t>SOU+OLÍMPIA · GRUPO 4 · IDEATHON OLIMPIALAB 2026</a:t>
-            </a:r>
-          </a:p>
-        </p:txBody>
-      </p:sp>
-      <p:sp>
-        <p:nvSpPr>
-          <p:cNvPr id="9" name="TextBox 8"/>
-          <p:cNvSpPr txBox="1"/>
-          <p:nvPr/>
-        </p:nvSpPr>
-        <p:spPr>
-          <a:xfrm>
-            <a:off x="10058400" y="6327648"/>
-            <a:ext cx="1371600" cy="256032"/>
-          </a:xfrm>
-          <a:prstGeom prst="rect">
-            <a:avLst/>
-          </a:prstGeom>
-          <a:noFill/>
-        </p:spPr>
-        <p:txBody>
-          <a:bodyPr wrap="square" lIns="0" rIns="0" tIns="0" bIns="0" anchor="t">
-            <a:spAutoFit/>
-          </a:bodyPr>
-          <a:lstStyle/>
-          <a:p>
-            <a:pPr algn="r">
-              <a:lnSpc>
-                <a:spcPct val="100000"/>
-              </a:lnSpc>
-            </a:pPr>
-            <a:r>
-              <a:rPr sz="900" b="0">
-                <a:solidFill>
-                  <a:srgbClr val="8A939E"/>
-                </a:solidFill>
-                <a:latin typeface="Trebuchet MS"/>
-              </a:rPr>
-              <a:t>12</a:t>
-            </a:r>
-          </a:p>
-        </p:txBody>
-      </p:sp>
-    </p:spTree>
-  </p:cSld>
-  <p:clrMapOvr>
-    <a:masterClrMapping/>
-  </p:clrMapOvr>
-</p:sld>
-</file>
-
-<file path=ppt/slides/slide13.xml><?xml version="1.0" encoding="utf-8"?>
-<p:sld xmlns:a="http://schemas.openxmlformats.org/drawingml/2006/main" xmlns:p="http://schemas.openxmlformats.org/presentationml/2006/main" xmlns:r="http://schemas.openxmlformats.org/officeDocument/2006/relationships">
-  <p:cSld>
-    <p:spTree>
-      <p:nvGrpSpPr>
-        <p:cNvPr id="1" name=""/>
-        <p:cNvGrpSpPr/>
-        <p:nvPr/>
-      </p:nvGrpSpPr>
-      <p:grpSpPr/>
-      <p:sp>
-        <p:nvSpPr>
-          <p:cNvPr id="2" name="Rectangle 1"/>
-          <p:cNvSpPr/>
-          <p:nvPr/>
-        </p:nvSpPr>
-        <p:spPr>
-          <a:xfrm>
-            <a:off x="0" y="0"/>
-            <a:ext cx="12191695" cy="6858000"/>
-          </a:xfrm>
-          <a:prstGeom prst="rect">
-            <a:avLst/>
-          </a:prstGeom>
-          <a:solidFill>
-            <a:srgbClr val="FFFFFF"/>
-          </a:solidFill>
-          <a:ln>
-            <a:noFill/>
-          </a:ln>
-          <a:effectLst/>
-        </p:spPr>
-        <p:style>
-          <a:lnRef idx="1">
-            <a:schemeClr val="accent1"/>
-          </a:lnRef>
-          <a:fillRef idx="3">
-            <a:schemeClr val="accent1"/>
-          </a:fillRef>
-          <a:effectRef idx="2">
-            <a:schemeClr val="accent1"/>
-          </a:effectRef>
-          <a:fontRef idx="minor">
-            <a:schemeClr val="lt1"/>
-          </a:fontRef>
-        </p:style>
-        <p:txBody>
-          <a:bodyPr rtlCol="0" anchor="ctr"/>
-          <a:lstStyle/>
-          <a:p>
-            <a:pPr algn="ctr"/>
-          </a:p>
-        </p:txBody>
-      </p:sp>
-      <p:sp>
-        <p:nvSpPr>
-          <p:cNvPr id="3" name="TextBox 2"/>
-          <p:cNvSpPr txBox="1"/>
-          <p:nvPr/>
-        </p:nvSpPr>
-        <p:spPr>
-          <a:xfrm>
-            <a:off x="777240" y="502920"/>
-            <a:ext cx="10607040" cy="274320"/>
-          </a:xfrm>
-          <a:prstGeom prst="rect">
-            <a:avLst/>
-          </a:prstGeom>
-          <a:noFill/>
-        </p:spPr>
-        <p:txBody>
-          <a:bodyPr wrap="square" lIns="0" rIns="0" tIns="0" bIns="0" anchor="t">
-            <a:spAutoFit/>
-          </a:bodyPr>
-          <a:lstStyle/>
-          <a:p>
-            <a:pPr algn="l">
-              <a:lnSpc>
-                <a:spcPct val="100000"/>
-              </a:lnSpc>
-            </a:pPr>
-            <a:r>
-              <a:rPr sz="1100" b="1">
-                <a:solidFill>
-                  <a:srgbClr val="0E6FD8"/>
-                </a:solidFill>
-                <a:latin typeface="Trebuchet MS"/>
-              </a:rPr>
-              <a:t>PLANO B</a:t>
-            </a:r>
-          </a:p>
-        </p:txBody>
-      </p:sp>
-      <p:sp>
-        <p:nvSpPr>
-          <p:cNvPr id="4" name="TextBox 3"/>
-          <p:cNvSpPr txBox="1"/>
-          <p:nvPr/>
-        </p:nvSpPr>
-        <p:spPr>
-          <a:xfrm>
-            <a:off x="777240" y="841248"/>
-            <a:ext cx="10607040" cy="914400"/>
-          </a:xfrm>
-          <a:prstGeom prst="rect">
-            <a:avLst/>
-          </a:prstGeom>
-          <a:noFill/>
-        </p:spPr>
-        <p:txBody>
-          <a:bodyPr wrap="square" lIns="0" rIns="0" tIns="0" bIns="0" anchor="t">
-            <a:spAutoFit/>
-          </a:bodyPr>
-          <a:lstStyle/>
-          <a:p>
-            <a:pPr algn="l">
-              <a:lnSpc>
-                <a:spcPct val="102000"/>
-              </a:lnSpc>
-            </a:pPr>
-            <a:r>
-              <a:rPr sz="3400" b="1">
-                <a:solidFill>
-                  <a:srgbClr val="10151C"/>
-                </a:solidFill>
-                <a:latin typeface="Trebuchet MS"/>
-              </a:rPr>
-              <a:t>Capturas da demonstração</a:t>
-            </a:r>
-          </a:p>
-        </p:txBody>
-      </p:sp>
-      <p:sp>
-        <p:nvSpPr>
-          <p:cNvPr id="5" name="Rectangle 4"/>
-          <p:cNvSpPr/>
-          <p:nvPr/>
-        </p:nvSpPr>
-        <p:spPr>
-          <a:xfrm>
-            <a:off x="777240" y="1719072"/>
-            <a:ext cx="1005840" cy="54864"/>
-          </a:xfrm>
-          <a:prstGeom prst="rect">
-            <a:avLst/>
-          </a:prstGeom>
-          <a:solidFill>
-            <a:srgbClr val="0E6FD8"/>
-          </a:solidFill>
-          <a:ln>
-            <a:noFill/>
-          </a:ln>
-          <a:effectLst/>
-        </p:spPr>
-        <p:style>
-          <a:lnRef idx="1">
-            <a:schemeClr val="accent1"/>
-          </a:lnRef>
-          <a:fillRef idx="3">
-            <a:schemeClr val="accent1"/>
-          </a:fillRef>
-          <a:effectRef idx="2">
-            <a:schemeClr val="accent1"/>
-          </a:effectRef>
-          <a:fontRef idx="minor">
-            <a:schemeClr val="lt1"/>
-          </a:fontRef>
-        </p:style>
-        <p:txBody>
-          <a:bodyPr rtlCol="0" anchor="ctr"/>
-          <a:lstStyle/>
-          <a:p>
-            <a:pPr algn="ctr"/>
-          </a:p>
-        </p:txBody>
-      </p:sp>
-      <p:pic>
-        <p:nvPicPr>
-          <p:cNvPr id="6" name="Picture 5" descr="mvp-rede.png"/>
-          <p:cNvPicPr>
-            <a:picLocks noChangeAspect="1"/>
-          </p:cNvPicPr>
-          <p:nvPr/>
-        </p:nvPicPr>
-        <p:blipFill>
-          <a:blip r:embed="rId2"/>
-          <a:stretch>
-            <a:fillRect/>
-          </a:stretch>
-        </p:blipFill>
-        <p:spPr>
-          <a:xfrm>
-            <a:off x="777240" y="2240280"/>
-            <a:ext cx="5120640" cy="4206240"/>
-          </a:xfrm>
-          <a:prstGeom prst="rect">
-            <a:avLst/>
-          </a:prstGeom>
-        </p:spPr>
-      </p:pic>
-      <p:pic>
-        <p:nvPicPr>
-          <p:cNvPr id="7" name="Picture 6" descr="mvp-carteira.png"/>
-          <p:cNvPicPr>
-            <a:picLocks noChangeAspect="1"/>
-          </p:cNvPicPr>
-          <p:nvPr/>
-        </p:nvPicPr>
-        <p:blipFill>
-          <a:blip r:embed="rId3"/>
-          <a:stretch>
-            <a:fillRect/>
-          </a:stretch>
-        </p:blipFill>
-        <p:spPr>
-          <a:xfrm>
-            <a:off x="6263640" y="2240280"/>
-            <a:ext cx="5120640" cy="4206240"/>
-          </a:xfrm>
-          <a:prstGeom prst="rect">
-            <a:avLst/>
-          </a:prstGeom>
-        </p:spPr>
-      </p:pic>
-      <p:sp>
-        <p:nvSpPr>
-          <p:cNvPr id="8" name="TextBox 7"/>
-          <p:cNvSpPr txBox="1"/>
-          <p:nvPr/>
-        </p:nvSpPr>
-        <p:spPr>
-          <a:xfrm>
-            <a:off x="777240" y="5715000"/>
-            <a:ext cx="5120640" cy="365760"/>
-          </a:xfrm>
-          <a:prstGeom prst="rect">
-            <a:avLst/>
-          </a:prstGeom>
-          <a:noFill/>
-        </p:spPr>
-        <p:txBody>
-          <a:bodyPr wrap="square" lIns="0" rIns="0" tIns="0" bIns="0" anchor="t">
-            <a:spAutoFit/>
-          </a:bodyPr>
-          <a:lstStyle/>
-          <a:p>
-            <a:pPr algn="ctr">
-              <a:lnSpc>
-                <a:spcPct val="100000"/>
-              </a:lnSpc>
-            </a:pPr>
-            <a:r>
-              <a:rPr sz="1300" b="0">
-                <a:solidFill>
-                  <a:srgbClr val="49535F"/>
-                </a:solidFill>
-                <a:latin typeface="Trebuchet MS"/>
-              </a:rPr>
-              <a:t>Credenciamento dos negócios pela prefeitura</a:t>
-            </a:r>
-          </a:p>
-        </p:txBody>
-      </p:sp>
-      <p:sp>
-        <p:nvSpPr>
-          <p:cNvPr id="9" name="TextBox 8"/>
-          <p:cNvSpPr txBox="1"/>
-          <p:nvPr/>
-        </p:nvSpPr>
-        <p:spPr>
-          <a:xfrm>
-            <a:off x="6263640" y="5715000"/>
-            <a:ext cx="5120640" cy="365760"/>
-          </a:xfrm>
-          <a:prstGeom prst="rect">
-            <a:avLst/>
-          </a:prstGeom>
-          <a:noFill/>
-        </p:spPr>
-        <p:txBody>
-          <a:bodyPr wrap="square" lIns="0" rIns="0" tIns="0" bIns="0" anchor="t">
-            <a:spAutoFit/>
-          </a:bodyPr>
-          <a:lstStyle/>
-          <a:p>
-            <a:pPr algn="ctr">
-              <a:lnSpc>
-                <a:spcPct val="100000"/>
-              </a:lnSpc>
-            </a:pPr>
-            <a:r>
-              <a:rPr sz="1300" b="0">
-                <a:solidFill>
-                  <a:srgbClr val="49535F"/>
-                </a:solidFill>
-                <a:latin typeface="Trebuchet MS"/>
-              </a:rPr>
-              <a:t>Carteira do morador, sem nome e sem CPF</a:t>
-            </a:r>
-          </a:p>
-        </p:txBody>
-      </p:sp>
-      <p:sp>
-        <p:nvSpPr>
-          <p:cNvPr id="10" name="TextBox 9"/>
-          <p:cNvSpPr txBox="1"/>
-          <p:nvPr/>
-        </p:nvSpPr>
-        <p:spPr>
-          <a:xfrm>
-            <a:off x="777240" y="6327648"/>
-            <a:ext cx="6400800" cy="256032"/>
-          </a:xfrm>
-          <a:prstGeom prst="rect">
-            <a:avLst/>
-          </a:prstGeom>
-          <a:noFill/>
-        </p:spPr>
-        <p:txBody>
-          <a:bodyPr wrap="square" lIns="0" rIns="0" tIns="0" bIns="0" anchor="t">
-            <a:spAutoFit/>
-          </a:bodyPr>
-          <a:lstStyle/>
-          <a:p>
-            <a:pPr algn="l">
-              <a:lnSpc>
-                <a:spcPct val="100000"/>
-              </a:lnSpc>
-            </a:pPr>
-            <a:r>
-              <a:rPr sz="900" b="0">
-                <a:solidFill>
-                  <a:srgbClr val="8A939E"/>
-                </a:solidFill>
-                <a:latin typeface="Trebuchet MS"/>
-              </a:rPr>
-              <a:t>SOU+OLÍMPIA · GRUPO 4 · IDEATHON OLIMPIALAB 2026</a:t>
-            </a:r>
-          </a:p>
-        </p:txBody>
-      </p:sp>
-      <p:sp>
-        <p:nvSpPr>
-          <p:cNvPr id="11" name="TextBox 10"/>
-          <p:cNvSpPr txBox="1"/>
-          <p:nvPr/>
-        </p:nvSpPr>
-        <p:spPr>
-          <a:xfrm>
-            <a:off x="10058400" y="6327648"/>
-            <a:ext cx="1371600" cy="256032"/>
-          </a:xfrm>
-          <a:prstGeom prst="rect">
-            <a:avLst/>
-          </a:prstGeom>
-          <a:noFill/>
-        </p:spPr>
-        <p:txBody>
-          <a:bodyPr wrap="square" lIns="0" rIns="0" tIns="0" bIns="0" anchor="t">
-            <a:spAutoFit/>
-          </a:bodyPr>
-          <a:lstStyle/>
-          <a:p>
-            <a:pPr algn="r">
-              <a:lnSpc>
-                <a:spcPct val="100000"/>
-              </a:lnSpc>
-            </a:pPr>
-            <a:r>
-              <a:rPr sz="900" b="0">
-                <a:solidFill>
-                  <a:srgbClr val="8A939E"/>
-                </a:solidFill>
-                <a:latin typeface="Trebuchet MS"/>
-              </a:rPr>
-              <a:t>13</a:t>
-            </a:r>
-          </a:p>
-        </p:txBody>
-      </p:sp>
-    </p:spTree>
-  </p:cSld>
-  <p:clrMapOvr>
-    <a:masterClrMapping/>
-  </p:clrMapOvr>
-</p:sld>
-</file>
-
-<file path=ppt/slides/slide14.xml><?xml version="1.0" encoding="utf-8"?>
-<p:sld xmlns:a="http://schemas.openxmlformats.org/drawingml/2006/main" xmlns:p="http://schemas.openxmlformats.org/presentationml/2006/main" xmlns:r="http://schemas.openxmlformats.org/officeDocument/2006/relationships">
-  <p:cSld>
-    <p:spTree>
-      <p:nvGrpSpPr>
-        <p:cNvPr id="1" name=""/>
-        <p:cNvGrpSpPr/>
-        <p:nvPr/>
-      </p:nvGrpSpPr>
-      <p:grpSpPr/>
-      <p:sp>
-        <p:nvSpPr>
-          <p:cNvPr id="2" name="Rectangle 1"/>
-          <p:cNvSpPr/>
-          <p:nvPr/>
-        </p:nvSpPr>
-        <p:spPr>
-          <a:xfrm>
-            <a:off x="0" y="0"/>
-            <a:ext cx="12191695" cy="6858000"/>
-          </a:xfrm>
-          <a:prstGeom prst="rect">
-            <a:avLst/>
-          </a:prstGeom>
-          <a:solidFill>
-            <a:srgbClr val="FFFFFF"/>
-          </a:solidFill>
-          <a:ln>
-            <a:noFill/>
-          </a:ln>
-          <a:effectLst/>
-        </p:spPr>
-        <p:style>
-          <a:lnRef idx="1">
-            <a:schemeClr val="accent1"/>
-          </a:lnRef>
-          <a:fillRef idx="3">
-            <a:schemeClr val="accent1"/>
-          </a:fillRef>
-          <a:effectRef idx="2">
-            <a:schemeClr val="accent1"/>
-          </a:effectRef>
-          <a:fontRef idx="minor">
-            <a:schemeClr val="lt1"/>
-          </a:fontRef>
-        </p:style>
-        <p:txBody>
-          <a:bodyPr rtlCol="0" anchor="ctr"/>
-          <a:lstStyle/>
-          <a:p>
-            <a:pPr algn="ctr"/>
-          </a:p>
-        </p:txBody>
-      </p:sp>
-      <p:sp>
-        <p:nvSpPr>
-          <p:cNvPr id="3" name="Rectangle 2"/>
-          <p:cNvSpPr/>
-          <p:nvPr/>
-        </p:nvSpPr>
-        <p:spPr>
-          <a:xfrm>
-            <a:off x="0" y="0"/>
-            <a:ext cx="12191695" cy="201168"/>
-          </a:xfrm>
-          <a:prstGeom prst="rect">
-            <a:avLst/>
-          </a:prstGeom>
-          <a:solidFill>
-            <a:srgbClr val="0E6FD8"/>
-          </a:solidFill>
-          <a:ln>
-            <a:noFill/>
-          </a:ln>
-          <a:effectLst/>
-        </p:spPr>
-        <p:style>
-          <a:lnRef idx="1">
-            <a:schemeClr val="accent1"/>
-          </a:lnRef>
-          <a:fillRef idx="3">
-            <a:schemeClr val="accent1"/>
-          </a:fillRef>
-          <a:effectRef idx="2">
-            <a:schemeClr val="accent1"/>
-          </a:effectRef>
-          <a:fontRef idx="minor">
-            <a:schemeClr val="lt1"/>
-          </a:fontRef>
-        </p:style>
-        <p:txBody>
-          <a:bodyPr rtlCol="0" anchor="ctr"/>
-          <a:lstStyle/>
-          <a:p>
-            <a:pPr algn="ctr"/>
-          </a:p>
-        </p:txBody>
-      </p:sp>
-      <p:pic>
-        <p:nvPicPr>
-          <p:cNvPr id="4" name="Picture 3" descr="logo.jpg"/>
-          <p:cNvPicPr>
-            <a:picLocks noChangeAspect="1"/>
-          </p:cNvPicPr>
-          <p:nvPr/>
-        </p:nvPicPr>
-        <p:blipFill>
-          <a:blip r:embed="rId2"/>
-          <a:stretch>
-            <a:fillRect/>
-          </a:stretch>
-        </p:blipFill>
-        <p:spPr>
-          <a:xfrm>
-            <a:off x="914400" y="868680"/>
-            <a:ext cx="3511296" cy="1371600"/>
-          </a:xfrm>
-          <a:prstGeom prst="rect">
-            <a:avLst/>
-          </a:prstGeom>
-        </p:spPr>
-      </p:pic>
-      <p:sp>
-        <p:nvSpPr>
-          <p:cNvPr id="5" name="TextBox 4"/>
-          <p:cNvSpPr txBox="1"/>
-          <p:nvPr/>
-        </p:nvSpPr>
-        <p:spPr>
-          <a:xfrm>
-            <a:off x="914400" y="2651760"/>
-            <a:ext cx="10058400" cy="1737360"/>
-          </a:xfrm>
-          <a:prstGeom prst="rect">
-            <a:avLst/>
-          </a:prstGeom>
-          <a:noFill/>
-        </p:spPr>
-        <p:txBody>
-          <a:bodyPr wrap="square" lIns="0" rIns="0" tIns="0" bIns="0" anchor="t">
-            <a:spAutoFit/>
-          </a:bodyPr>
-          <a:lstStyle/>
-          <a:p>
-            <a:pPr algn="l">
-              <a:lnSpc>
-                <a:spcPct val="125000"/>
-              </a:lnSpc>
-            </a:pPr>
-            <a:r>
-              <a:rPr sz="2600" b="1">
-                <a:solidFill>
-                  <a:srgbClr val="10151C"/>
-                </a:solidFill>
-                <a:latin typeface="Trebuchet MS"/>
-              </a:rPr>
-              <a:t>“Olímpia fatura 26% do seu ano de serviços em dois meses.</a:t>
-            </a:r>
-          </a:p>
-          <a:p>
-            <a:pPr algn="l">
-              <a:lnSpc>
-                <a:spcPct val="125000"/>
-              </a:lnSpc>
-            </a:pPr>
-            <a:r>
-              <a:rPr sz="2600" b="1">
-                <a:solidFill>
-                  <a:srgbClr val="10151C"/>
-                </a:solidFill>
-                <a:latin typeface="Trebuchet MS"/>
-              </a:rPr>
-              <a:t>Medimos isso com o ISS mensal do Tesouro Nacional — e descobrimos</a:t>
-            </a:r>
-          </a:p>
-          <a:p>
-            <a:pPr algn="l">
-              <a:lnSpc>
-                <a:spcPct val="125000"/>
-              </a:lnSpc>
-            </a:pPr>
-            <a:r>
-              <a:rPr sz="2600" b="1">
-                <a:solidFill>
-                  <a:srgbClr val="10151C"/>
-                </a:solidFill>
-                <a:latin typeface="Trebuchet MS"/>
-              </a:rPr>
-              <a:t>que o problema não é falta de cliente. É falta de uma camada que</a:t>
-            </a:r>
-          </a:p>
-          <a:p>
-            <a:pPr algn="l">
-              <a:lnSpc>
-                <a:spcPct val="125000"/>
-              </a:lnSpc>
-            </a:pPr>
-            <a:r>
-              <a:rPr sz="2600" b="1">
-                <a:solidFill>
-                  <a:srgbClr val="10151C"/>
-                </a:solidFill>
-                <a:latin typeface="Trebuchet MS"/>
-              </a:rPr>
-              <a:t>permita os negócios da cidade agirem juntos.”</a:t>
-            </a:r>
-          </a:p>
-        </p:txBody>
-      </p:sp>
-      <p:sp>
-        <p:nvSpPr>
-          <p:cNvPr id="6" name="Rounded Rectangle 5"/>
-          <p:cNvSpPr/>
-          <p:nvPr/>
-        </p:nvSpPr>
-        <p:spPr>
-          <a:xfrm>
-            <a:off x="914400" y="4709160"/>
-            <a:ext cx="10332720" cy="960120"/>
-          </a:xfrm>
-          <a:prstGeom prst="roundRect">
-            <a:avLst>
-              <a:gd name="adj" fmla="val 8000"/>
-            </a:avLst>
-          </a:prstGeom>
-          <a:solidFill>
-            <a:srgbClr val="E7F1FD"/>
-          </a:solidFill>
-          <a:ln>
-            <a:noFill/>
-          </a:ln>
-          <a:effectLst/>
-        </p:spPr>
-        <p:style>
-          <a:lnRef idx="1">
-            <a:schemeClr val="accent1"/>
-          </a:lnRef>
-          <a:fillRef idx="3">
-            <a:schemeClr val="accent1"/>
-          </a:fillRef>
-          <a:effectRef idx="2">
-            <a:schemeClr val="accent1"/>
-          </a:effectRef>
-          <a:fontRef idx="minor">
-            <a:schemeClr val="lt1"/>
-          </a:fontRef>
-        </p:style>
-        <p:txBody>
-          <a:bodyPr rtlCol="0" anchor="ctr"/>
-          <a:lstStyle/>
-          <a:p/>
-        </p:txBody>
-      </p:sp>
-      <p:sp>
-        <p:nvSpPr>
-          <p:cNvPr id="7" name="TextBox 6"/>
-          <p:cNvSpPr txBox="1"/>
-          <p:nvPr/>
-        </p:nvSpPr>
-        <p:spPr>
-          <a:xfrm>
-            <a:off x="1234440" y="4956048"/>
-            <a:ext cx="9784080" cy="548640"/>
-          </a:xfrm>
-          <a:prstGeom prst="rect">
-            <a:avLst/>
-          </a:prstGeom>
-          <a:noFill/>
-        </p:spPr>
-        <p:txBody>
-          <a:bodyPr wrap="square" lIns="0" rIns="0" tIns="0" bIns="0" anchor="t">
-            <a:spAutoFit/>
-          </a:bodyPr>
-          <a:lstStyle/>
-          <a:p>
-            <a:pPr algn="l">
-              <a:lnSpc>
-                <a:spcPct val="120000"/>
-              </a:lnSpc>
-            </a:pPr>
-            <a:r>
-              <a:rPr sz="1600" b="1">
-                <a:solidFill>
-                  <a:srgbClr val="0A4C96"/>
-                </a:solidFill>
-                <a:latin typeface="Trebuchet MS"/>
-              </a:rPr>
-              <a:t>Sou+Olímpia · a rede de confiança que a cidade ainda não tem — e o programa de circulação que roda em cima dela.</a:t>
-            </a:r>
-          </a:p>
-        </p:txBody>
-      </p:sp>
-      <p:sp>
-        <p:nvSpPr>
-          <p:cNvPr id="8" name="TextBox 7"/>
-          <p:cNvSpPr txBox="1"/>
-          <p:nvPr/>
-        </p:nvSpPr>
-        <p:spPr>
-          <a:xfrm>
-            <a:off x="914400" y="5943600"/>
-            <a:ext cx="10332720" cy="274320"/>
+            <a:off x="5394960" y="5678424"/>
+            <a:ext cx="5669280" cy="365760"/>
           </a:xfrm>
           <a:prstGeom prst="rect">
             <a:avLst/>
@@ -6039,7 +3536,7 @@
                 </a:solidFill>
                 <a:latin typeface="Trebuchet MS"/>
               </a:rPr>
-              <a:t>O PROBLEMA, MEDIDO</a:t>
+              <a:t>O PROBLEMA, MEDIDO POR NÓS</a:t>
             </a:r>
           </a:p>
         </p:txBody>
@@ -6151,7 +3648,7 @@
         </p:nvSpPr>
         <p:spPr>
           <a:xfrm>
-            <a:off x="777240" y="3332181"/>
+            <a:off x="777240" y="3359075"/>
             <a:ext cx="10607040" cy="13716"/>
           </a:xfrm>
           <a:prstGeom prst="rect">
@@ -6195,8 +3692,8 @@
         </p:nvSpPr>
         <p:spPr>
           <a:xfrm>
-            <a:off x="9921240" y="3057861"/>
-            <a:ext cx="1463040" cy="228600"/>
+            <a:off x="9829800" y="3084755"/>
+            <a:ext cx="1554480" cy="228600"/>
           </a:xfrm>
           <a:prstGeom prst="rect">
             <a:avLst/>
@@ -6234,8 +3731,8 @@
         </p:nvSpPr>
         <p:spPr>
           <a:xfrm>
-            <a:off x="841247" y="2536653"/>
-            <a:ext cx="755904" cy="2355386"/>
+            <a:off x="841247" y="2577263"/>
+            <a:ext cx="755904" cy="2314776"/>
           </a:xfrm>
           <a:prstGeom prst="roundRect">
             <a:avLst>
@@ -6280,7 +3777,7 @@
         </p:nvSpPr>
         <p:spPr>
           <a:xfrm>
-            <a:off x="777240" y="2244045"/>
+            <a:off x="777240" y="2284655"/>
             <a:ext cx="883920" cy="256032"/>
           </a:xfrm>
           <a:prstGeom prst="rect">
@@ -6358,8 +3855,8 @@
         </p:nvSpPr>
         <p:spPr>
           <a:xfrm>
-            <a:off x="1725168" y="3628554"/>
-            <a:ext cx="755904" cy="1263485"/>
+            <a:off x="1725168" y="3650338"/>
+            <a:ext cx="755904" cy="1241701"/>
           </a:xfrm>
           <a:prstGeom prst="roundRect">
             <a:avLst>
@@ -6404,7 +3901,7 @@
         </p:nvSpPr>
         <p:spPr>
           <a:xfrm>
-            <a:off x="1661160" y="3335946"/>
+            <a:off x="1661160" y="3357730"/>
             <a:ext cx="883920" cy="256032"/>
           </a:xfrm>
           <a:prstGeom prst="rect">
@@ -6482,8 +3979,8 @@
         </p:nvSpPr>
         <p:spPr>
           <a:xfrm>
-            <a:off x="2609087" y="3644152"/>
-            <a:ext cx="755904" cy="1247887"/>
+            <a:off x="2609087" y="3665668"/>
+            <a:ext cx="755904" cy="1226371"/>
           </a:xfrm>
           <a:prstGeom prst="roundRect">
             <a:avLst>
@@ -6528,7 +4025,7 @@
         </p:nvSpPr>
         <p:spPr>
           <a:xfrm>
-            <a:off x="2545080" y="3351544"/>
+            <a:off x="2545080" y="3373060"/>
             <a:ext cx="883920" cy="256032"/>
           </a:xfrm>
           <a:prstGeom prst="rect">
@@ -6606,8 +4103,8 @@
         </p:nvSpPr>
         <p:spPr>
           <a:xfrm>
-            <a:off x="3493008" y="3456969"/>
-            <a:ext cx="755904" cy="1435070"/>
+            <a:off x="3493008" y="3481712"/>
+            <a:ext cx="755904" cy="1410327"/>
           </a:xfrm>
           <a:prstGeom prst="roundRect">
             <a:avLst>
@@ -6652,7 +4149,7 @@
         </p:nvSpPr>
         <p:spPr>
           <a:xfrm>
-            <a:off x="3429000" y="3164361"/>
+            <a:off x="3429000" y="3189104"/>
             <a:ext cx="883920" cy="256032"/>
           </a:xfrm>
           <a:prstGeom prst="rect">
@@ -6730,8 +4227,8 @@
         </p:nvSpPr>
         <p:spPr>
           <a:xfrm>
-            <a:off x="4376928" y="3690948"/>
-            <a:ext cx="755904" cy="1201091"/>
+            <a:off x="4376928" y="3711657"/>
+            <a:ext cx="755904" cy="1180382"/>
           </a:xfrm>
           <a:prstGeom prst="roundRect">
             <a:avLst>
@@ -6776,7 +4273,7 @@
         </p:nvSpPr>
         <p:spPr>
           <a:xfrm>
-            <a:off x="4312920" y="3398340"/>
+            <a:off x="4312920" y="3419049"/>
             <a:ext cx="883920" cy="256032"/>
           </a:xfrm>
           <a:prstGeom prst="rect">
@@ -6854,8 +4351,8 @@
         </p:nvSpPr>
         <p:spPr>
           <a:xfrm>
-            <a:off x="5260848" y="3675350"/>
-            <a:ext cx="755904" cy="1216689"/>
+            <a:off x="5260848" y="3696327"/>
+            <a:ext cx="755904" cy="1195712"/>
           </a:xfrm>
           <a:prstGeom prst="roundRect">
             <a:avLst>
@@ -6900,7 +4397,7 @@
         </p:nvSpPr>
         <p:spPr>
           <a:xfrm>
-            <a:off x="5196839" y="3382742"/>
+            <a:off x="5196839" y="3403719"/>
             <a:ext cx="883920" cy="256032"/>
           </a:xfrm>
           <a:prstGeom prst="rect">
@@ -6978,8 +4475,8 @@
         </p:nvSpPr>
         <p:spPr>
           <a:xfrm>
-            <a:off x="6144768" y="2614646"/>
-            <a:ext cx="755904" cy="2277393"/>
+            <a:off x="6144768" y="2653911"/>
+            <a:ext cx="755904" cy="2238128"/>
           </a:xfrm>
           <a:prstGeom prst="roundRect">
             <a:avLst>
@@ -7024,7 +4521,7 @@
         </p:nvSpPr>
         <p:spPr>
           <a:xfrm>
-            <a:off x="6080759" y="2322038"/>
+            <a:off x="6080759" y="2361303"/>
             <a:ext cx="883920" cy="256032"/>
           </a:xfrm>
           <a:prstGeom prst="rect">
@@ -7102,8 +4599,8 @@
         </p:nvSpPr>
         <p:spPr>
           <a:xfrm>
-            <a:off x="7028688" y="3534962"/>
-            <a:ext cx="755904" cy="1357077"/>
+            <a:off x="7028688" y="3558360"/>
+            <a:ext cx="755904" cy="1333679"/>
           </a:xfrm>
           <a:prstGeom prst="roundRect">
             <a:avLst>
@@ -7148,7 +4645,7 @@
         </p:nvSpPr>
         <p:spPr>
           <a:xfrm>
-            <a:off x="6964680" y="3242354"/>
+            <a:off x="6964680" y="3265752"/>
             <a:ext cx="883920" cy="256032"/>
           </a:xfrm>
           <a:prstGeom prst="rect">
@@ -7226,8 +4723,8 @@
         </p:nvSpPr>
         <p:spPr>
           <a:xfrm>
-            <a:off x="7912608" y="3472568"/>
-            <a:ext cx="755904" cy="1419471"/>
+            <a:off x="7912608" y="3497042"/>
+            <a:ext cx="755904" cy="1394997"/>
           </a:xfrm>
           <a:prstGeom prst="roundRect">
             <a:avLst>
@@ -7272,7 +4769,7 @@
         </p:nvSpPr>
         <p:spPr>
           <a:xfrm>
-            <a:off x="7848600" y="3179960"/>
+            <a:off x="7848600" y="3204434"/>
             <a:ext cx="883920" cy="256032"/>
           </a:xfrm>
           <a:prstGeom prst="rect">
@@ -7350,8 +4847,8 @@
         </p:nvSpPr>
         <p:spPr>
           <a:xfrm>
-            <a:off x="8796528" y="3098202"/>
-            <a:ext cx="755904" cy="1793837"/>
+            <a:off x="8796528" y="3129130"/>
+            <a:ext cx="755904" cy="1762909"/>
           </a:xfrm>
           <a:prstGeom prst="roundRect">
             <a:avLst>
@@ -7396,7 +4893,7 @@
         </p:nvSpPr>
         <p:spPr>
           <a:xfrm>
-            <a:off x="8732519" y="2805594"/>
+            <a:off x="8732519" y="2836522"/>
             <a:ext cx="883920" cy="256032"/>
           </a:xfrm>
           <a:prstGeom prst="rect">
@@ -7474,8 +4971,8 @@
         </p:nvSpPr>
         <p:spPr>
           <a:xfrm>
-            <a:off x="9680448" y="3441371"/>
-            <a:ext cx="755904" cy="1450668"/>
+            <a:off x="9680448" y="3466382"/>
+            <a:ext cx="755904" cy="1425657"/>
           </a:xfrm>
           <a:prstGeom prst="roundRect">
             <a:avLst>
@@ -7520,7 +5017,7 @@
         </p:nvSpPr>
         <p:spPr>
           <a:xfrm>
-            <a:off x="9616440" y="3148763"/>
+            <a:off x="9616440" y="3173774"/>
             <a:ext cx="883920" cy="256032"/>
           </a:xfrm>
           <a:prstGeom prst="rect">
@@ -7598,8 +5095,8 @@
         </p:nvSpPr>
         <p:spPr>
           <a:xfrm>
-            <a:off x="10564368" y="3269786"/>
-            <a:ext cx="755904" cy="1622253"/>
+            <a:off x="10564368" y="3297756"/>
+            <a:ext cx="755904" cy="1594283"/>
           </a:xfrm>
           <a:prstGeom prst="roundRect">
             <a:avLst>
@@ -7644,7 +5141,7 @@
         </p:nvSpPr>
         <p:spPr>
           <a:xfrm>
-            <a:off x="10500360" y="2977178"/>
+            <a:off x="10500360" y="3005148"/>
             <a:ext cx="883920" cy="256032"/>
           </a:xfrm>
           <a:prstGeom prst="rect">
@@ -7722,8 +5219,8 @@
         </p:nvSpPr>
         <p:spPr>
           <a:xfrm>
-            <a:off x="777240" y="5349240"/>
-            <a:ext cx="10607040" cy="731520"/>
+            <a:off x="777240" y="5394960"/>
+            <a:ext cx="10607040" cy="777240"/>
           </a:xfrm>
           <a:prstGeom prst="rect">
             <a:avLst/>
@@ -7742,13 +5239,13 @@
               </a:lnSpc>
             </a:pPr>
             <a:r>
-              <a:rPr sz="1400" b="0">
+              <a:rPr sz="1450" b="0">
                 <a:solidFill>
                   <a:srgbClr val="49535F"/>
                 </a:solidFill>
                 <a:latin typeface="Trebuchet MS"/>
               </a:rPr>
-              <a:t>Índice sazonal do ISS, 2023–2025, série que nós construímos a partir da API do Tesouro Nacional.</a:t>
+              <a:t>Índice sazonal do ISS, 36 meses, construído por nós a partir da API do Tesouro Nacional.</a:t>
             </a:r>
           </a:p>
           <a:p>
@@ -7758,7 +5255,7 @@
               </a:lnSpc>
             </a:pPr>
             <a:r>
-              <a:rPr sz="1400" b="0">
+              <a:rPr sz="1450" b="0">
                 <a:solidFill>
                   <a:srgbClr val="49535F"/>
                 </a:solidFill>
@@ -8039,8 +5536,8 @@
         </p:nvSpPr>
         <p:spPr>
           <a:xfrm>
-            <a:off x="777240" y="2148840"/>
-            <a:ext cx="10607040" cy="621792"/>
+            <a:off x="777240" y="2194560"/>
+            <a:ext cx="10607040" cy="603504"/>
           </a:xfrm>
           <a:prstGeom prst="roundRect">
             <a:avLst>
@@ -8085,7 +5582,7 @@
         </p:nvSpPr>
         <p:spPr>
           <a:xfrm>
-            <a:off x="960120" y="2304288"/>
+            <a:off x="960120" y="2340864"/>
             <a:ext cx="310896" cy="310896"/>
           </a:xfrm>
           <a:prstGeom prst="ellipse">
@@ -8129,7 +5626,7 @@
         </p:nvSpPr>
         <p:spPr>
           <a:xfrm>
-            <a:off x="960120" y="2350008"/>
+            <a:off x="960120" y="2386584"/>
             <a:ext cx="310896" cy="228600"/>
           </a:xfrm>
           <a:prstGeom prst="rect">
@@ -8168,7 +5665,7 @@
         </p:nvSpPr>
         <p:spPr>
           <a:xfrm>
-            <a:off x="1417320" y="2258568"/>
+            <a:off x="1417320" y="2295144"/>
             <a:ext cx="5120640" cy="274320"/>
           </a:xfrm>
           <a:prstGeom prst="rect">
@@ -8207,7 +5704,7 @@
         </p:nvSpPr>
         <p:spPr>
           <a:xfrm>
-            <a:off x="6583680" y="2286000"/>
+            <a:off x="6583680" y="2322576"/>
             <a:ext cx="4617720" cy="365760"/>
           </a:xfrm>
           <a:prstGeom prst="rect">
@@ -8233,7 +5730,7 @@
                 </a:solidFill>
                 <a:latin typeface="Trebuchet MS"/>
               </a:rPr>
-              <a:t>índice 1,51 em janeiro contra 0,77 em maio</a:t>
+              <a:t>1,51 em janeiro contra 0,77 em maio</a:t>
             </a:r>
           </a:p>
         </p:txBody>
@@ -8246,8 +5743,8 @@
         </p:nvSpPr>
         <p:spPr>
           <a:xfrm>
-            <a:off x="777240" y="2862072"/>
-            <a:ext cx="10607040" cy="621792"/>
+            <a:off x="777240" y="2889504"/>
+            <a:ext cx="10607040" cy="603504"/>
           </a:xfrm>
           <a:prstGeom prst="roundRect">
             <a:avLst>
@@ -8292,7 +5789,7 @@
         </p:nvSpPr>
         <p:spPr>
           <a:xfrm>
-            <a:off x="960120" y="3017520"/>
+            <a:off x="960120" y="3035808"/>
             <a:ext cx="310896" cy="310896"/>
           </a:xfrm>
           <a:prstGeom prst="ellipse">
@@ -8336,7 +5833,7 @@
         </p:nvSpPr>
         <p:spPr>
           <a:xfrm>
-            <a:off x="960120" y="3063240"/>
+            <a:off x="960120" y="3081528"/>
             <a:ext cx="310896" cy="228600"/>
           </a:xfrm>
           <a:prstGeom prst="rect">
@@ -8375,7 +5872,7 @@
         </p:nvSpPr>
         <p:spPr>
           <a:xfrm>
-            <a:off x="1417320" y="2971800"/>
+            <a:off x="1417320" y="2990088"/>
             <a:ext cx="5120640" cy="274320"/>
           </a:xfrm>
           <a:prstGeom prst="rect">
@@ -8414,7 +5911,7 @@
         </p:nvSpPr>
         <p:spPr>
           <a:xfrm>
-            <a:off x="6583680" y="2999232"/>
+            <a:off x="6583680" y="3017520"/>
             <a:ext cx="4617720" cy="365760"/>
           </a:xfrm>
           <a:prstGeom prst="rect">
@@ -8440,7 +5937,7 @@
                 </a:solidFill>
                 <a:latin typeface="Trebuchet MS"/>
               </a:rPr>
-              <a:t>feriado não resolve: Carnaval tem 80,6% de ocupação e cai num mês de 0,81</a:t>
+              <a:t>Carnaval tem 80,6% de ocupação e cai num mês de 0,81</a:t>
             </a:r>
           </a:p>
         </p:txBody>
@@ -8453,8 +5950,8 @@
         </p:nvSpPr>
         <p:spPr>
           <a:xfrm>
-            <a:off x="777240" y="3575304"/>
-            <a:ext cx="10607040" cy="621792"/>
+            <a:off x="777240" y="3584448"/>
+            <a:ext cx="10607040" cy="603504"/>
           </a:xfrm>
           <a:prstGeom prst="roundRect">
             <a:avLst>
@@ -8621,7 +6118,7 @@
         </p:nvSpPr>
         <p:spPr>
           <a:xfrm>
-            <a:off x="6583680" y="3712464"/>
+            <a:off x="6583680" y="3712463"/>
             <a:ext cx="4617720" cy="365760"/>
           </a:xfrm>
           <a:prstGeom prst="rect">
@@ -8647,7 +6144,7 @@
                 </a:solidFill>
                 <a:latin typeface="Trebuchet MS"/>
               </a:rPr>
-              <a:t>seria preciso R$ 3.278 a 8.195 a mais por domicílio por mês</a:t>
+              <a:t>seriam R$ 3.278 a 8.195 a mais por domicílio por mês</a:t>
             </a:r>
           </a:p>
         </p:txBody>
@@ -8660,8 +6157,8 @@
         </p:nvSpPr>
         <p:spPr>
           <a:xfrm>
-            <a:off x="777240" y="4288536"/>
-            <a:ext cx="10607040" cy="621792"/>
+            <a:off x="777240" y="4279392"/>
+            <a:ext cx="10607040" cy="603504"/>
           </a:xfrm>
           <a:prstGeom prst="roundRect">
             <a:avLst>
@@ -8706,7 +6203,7 @@
         </p:nvSpPr>
         <p:spPr>
           <a:xfrm>
-            <a:off x="960120" y="4443984"/>
+            <a:off x="960120" y="4425696"/>
             <a:ext cx="310896" cy="310896"/>
           </a:xfrm>
           <a:prstGeom prst="ellipse">
@@ -8750,7 +6247,7 @@
         </p:nvSpPr>
         <p:spPr>
           <a:xfrm>
-            <a:off x="960120" y="4489704"/>
+            <a:off x="960120" y="4471416"/>
             <a:ext cx="310896" cy="228600"/>
           </a:xfrm>
           <a:prstGeom prst="rect">
@@ -8789,7 +6286,7 @@
         </p:nvSpPr>
         <p:spPr>
           <a:xfrm>
-            <a:off x="1417320" y="4398264"/>
+            <a:off x="1417320" y="4379976"/>
             <a:ext cx="5120640" cy="274320"/>
           </a:xfrm>
           <a:prstGeom prst="rect">
@@ -8828,7 +6325,7 @@
         </p:nvSpPr>
         <p:spPr>
           <a:xfrm>
-            <a:off x="6583680" y="4425696"/>
+            <a:off x="6583680" y="4407407"/>
             <a:ext cx="4617720" cy="365760"/>
           </a:xfrm>
           <a:prstGeom prst="rect">
@@ -8854,7 +6351,7 @@
                 </a:solidFill>
                 <a:latin typeface="Trebuchet MS"/>
               </a:rPr>
-              <a:t>campanha que manda o cliente de uma loja para outra</a:t>
+              <a:t>campanha que manda o cliente de uma casa para outra</a:t>
             </a:r>
           </a:p>
         </p:txBody>
@@ -8867,8 +6364,8 @@
         </p:nvSpPr>
         <p:spPr>
           <a:xfrm>
-            <a:off x="777240" y="5001768"/>
-            <a:ext cx="10607040" cy="621792"/>
+            <a:off x="777240" y="4974336"/>
+            <a:ext cx="10607040" cy="603504"/>
           </a:xfrm>
           <a:prstGeom prst="roundRect">
             <a:avLst>
@@ -8913,7 +6410,7 @@
         </p:nvSpPr>
         <p:spPr>
           <a:xfrm>
-            <a:off x="960120" y="5157216"/>
+            <a:off x="960120" y="5120640"/>
             <a:ext cx="310896" cy="310896"/>
           </a:xfrm>
           <a:prstGeom prst="ellipse">
@@ -8957,7 +6454,7 @@
         </p:nvSpPr>
         <p:spPr>
           <a:xfrm>
-            <a:off x="960120" y="5202936"/>
+            <a:off x="960120" y="5166359"/>
             <a:ext cx="310896" cy="228600"/>
           </a:xfrm>
           <a:prstGeom prst="rect">
@@ -8996,7 +6493,7 @@
         </p:nvSpPr>
         <p:spPr>
           <a:xfrm>
-            <a:off x="1417320" y="5111496"/>
+            <a:off x="1417320" y="5074920"/>
             <a:ext cx="5120640" cy="274320"/>
           </a:xfrm>
           <a:prstGeom prst="rect">
@@ -9035,7 +6532,7 @@
         </p:nvSpPr>
         <p:spPr>
           <a:xfrm>
-            <a:off x="6583680" y="5138928"/>
+            <a:off x="6583680" y="5102351"/>
             <a:ext cx="4617720" cy="365760"/>
           </a:xfrm>
           <a:prstGeom prst="rect">
@@ -9074,8 +6571,8 @@
         </p:nvSpPr>
         <p:spPr>
           <a:xfrm>
-            <a:off x="777240" y="5824728"/>
-            <a:ext cx="10607040" cy="713232"/>
+            <a:off x="777240" y="5797295"/>
+            <a:ext cx="10607040" cy="731520"/>
           </a:xfrm>
           <a:prstGeom prst="roundRect">
             <a:avLst>
@@ -9118,7 +6615,7 @@
         </p:nvSpPr>
         <p:spPr>
           <a:xfrm>
-            <a:off x="1051560" y="5989320"/>
+            <a:off x="1051560" y="5971031"/>
             <a:ext cx="10058400" cy="384048"/>
           </a:xfrm>
           <a:prstGeom prst="rect">
@@ -9362,7 +6859,7 @@
                 </a:solidFill>
                 <a:latin typeface="Trebuchet MS"/>
               </a:rPr>
-              <a:t>Sou+Olímpia</a:t>
+              <a:t>Sou+Olímpia — a rede primeiro</a:t>
             </a:r>
           </a:p>
         </p:txBody>
@@ -9445,7 +6942,7 @@
                 </a:solidFill>
                 <a:latin typeface="Trebuchet MS"/>
               </a:rPr>
-              <a:t>Uma camada de interoperabilidade entre os negócios da cidade. Cada negócio recebe uma credencial verificável; cada morador, a sua. Qualquer negócio emite um registro assinado — e qualquer outro verifica, sozinho, sem consultar ninguém.</a:t>
+              <a:t>A prefeitura assina a credencial de cada negócio. A partir daí, qualquer um emite registros assinados e qualquer outro verifica sozinho, sem consultar o emissor e sem planilha central.</a:t>
             </a:r>
           </a:p>
         </p:txBody>
@@ -9458,8 +6955,8 @@
         </p:nvSpPr>
         <p:spPr>
           <a:xfrm>
-            <a:off x="777240" y="3200400"/>
-            <a:ext cx="3337560" cy="2148840"/>
+            <a:off x="777240" y="3017520"/>
+            <a:ext cx="2377440" cy="1828800"/>
           </a:xfrm>
           <a:prstGeom prst="roundRect">
             <a:avLst>
@@ -9498,45 +6995,40 @@
       </p:sp>
       <p:sp>
         <p:nvSpPr>
-          <p:cNvPr id="8" name="Rectangle 7"/>
-          <p:cNvSpPr/>
-          <p:nvPr/>
-        </p:nvSpPr>
-        <p:spPr>
-          <a:xfrm>
-            <a:off x="777240" y="3200400"/>
-            <a:ext cx="3337560" cy="91440"/>
-          </a:xfrm>
-          <a:prstGeom prst="rect">
-            <a:avLst/>
-          </a:prstGeom>
-          <a:solidFill>
-            <a:srgbClr val="0E6FD8"/>
-          </a:solidFill>
-          <a:ln>
-            <a:noFill/>
-          </a:ln>
-          <a:effectLst/>
-        </p:spPr>
-        <p:style>
-          <a:lnRef idx="1">
-            <a:schemeClr val="accent1"/>
-          </a:lnRef>
-          <a:fillRef idx="3">
-            <a:schemeClr val="accent1"/>
-          </a:fillRef>
-          <a:effectRef idx="2">
-            <a:schemeClr val="accent1"/>
-          </a:effectRef>
-          <a:fontRef idx="minor">
-            <a:schemeClr val="lt1"/>
-          </a:fontRef>
-        </p:style>
-        <p:txBody>
-          <a:bodyPr rtlCol="0" anchor="ctr"/>
-          <a:lstStyle/>
-          <a:p>
-            <a:pPr algn="ctr"/>
+          <p:cNvPr id="8" name="TextBox 7"/>
+          <p:cNvSpPr txBox="1"/>
+          <p:nvPr/>
+        </p:nvSpPr>
+        <p:spPr>
+          <a:xfrm>
+            <a:off x="1005840" y="3218688"/>
+            <a:ext cx="1965960" cy="274320"/>
+          </a:xfrm>
+          <a:prstGeom prst="rect">
+            <a:avLst/>
+          </a:prstGeom>
+          <a:noFill/>
+        </p:spPr>
+        <p:txBody>
+          <a:bodyPr wrap="square" lIns="0" rIns="0" tIns="0" bIns="0" anchor="t">
+            <a:spAutoFit/>
+          </a:bodyPr>
+          <a:lstStyle/>
+          <a:p>
+            <a:pPr algn="l">
+              <a:lnSpc>
+                <a:spcPct val="100000"/>
+              </a:lnSpc>
+            </a:pPr>
+            <a:r>
+              <a:rPr sz="1050" b="1">
+                <a:solidFill>
+                  <a:srgbClr val="D62718"/>
+                </a:solidFill>
+                <a:latin typeface="Trebuchet MS"/>
+              </a:rPr>
+              <a:t>RESTAURANTE A</a:t>
+            </a:r>
           </a:p>
         </p:txBody>
       </p:sp>
@@ -9548,8 +7040,8 @@
         </p:nvSpPr>
         <p:spPr>
           <a:xfrm>
-            <a:off x="1051560" y="3520440"/>
-            <a:ext cx="2788920" cy="365760"/>
+            <a:off x="1005840" y="3566160"/>
+            <a:ext cx="1965960" cy="1188720"/>
           </a:xfrm>
           <a:prstGeom prst="rect">
             <a:avLst/>
@@ -9564,56 +7056,88 @@
           <a:p>
             <a:pPr algn="l">
               <a:lnSpc>
+                <a:spcPct val="125000"/>
+              </a:lnSpc>
+            </a:pPr>
+            <a:r>
+              <a:rPr sz="1350" b="0">
+                <a:solidFill>
+                  <a:srgbClr val="10151C"/>
+                </a:solidFill>
+                <a:latin typeface="Trebuchet MS"/>
+              </a:rPr>
+              <a:t>Emite um carimbo</a:t>
+            </a:r>
+          </a:p>
+          <a:p>
+            <a:pPr algn="l">
+              <a:lnSpc>
+                <a:spcPct val="125000"/>
+              </a:lnSpc>
+            </a:pPr>
+            <a:r>
+              <a:rPr sz="1350" b="0">
+                <a:solidFill>
+                  <a:srgbClr val="10151C"/>
+                </a:solidFill>
+                <a:latin typeface="Trebuchet MS"/>
+              </a:rPr>
+              <a:t>assinado com a</a:t>
+            </a:r>
+          </a:p>
+          <a:p>
+            <a:pPr algn="l">
+              <a:lnSpc>
+                <a:spcPct val="125000"/>
+              </a:lnSpc>
+            </a:pPr>
+            <a:r>
+              <a:rPr sz="1350" b="0">
+                <a:solidFill>
+                  <a:srgbClr val="10151C"/>
+                </a:solidFill>
+                <a:latin typeface="Trebuchet MS"/>
+              </a:rPr>
+              <a:t>própria chave</a:t>
+            </a:r>
+          </a:p>
+        </p:txBody>
+      </p:sp>
+      <p:sp>
+        <p:nvSpPr>
+          <p:cNvPr id="10" name="TextBox 9"/>
+          <p:cNvSpPr txBox="1"/>
+          <p:nvPr/>
+        </p:nvSpPr>
+        <p:spPr>
+          <a:xfrm>
+            <a:off x="3172968" y="3749039"/>
+            <a:ext cx="320040" cy="365760"/>
+          </a:xfrm>
+          <a:prstGeom prst="rect">
+            <a:avLst/>
+          </a:prstGeom>
+          <a:noFill/>
+        </p:spPr>
+        <p:txBody>
+          <a:bodyPr wrap="square" lIns="0" rIns="0" tIns="0" bIns="0" anchor="t">
+            <a:spAutoFit/>
+          </a:bodyPr>
+          <a:lstStyle/>
+          <a:p>
+            <a:pPr algn="ctr">
+              <a:lnSpc>
                 <a:spcPct val="100000"/>
               </a:lnSpc>
             </a:pPr>
             <a:r>
-              <a:rPr sz="2000" b="1">
-                <a:solidFill>
-                  <a:srgbClr val="10151C"/>
-                </a:solidFill>
-                <a:latin typeface="Trebuchet MS"/>
-              </a:rPr>
-              <a:t>Identidade</a:t>
-            </a:r>
-          </a:p>
-        </p:txBody>
-      </p:sp>
-      <p:sp>
-        <p:nvSpPr>
-          <p:cNvPr id="10" name="TextBox 9"/>
-          <p:cNvSpPr txBox="1"/>
-          <p:nvPr/>
-        </p:nvSpPr>
-        <p:spPr>
-          <a:xfrm>
-            <a:off x="1051560" y="4023360"/>
-            <a:ext cx="2788920" cy="1188720"/>
-          </a:xfrm>
-          <a:prstGeom prst="rect">
-            <a:avLst/>
-          </a:prstGeom>
-          <a:noFill/>
-        </p:spPr>
-        <p:txBody>
-          <a:bodyPr wrap="square" lIns="0" rIns="0" tIns="0" bIns="0" anchor="t">
-            <a:spAutoFit/>
-          </a:bodyPr>
-          <a:lstStyle/>
-          <a:p>
-            <a:pPr algn="l">
-              <a:lnSpc>
-                <a:spcPct val="130000"/>
-              </a:lnSpc>
-            </a:pPr>
-            <a:r>
-              <a:rPr sz="1350" b="0">
-                <a:solidFill>
-                  <a:srgbClr val="49535F"/>
-                </a:solidFill>
-                <a:latin typeface="Trebuchet MS"/>
-              </a:rPr>
-              <a:t>A prefeitura assina a credencial que diz que o negócio existe, é de Olímpia e está na rede.</a:t>
+              <a:rPr sz="2200" b="1">
+                <a:solidFill>
+                  <a:srgbClr val="8A939E"/>
+                </a:solidFill>
+                <a:latin typeface="Trebuchet MS"/>
+              </a:rPr>
+              <a:t>→</a:t>
             </a:r>
           </a:p>
         </p:txBody>
@@ -9626,8 +7150,8 @@
         </p:nvSpPr>
         <p:spPr>
           <a:xfrm>
-            <a:off x="4389120" y="3200400"/>
-            <a:ext cx="3337560" cy="2148840"/>
+            <a:off x="3502152" y="3017520"/>
+            <a:ext cx="2377440" cy="1828800"/>
           </a:xfrm>
           <a:prstGeom prst="roundRect">
             <a:avLst>
@@ -9666,45 +7190,40 @@
       </p:sp>
       <p:sp>
         <p:nvSpPr>
-          <p:cNvPr id="12" name="Rectangle 11"/>
-          <p:cNvSpPr/>
-          <p:nvPr/>
-        </p:nvSpPr>
-        <p:spPr>
-          <a:xfrm>
-            <a:off x="4389120" y="3200400"/>
-            <a:ext cx="3337560" cy="91440"/>
-          </a:xfrm>
-          <a:prstGeom prst="rect">
-            <a:avLst/>
-          </a:prstGeom>
-          <a:solidFill>
-            <a:srgbClr val="128040"/>
-          </a:solidFill>
-          <a:ln>
-            <a:noFill/>
-          </a:ln>
-          <a:effectLst/>
-        </p:spPr>
-        <p:style>
-          <a:lnRef idx="1">
-            <a:schemeClr val="accent1"/>
-          </a:lnRef>
-          <a:fillRef idx="3">
-            <a:schemeClr val="accent1"/>
-          </a:fillRef>
-          <a:effectRef idx="2">
-            <a:schemeClr val="accent1"/>
-          </a:effectRef>
-          <a:fontRef idx="minor">
-            <a:schemeClr val="lt1"/>
-          </a:fontRef>
-        </p:style>
-        <p:txBody>
-          <a:bodyPr rtlCol="0" anchor="ctr"/>
-          <a:lstStyle/>
-          <a:p>
-            <a:pPr algn="ctr"/>
+          <p:cNvPr id="12" name="TextBox 11"/>
+          <p:cNvSpPr txBox="1"/>
+          <p:nvPr/>
+        </p:nvSpPr>
+        <p:spPr>
+          <a:xfrm>
+            <a:off x="3730752" y="3218688"/>
+            <a:ext cx="1965960" cy="274320"/>
+          </a:xfrm>
+          <a:prstGeom prst="rect">
+            <a:avLst/>
+          </a:prstGeom>
+          <a:noFill/>
+        </p:spPr>
+        <p:txBody>
+          <a:bodyPr wrap="square" lIns="0" rIns="0" tIns="0" bIns="0" anchor="t">
+            <a:spAutoFit/>
+          </a:bodyPr>
+          <a:lstStyle/>
+          <a:p>
+            <a:pPr algn="l">
+              <a:lnSpc>
+                <a:spcPct val="100000"/>
+              </a:lnSpc>
+            </a:pPr>
+            <a:r>
+              <a:rPr sz="1050" b="1">
+                <a:solidFill>
+                  <a:srgbClr val="0E6FD8"/>
+                </a:solidFill>
+                <a:latin typeface="Trebuchet MS"/>
+              </a:rPr>
+              <a:t>MORADOR</a:t>
+            </a:r>
           </a:p>
         </p:txBody>
       </p:sp>
@@ -9716,8 +7235,8 @@
         </p:nvSpPr>
         <p:spPr>
           <a:xfrm>
-            <a:off x="4663440" y="3520440"/>
-            <a:ext cx="2788920" cy="365760"/>
+            <a:off x="3730752" y="3566160"/>
+            <a:ext cx="1965960" cy="1188720"/>
           </a:xfrm>
           <a:prstGeom prst="rect">
             <a:avLst/>
@@ -9732,56 +7251,88 @@
           <a:p>
             <a:pPr algn="l">
               <a:lnSpc>
+                <a:spcPct val="125000"/>
+              </a:lnSpc>
+            </a:pPr>
+            <a:r>
+              <a:rPr sz="1350" b="0">
+                <a:solidFill>
+                  <a:srgbClr val="10151C"/>
+                </a:solidFill>
+                <a:latin typeface="Trebuchet MS"/>
+              </a:rPr>
+              <a:t>Guarda o carimbo</a:t>
+            </a:r>
+          </a:p>
+          <a:p>
+            <a:pPr algn="l">
+              <a:lnSpc>
+                <a:spcPct val="125000"/>
+              </a:lnSpc>
+            </a:pPr>
+            <a:r>
+              <a:rPr sz="1350" b="0">
+                <a:solidFill>
+                  <a:srgbClr val="10151C"/>
+                </a:solidFill>
+                <a:latin typeface="Trebuchet MS"/>
+              </a:rPr>
+              <a:t>na carteira do</a:t>
+            </a:r>
+          </a:p>
+          <a:p>
+            <a:pPr algn="l">
+              <a:lnSpc>
+                <a:spcPct val="125000"/>
+              </a:lnSpc>
+            </a:pPr>
+            <a:r>
+              <a:rPr sz="1350" b="0">
+                <a:solidFill>
+                  <a:srgbClr val="10151C"/>
+                </a:solidFill>
+                <a:latin typeface="Trebuchet MS"/>
+              </a:rPr>
+              <a:t>seu aparelho</a:t>
+            </a:r>
+          </a:p>
+        </p:txBody>
+      </p:sp>
+      <p:sp>
+        <p:nvSpPr>
+          <p:cNvPr id="14" name="TextBox 13"/>
+          <p:cNvSpPr txBox="1"/>
+          <p:nvPr/>
+        </p:nvSpPr>
+        <p:spPr>
+          <a:xfrm>
+            <a:off x="5897880" y="3749039"/>
+            <a:ext cx="320040" cy="365760"/>
+          </a:xfrm>
+          <a:prstGeom prst="rect">
+            <a:avLst/>
+          </a:prstGeom>
+          <a:noFill/>
+        </p:spPr>
+        <p:txBody>
+          <a:bodyPr wrap="square" lIns="0" rIns="0" tIns="0" bIns="0" anchor="t">
+            <a:spAutoFit/>
+          </a:bodyPr>
+          <a:lstStyle/>
+          <a:p>
+            <a:pPr algn="ctr">
+              <a:lnSpc>
                 <a:spcPct val="100000"/>
               </a:lnSpc>
             </a:pPr>
             <a:r>
-              <a:rPr sz="2000" b="1">
-                <a:solidFill>
-                  <a:srgbClr val="10151C"/>
-                </a:solidFill>
-                <a:latin typeface="Trebuchet MS"/>
-              </a:rPr>
-              <a:t>Verificação</a:t>
-            </a:r>
-          </a:p>
-        </p:txBody>
-      </p:sp>
-      <p:sp>
-        <p:nvSpPr>
-          <p:cNvPr id="14" name="TextBox 13"/>
-          <p:cNvSpPr txBox="1"/>
-          <p:nvPr/>
-        </p:nvSpPr>
-        <p:spPr>
-          <a:xfrm>
-            <a:off x="4663440" y="4023360"/>
-            <a:ext cx="2788920" cy="1188720"/>
-          </a:xfrm>
-          <a:prstGeom prst="rect">
-            <a:avLst/>
-          </a:prstGeom>
-          <a:noFill/>
-        </p:spPr>
-        <p:txBody>
-          <a:bodyPr wrap="square" lIns="0" rIns="0" tIns="0" bIns="0" anchor="t">
-            <a:spAutoFit/>
-          </a:bodyPr>
-          <a:lstStyle/>
-          <a:p>
-            <a:pPr algn="l">
-              <a:lnSpc>
-                <a:spcPct val="130000"/>
-              </a:lnSpc>
-            </a:pPr>
-            <a:r>
-              <a:rPr sz="1350" b="0">
-                <a:solidFill>
-                  <a:srgbClr val="49535F"/>
-                </a:solidFill>
-                <a:latin typeface="Trebuchet MS"/>
-              </a:rPr>
-              <a:t>Uma loja valida o registro de outra usando só a chave pública da rede. Offline.</a:t>
+              <a:rPr sz="2200" b="1">
+                <a:solidFill>
+                  <a:srgbClr val="8A939E"/>
+                </a:solidFill>
+                <a:latin typeface="Trebuchet MS"/>
+              </a:rPr>
+              <a:t>→</a:t>
             </a:r>
           </a:p>
         </p:txBody>
@@ -9794,8 +7345,8 @@
         </p:nvSpPr>
         <p:spPr>
           <a:xfrm>
-            <a:off x="8001000" y="3200400"/>
-            <a:ext cx="3337560" cy="2148840"/>
+            <a:off x="6227064" y="3017520"/>
+            <a:ext cx="2377440" cy="1828800"/>
           </a:xfrm>
           <a:prstGeom prst="roundRect">
             <a:avLst>
@@ -9834,20 +7385,327 @@
       </p:sp>
       <p:sp>
         <p:nvSpPr>
-          <p:cNvPr id="16" name="Rectangle 15"/>
+          <p:cNvPr id="16" name="TextBox 15"/>
+          <p:cNvSpPr txBox="1"/>
+          <p:nvPr/>
+        </p:nvSpPr>
+        <p:spPr>
+          <a:xfrm>
+            <a:off x="6455664" y="3218688"/>
+            <a:ext cx="1965960" cy="274320"/>
+          </a:xfrm>
+          <a:prstGeom prst="rect">
+            <a:avLst/>
+          </a:prstGeom>
+          <a:noFill/>
+        </p:spPr>
+        <p:txBody>
+          <a:bodyPr wrap="square" lIns="0" rIns="0" tIns="0" bIns="0" anchor="t">
+            <a:spAutoFit/>
+          </a:bodyPr>
+          <a:lstStyle/>
+          <a:p>
+            <a:pPr algn="l">
+              <a:lnSpc>
+                <a:spcPct val="100000"/>
+              </a:lnSpc>
+            </a:pPr>
+            <a:r>
+              <a:rPr sz="1050" b="1">
+                <a:solidFill>
+                  <a:srgbClr val="128040"/>
+                </a:solidFill>
+                <a:latin typeface="Trebuchet MS"/>
+              </a:rPr>
+              <a:t>RESTAURANTE B</a:t>
+            </a:r>
+          </a:p>
+        </p:txBody>
+      </p:sp>
+      <p:sp>
+        <p:nvSpPr>
+          <p:cNvPr id="17" name="TextBox 16"/>
+          <p:cNvSpPr txBox="1"/>
+          <p:nvPr/>
+        </p:nvSpPr>
+        <p:spPr>
+          <a:xfrm>
+            <a:off x="6455664" y="3566160"/>
+            <a:ext cx="1965960" cy="1188720"/>
+          </a:xfrm>
+          <a:prstGeom prst="rect">
+            <a:avLst/>
+          </a:prstGeom>
+          <a:noFill/>
+        </p:spPr>
+        <p:txBody>
+          <a:bodyPr wrap="square" lIns="0" rIns="0" tIns="0" bIns="0" anchor="t">
+            <a:spAutoFit/>
+          </a:bodyPr>
+          <a:lstStyle/>
+          <a:p>
+            <a:pPr algn="l">
+              <a:lnSpc>
+                <a:spcPct val="125000"/>
+              </a:lnSpc>
+            </a:pPr>
+            <a:r>
+              <a:rPr sz="1350" b="0">
+                <a:solidFill>
+                  <a:srgbClr val="10151C"/>
+                </a:solidFill>
+                <a:latin typeface="Trebuchet MS"/>
+              </a:rPr>
+              <a:t>Verifica o carimbo</a:t>
+            </a:r>
+          </a:p>
+          <a:p>
+            <a:pPr algn="l">
+              <a:lnSpc>
+                <a:spcPct val="125000"/>
+              </a:lnSpc>
+            </a:pPr>
+            <a:r>
+              <a:rPr sz="1350" b="0">
+                <a:solidFill>
+                  <a:srgbClr val="10151C"/>
+                </a:solidFill>
+                <a:latin typeface="Trebuchet MS"/>
+              </a:rPr>
+              <a:t>do A sozinho, sem</a:t>
+            </a:r>
+          </a:p>
+          <a:p>
+            <a:pPr algn="l">
+              <a:lnSpc>
+                <a:spcPct val="125000"/>
+              </a:lnSpc>
+            </a:pPr>
+            <a:r>
+              <a:rPr sz="1350" b="0">
+                <a:solidFill>
+                  <a:srgbClr val="10151C"/>
+                </a:solidFill>
+                <a:latin typeface="Trebuchet MS"/>
+              </a:rPr>
+              <a:t>consultar o A</a:t>
+            </a:r>
+          </a:p>
+        </p:txBody>
+      </p:sp>
+      <p:sp>
+        <p:nvSpPr>
+          <p:cNvPr id="18" name="TextBox 17"/>
+          <p:cNvSpPr txBox="1"/>
+          <p:nvPr/>
+        </p:nvSpPr>
+        <p:spPr>
+          <a:xfrm>
+            <a:off x="8622792" y="3749039"/>
+            <a:ext cx="320040" cy="365760"/>
+          </a:xfrm>
+          <a:prstGeom prst="rect">
+            <a:avLst/>
+          </a:prstGeom>
+          <a:noFill/>
+        </p:spPr>
+        <p:txBody>
+          <a:bodyPr wrap="square" lIns="0" rIns="0" tIns="0" bIns="0" anchor="t">
+            <a:spAutoFit/>
+          </a:bodyPr>
+          <a:lstStyle/>
+          <a:p>
+            <a:pPr algn="ctr">
+              <a:lnSpc>
+                <a:spcPct val="100000"/>
+              </a:lnSpc>
+            </a:pPr>
+            <a:r>
+              <a:rPr sz="2200" b="1">
+                <a:solidFill>
+                  <a:srgbClr val="8A939E"/>
+                </a:solidFill>
+                <a:latin typeface="Trebuchet MS"/>
+              </a:rPr>
+              <a:t>→</a:t>
+            </a:r>
+          </a:p>
+        </p:txBody>
+      </p:sp>
+      <p:sp>
+        <p:nvSpPr>
+          <p:cNvPr id="19" name="Rounded Rectangle 18"/>
           <p:cNvSpPr/>
           <p:nvPr/>
         </p:nvSpPr>
         <p:spPr>
           <a:xfrm>
-            <a:off x="8001000" y="3200400"/>
-            <a:ext cx="3337560" cy="91440"/>
-          </a:xfrm>
-          <a:prstGeom prst="rect">
-            <a:avLst/>
+            <a:off x="8951976" y="3017520"/>
+            <a:ext cx="2377440" cy="1828800"/>
+          </a:xfrm>
+          <a:prstGeom prst="roundRect">
+            <a:avLst>
+              <a:gd name="adj" fmla="val 6000"/>
+            </a:avLst>
           </a:prstGeom>
           <a:solidFill>
-            <a:srgbClr val="E07A00"/>
+            <a:srgbClr val="FFFFFF"/>
+          </a:solidFill>
+          <a:ln w="12700">
+            <a:solidFill>
+              <a:srgbClr val="D9E0E9"/>
+            </a:solidFill>
+          </a:ln>
+          <a:effectLst/>
+        </p:spPr>
+        <p:style>
+          <a:lnRef idx="1">
+            <a:schemeClr val="accent1"/>
+          </a:lnRef>
+          <a:fillRef idx="3">
+            <a:schemeClr val="accent1"/>
+          </a:fillRef>
+          <a:effectRef idx="2">
+            <a:schemeClr val="accent1"/>
+          </a:effectRef>
+          <a:fontRef idx="minor">
+            <a:schemeClr val="lt1"/>
+          </a:fontRef>
+        </p:style>
+        <p:txBody>
+          <a:bodyPr rtlCol="0" anchor="ctr"/>
+          <a:lstStyle/>
+          <a:p/>
+        </p:txBody>
+      </p:sp>
+      <p:sp>
+        <p:nvSpPr>
+          <p:cNvPr id="20" name="TextBox 19"/>
+          <p:cNvSpPr txBox="1"/>
+          <p:nvPr/>
+        </p:nvSpPr>
+        <p:spPr>
+          <a:xfrm>
+            <a:off x="9180576" y="3218688"/>
+            <a:ext cx="1965960" cy="274320"/>
+          </a:xfrm>
+          <a:prstGeom prst="rect">
+            <a:avLst/>
+          </a:prstGeom>
+          <a:noFill/>
+        </p:spPr>
+        <p:txBody>
+          <a:bodyPr wrap="square" lIns="0" rIns="0" tIns="0" bIns="0" anchor="t">
+            <a:spAutoFit/>
+          </a:bodyPr>
+          <a:lstStyle/>
+          <a:p>
+            <a:pPr algn="l">
+              <a:lnSpc>
+                <a:spcPct val="100000"/>
+              </a:lnSpc>
+            </a:pPr>
+            <a:r>
+              <a:rPr sz="1050" b="1">
+                <a:solidFill>
+                  <a:srgbClr val="E07A00"/>
+                </a:solidFill>
+                <a:latin typeface="Trebuchet MS"/>
+              </a:rPr>
+              <a:t>REDE</a:t>
+            </a:r>
+          </a:p>
+        </p:txBody>
+      </p:sp>
+      <p:sp>
+        <p:nvSpPr>
+          <p:cNvPr id="21" name="TextBox 20"/>
+          <p:cNvSpPr txBox="1"/>
+          <p:nvPr/>
+        </p:nvSpPr>
+        <p:spPr>
+          <a:xfrm>
+            <a:off x="9180576" y="3566160"/>
+            <a:ext cx="1965960" cy="1188720"/>
+          </a:xfrm>
+          <a:prstGeom prst="rect">
+            <a:avLst/>
+          </a:prstGeom>
+          <a:noFill/>
+        </p:spPr>
+        <p:txBody>
+          <a:bodyPr wrap="square" lIns="0" rIns="0" tIns="0" bIns="0" anchor="t">
+            <a:spAutoFit/>
+          </a:bodyPr>
+          <a:lstStyle/>
+          <a:p>
+            <a:pPr algn="l">
+              <a:lnSpc>
+                <a:spcPct val="125000"/>
+              </a:lnSpc>
+            </a:pPr>
+            <a:r>
+              <a:rPr sz="1350" b="0">
+                <a:solidFill>
+                  <a:srgbClr val="10151C"/>
+                </a:solidFill>
+                <a:latin typeface="Trebuchet MS"/>
+              </a:rPr>
+              <a:t>Fecha a cartela,</a:t>
+            </a:r>
+          </a:p>
+          <a:p>
+            <a:pPr algn="l">
+              <a:lnSpc>
+                <a:spcPct val="125000"/>
+              </a:lnSpc>
+            </a:pPr>
+            <a:r>
+              <a:rPr sz="1350" b="0">
+                <a:solidFill>
+                  <a:srgbClr val="10151C"/>
+                </a:solidFill>
+                <a:latin typeface="Trebuchet MS"/>
+              </a:rPr>
+              <a:t>emite o vale e</a:t>
+            </a:r>
+          </a:p>
+          <a:p>
+            <a:pPr algn="l">
+              <a:lnSpc>
+                <a:spcPct val="125000"/>
+              </a:lnSpc>
+            </a:pPr>
+            <a:r>
+              <a:rPr sz="1350" b="0">
+                <a:solidFill>
+                  <a:srgbClr val="10151C"/>
+                </a:solidFill>
+                <a:latin typeface="Trebuchet MS"/>
+              </a:rPr>
+              <a:t>impede resgate duplo</a:t>
+            </a:r>
+          </a:p>
+        </p:txBody>
+      </p:sp>
+      <p:sp>
+        <p:nvSpPr>
+          <p:cNvPr id="22" name="Rounded Rectangle 21"/>
+          <p:cNvSpPr/>
+          <p:nvPr/>
+        </p:nvSpPr>
+        <p:spPr>
+          <a:xfrm>
+            <a:off x="777240" y="5120640"/>
+            <a:ext cx="10607040" cy="1005840"/>
+          </a:xfrm>
+          <a:prstGeom prst="roundRect">
+            <a:avLst>
+              <a:gd name="adj" fmla="val 8000"/>
+            </a:avLst>
+          </a:prstGeom>
+          <a:solidFill>
+            <a:srgbClr val="E7F1FD"/>
           </a:solidFill>
           <a:ln>
             <a:noFill/>
@@ -9871,21 +7729,19 @@
         <p:txBody>
           <a:bodyPr rtlCol="0" anchor="ctr"/>
           <a:lstStyle/>
-          <a:p>
-            <a:pPr algn="ctr"/>
-          </a:p>
-        </p:txBody>
-      </p:sp>
-      <p:sp>
-        <p:nvSpPr>
-          <p:cNvPr id="17" name="TextBox 16"/>
-          <p:cNvSpPr txBox="1"/>
-          <p:nvPr/>
-        </p:nvSpPr>
-        <p:spPr>
-          <a:xfrm>
-            <a:off x="8275320" y="3520440"/>
-            <a:ext cx="2788920" cy="365760"/>
+          <a:p/>
+        </p:txBody>
+      </p:sp>
+      <p:sp>
+        <p:nvSpPr>
+          <p:cNvPr id="23" name="TextBox 22"/>
+          <p:cNvSpPr txBox="1"/>
+          <p:nvPr/>
+        </p:nvSpPr>
+        <p:spPr>
+          <a:xfrm>
+            <a:off x="1097280" y="5321808"/>
+            <a:ext cx="10058400" cy="640080"/>
           </a:xfrm>
           <a:prstGeom prst="rect">
             <a:avLst/>
@@ -9900,42 +7756,19 @@
           <a:p>
             <a:pPr algn="l">
               <a:lnSpc>
-                <a:spcPct val="100000"/>
-              </a:lnSpc>
-            </a:pPr>
-            <a:r>
-              <a:rPr sz="2000" b="1">
-                <a:solidFill>
-                  <a:srgbClr val="10151C"/>
-                </a:solidFill>
-                <a:latin typeface="Trebuchet MS"/>
-              </a:rPr>
-              <a:t>Circulação</a:t>
-            </a:r>
-          </a:p>
-        </p:txBody>
-      </p:sp>
-      <p:sp>
-        <p:nvSpPr>
-          <p:cNvPr id="18" name="TextBox 17"/>
-          <p:cNvSpPr txBox="1"/>
-          <p:nvPr/>
-        </p:nvSpPr>
-        <p:spPr>
-          <a:xfrm>
-            <a:off x="8275320" y="4023360"/>
-            <a:ext cx="2788920" cy="1188720"/>
-          </a:xfrm>
-          <a:prstGeom prst="rect">
-            <a:avLst/>
-          </a:prstGeom>
-          <a:noFill/>
-        </p:spPr>
-        <p:txBody>
-          <a:bodyPr wrap="square" lIns="0" rIns="0" tIns="0" bIns="0" anchor="t">
-            <a:spAutoFit/>
-          </a:bodyPr>
-          <a:lstStyle/>
+                <a:spcPct val="130000"/>
+              </a:lnSpc>
+            </a:pPr>
+            <a:r>
+              <a:rPr sz="1450" b="0">
+                <a:solidFill>
+                  <a:srgbClr val="0A4C96"/>
+                </a:solidFill>
+                <a:latin typeface="Trebuchet MS"/>
+              </a:rPr>
+              <a:t>O caso de uso que roda em cima: uma cartela em que a recompensa cresce com o número de restaurantes diferentes,</a:t>
+            </a:r>
+          </a:p>
           <a:p>
             <a:pPr algn="l">
               <a:lnSpc>
@@ -9943,20 +7776,20 @@
               </a:lnSpc>
             </a:pPr>
             <a:r>
-              <a:rPr sz="1350" b="0">
-                <a:solidFill>
-                  <a:srgbClr val="49535F"/>
-                </a:solidFill>
-                <a:latin typeface="Trebuchet MS"/>
-              </a:rPr>
-              <a:t>O primeiro caso de uso: cartela de carimbos que premia visitar lojas diferentes.</a:t>
-            </a:r>
-          </a:p>
-        </p:txBody>
-      </p:sp>
-      <p:sp>
-        <p:nvSpPr>
-          <p:cNvPr id="19" name="TextBox 18"/>
+              <a:rPr sz="1450" b="0">
+                <a:solidFill>
+                  <a:srgbClr val="0A4C96"/>
+                </a:solidFill>
+                <a:latin typeface="Trebuchet MS"/>
+              </a:rPr>
+              <a:t>não com o valor gasto. Isso espalha o movimento em vez de concentrar — e a placa de 10% na porta não faz isso.</a:t>
+            </a:r>
+          </a:p>
+        </p:txBody>
+      </p:sp>
+      <p:sp>
+        <p:nvSpPr>
+          <p:cNvPr id="24" name="TextBox 23"/>
           <p:cNvSpPr txBox="1"/>
           <p:nvPr/>
         </p:nvSpPr>
@@ -9995,7 +7828,7 @@
       </p:sp>
       <p:sp>
         <p:nvSpPr>
-          <p:cNvPr id="20" name="TextBox 19"/>
+          <p:cNvPr id="25" name="TextBox 24"/>
           <p:cNvSpPr txBox="1"/>
           <p:nvPr/>
         </p:nvSpPr>
@@ -10128,7 +7961,7 @@
                 </a:solidFill>
                 <a:latin typeface="Trebuchet MS"/>
               </a:rPr>
-              <a:t>COMO FUNCIONA</a:t>
+              <a:t>O PRODUTO</a:t>
             </a:r>
           </a:p>
         </p:txBody>
@@ -10167,7 +8000,7 @@
                 </a:solidFill>
                 <a:latin typeface="Trebuchet MS"/>
               </a:rPr>
-              <a:t>A confiança viaja junto com o dado</a:t>
+              <a:t>Duas telas: o morador e o restaurante</a:t>
             </a:r>
           </a:p>
         </p:txBody>
@@ -10216,91 +8049,54 @@
           </a:p>
         </p:txBody>
       </p:sp>
-      <p:sp>
-        <p:nvSpPr>
-          <p:cNvPr id="6" name="Rounded Rectangle 5"/>
-          <p:cNvSpPr/>
-          <p:nvPr/>
-        </p:nvSpPr>
-        <p:spPr>
-          <a:xfrm>
-            <a:off x="777240" y="2377440"/>
-            <a:ext cx="2377440" cy="1920240"/>
-          </a:xfrm>
-          <a:prstGeom prst="roundRect">
-            <a:avLst>
-              <a:gd name="adj" fmla="val 6000"/>
-            </a:avLst>
-          </a:prstGeom>
-          <a:solidFill>
-            <a:srgbClr val="FFFFFF"/>
-          </a:solidFill>
-          <a:ln w="12700">
-            <a:solidFill>
-              <a:srgbClr val="D9E0E9"/>
-            </a:solidFill>
-          </a:ln>
-          <a:effectLst/>
-        </p:spPr>
-        <p:style>
-          <a:lnRef idx="1">
-            <a:schemeClr val="accent1"/>
-          </a:lnRef>
-          <a:fillRef idx="3">
-            <a:schemeClr val="accent1"/>
-          </a:fillRef>
-          <a:effectRef idx="2">
-            <a:schemeClr val="accent1"/>
-          </a:effectRef>
-          <a:fontRef idx="minor">
-            <a:schemeClr val="lt1"/>
-          </a:fontRef>
-        </p:style>
-        <p:txBody>
-          <a:bodyPr rtlCol="0" anchor="ctr"/>
-          <a:lstStyle/>
-          <a:p/>
-        </p:txBody>
-      </p:sp>
-      <p:sp>
-        <p:nvSpPr>
-          <p:cNvPr id="7" name="TextBox 6"/>
-          <p:cNvSpPr txBox="1"/>
-          <p:nvPr/>
-        </p:nvSpPr>
-        <p:spPr>
-          <a:xfrm>
-            <a:off x="1005840" y="2606040"/>
-            <a:ext cx="1920240" cy="274320"/>
-          </a:xfrm>
-          <a:prstGeom prst="rect">
-            <a:avLst/>
-          </a:prstGeom>
-          <a:noFill/>
-        </p:spPr>
-        <p:txBody>
-          <a:bodyPr wrap="square" lIns="0" rIns="0" tIns="0" bIns="0" anchor="t">
-            <a:spAutoFit/>
-          </a:bodyPr>
-          <a:lstStyle/>
-          <a:p>
-            <a:pPr algn="l">
-              <a:lnSpc>
-                <a:spcPct val="100000"/>
-              </a:lnSpc>
-            </a:pPr>
-            <a:r>
-              <a:rPr sz="1100" b="1">
-                <a:solidFill>
-                  <a:srgbClr val="D62718"/>
-                </a:solidFill>
-                <a:latin typeface="Trebuchet MS"/>
-              </a:rPr>
-              <a:t>LOJA A</a:t>
-            </a:r>
-          </a:p>
-        </p:txBody>
-      </p:sp>
+      <p:pic>
+        <p:nvPicPr>
+          <p:cNvPr id="6" name="Picture 5" descr="crop-f009-morador.png"/>
+          <p:cNvPicPr>
+            <a:picLocks noChangeAspect="1"/>
+          </p:cNvPicPr>
+          <p:nvPr/>
+        </p:nvPicPr>
+        <p:blipFill>
+          <a:blip r:embed="rId2"/>
+          <a:stretch>
+            <a:fillRect/>
+          </a:stretch>
+        </p:blipFill>
+        <p:spPr>
+          <a:xfrm>
+            <a:off x="1965960" y="2148840"/>
+            <a:ext cx="1701209" cy="3657600"/>
+          </a:xfrm>
+          <a:prstGeom prst="rect">
+            <a:avLst/>
+          </a:prstGeom>
+        </p:spPr>
+      </p:pic>
+      <p:pic>
+        <p:nvPicPr>
+          <p:cNvPr id="7" name="Picture 6" descr="crop-f011-rest.png"/>
+          <p:cNvPicPr>
+            <a:picLocks noChangeAspect="1"/>
+          </p:cNvPicPr>
+          <p:nvPr/>
+        </p:nvPicPr>
+        <p:blipFill>
+          <a:blip r:embed="rId3"/>
+          <a:stretch>
+            <a:fillRect/>
+          </a:stretch>
+        </p:blipFill>
+        <p:spPr>
+          <a:xfrm>
+            <a:off x="6629400" y="2148840"/>
+            <a:ext cx="1701209" cy="3657600"/>
+          </a:xfrm>
+          <a:prstGeom prst="rect">
+            <a:avLst/>
+          </a:prstGeom>
+        </p:spPr>
+      </p:pic>
       <p:sp>
         <p:nvSpPr>
           <p:cNvPr id="8" name="TextBox 7"/>
@@ -10309,756 +8105,79 @@
         </p:nvSpPr>
         <p:spPr>
           <a:xfrm>
-            <a:off x="1005840" y="2971800"/>
-            <a:ext cx="1965960" cy="1188720"/>
-          </a:xfrm>
-          <a:prstGeom prst="rect">
-            <a:avLst/>
-          </a:prstGeom>
-          <a:noFill/>
-        </p:spPr>
-        <p:txBody>
-          <a:bodyPr wrap="square" lIns="0" rIns="0" tIns="0" bIns="0" anchor="t">
-            <a:spAutoFit/>
-          </a:bodyPr>
-          <a:lstStyle/>
-          <a:p>
-            <a:pPr algn="l">
-              <a:lnSpc>
-                <a:spcPct val="125000"/>
+            <a:off x="1371600" y="5897880"/>
+            <a:ext cx="3931920" cy="457200"/>
+          </a:xfrm>
+          <a:prstGeom prst="rect">
+            <a:avLst/>
+          </a:prstGeom>
+          <a:noFill/>
+        </p:spPr>
+        <p:txBody>
+          <a:bodyPr wrap="square" lIns="0" rIns="0" tIns="0" bIns="0" anchor="t">
+            <a:spAutoFit/>
+          </a:bodyPr>
+          <a:lstStyle/>
+          <a:p>
+            <a:pPr algn="ctr">
+              <a:lnSpc>
+                <a:spcPct val="120000"/>
               </a:lnSpc>
             </a:pPr>
             <a:r>
               <a:rPr sz="1350" b="0">
                 <a:solidFill>
-                  <a:srgbClr val="10151C"/>
-                </a:solidFill>
-                <a:latin typeface="Trebuchet MS"/>
-              </a:rPr>
-              <a:t>Emite um carimbo</a:t>
-            </a:r>
-          </a:p>
-          <a:p>
-            <a:pPr algn="l">
-              <a:lnSpc>
-                <a:spcPct val="125000"/>
+                  <a:srgbClr val="49535F"/>
+                </a:solidFill>
+                <a:latin typeface="Trebuchet MS"/>
+              </a:rPr>
+              <a:t>Cartela e vale com código assinado</a:t>
+            </a:r>
+          </a:p>
+        </p:txBody>
+      </p:sp>
+      <p:sp>
+        <p:nvSpPr>
+          <p:cNvPr id="9" name="TextBox 8"/>
+          <p:cNvSpPr txBox="1"/>
+          <p:nvPr/>
+        </p:nvSpPr>
+        <p:spPr>
+          <a:xfrm>
+            <a:off x="6035040" y="5897880"/>
+            <a:ext cx="3931920" cy="457200"/>
+          </a:xfrm>
+          <a:prstGeom prst="rect">
+            <a:avLst/>
+          </a:prstGeom>
+          <a:noFill/>
+        </p:spPr>
+        <p:txBody>
+          <a:bodyPr wrap="square" lIns="0" rIns="0" tIns="0" bIns="0" anchor="t">
+            <a:spAutoFit/>
+          </a:bodyPr>
+          <a:lstStyle/>
+          <a:p>
+            <a:pPr algn="ctr">
+              <a:lnSpc>
+                <a:spcPct val="120000"/>
               </a:lnSpc>
             </a:pPr>
             <a:r>
               <a:rPr sz="1350" b="0">
                 <a:solidFill>
-                  <a:srgbClr val="10151C"/>
-                </a:solidFill>
-                <a:latin typeface="Trebuchet MS"/>
-              </a:rPr>
-              <a:t>assinado com a</a:t>
-            </a:r>
-          </a:p>
-          <a:p>
-            <a:pPr algn="l">
-              <a:lnSpc>
-                <a:spcPct val="125000"/>
-              </a:lnSpc>
-            </a:pPr>
-            <a:r>
-              <a:rPr sz="1350" b="0">
-                <a:solidFill>
-                  <a:srgbClr val="10151C"/>
-                </a:solidFill>
-                <a:latin typeface="Trebuchet MS"/>
-              </a:rPr>
-              <a:t>própria chave</a:t>
-            </a:r>
-          </a:p>
-        </p:txBody>
-      </p:sp>
-      <p:sp>
-        <p:nvSpPr>
-          <p:cNvPr id="9" name="TextBox 8"/>
-          <p:cNvSpPr txBox="1"/>
-          <p:nvPr/>
-        </p:nvSpPr>
-        <p:spPr>
-          <a:xfrm>
-            <a:off x="3172968" y="3108960"/>
-            <a:ext cx="320040" cy="365760"/>
-          </a:xfrm>
-          <a:prstGeom prst="rect">
-            <a:avLst/>
-          </a:prstGeom>
-          <a:noFill/>
-        </p:spPr>
-        <p:txBody>
-          <a:bodyPr wrap="square" lIns="0" rIns="0" tIns="0" bIns="0" anchor="t">
-            <a:spAutoFit/>
-          </a:bodyPr>
-          <a:lstStyle/>
-          <a:p>
-            <a:pPr algn="ctr">
-              <a:lnSpc>
-                <a:spcPct val="100000"/>
-              </a:lnSpc>
-            </a:pPr>
-            <a:r>
-              <a:rPr sz="2200" b="1">
-                <a:solidFill>
-                  <a:srgbClr val="8A939E"/>
-                </a:solidFill>
-                <a:latin typeface="Trebuchet MS"/>
-              </a:rPr>
-              <a:t>→</a:t>
-            </a:r>
-          </a:p>
-        </p:txBody>
-      </p:sp>
-      <p:sp>
-        <p:nvSpPr>
-          <p:cNvPr id="10" name="Rounded Rectangle 9"/>
-          <p:cNvSpPr/>
-          <p:nvPr/>
-        </p:nvSpPr>
-        <p:spPr>
-          <a:xfrm>
-            <a:off x="3502152" y="2377440"/>
-            <a:ext cx="2377440" cy="1920240"/>
-          </a:xfrm>
-          <a:prstGeom prst="roundRect">
-            <a:avLst>
-              <a:gd name="adj" fmla="val 6000"/>
-            </a:avLst>
-          </a:prstGeom>
-          <a:solidFill>
-            <a:srgbClr val="FFFFFF"/>
-          </a:solidFill>
-          <a:ln w="12700">
-            <a:solidFill>
-              <a:srgbClr val="D9E0E9"/>
-            </a:solidFill>
-          </a:ln>
-          <a:effectLst/>
-        </p:spPr>
-        <p:style>
-          <a:lnRef idx="1">
-            <a:schemeClr val="accent1"/>
-          </a:lnRef>
-          <a:fillRef idx="3">
-            <a:schemeClr val="accent1"/>
-          </a:fillRef>
-          <a:effectRef idx="2">
-            <a:schemeClr val="accent1"/>
-          </a:effectRef>
-          <a:fontRef idx="minor">
-            <a:schemeClr val="lt1"/>
-          </a:fontRef>
-        </p:style>
-        <p:txBody>
-          <a:bodyPr rtlCol="0" anchor="ctr"/>
-          <a:lstStyle/>
-          <a:p/>
-        </p:txBody>
-      </p:sp>
-      <p:sp>
-        <p:nvSpPr>
-          <p:cNvPr id="11" name="TextBox 10"/>
-          <p:cNvSpPr txBox="1"/>
-          <p:nvPr/>
-        </p:nvSpPr>
-        <p:spPr>
-          <a:xfrm>
-            <a:off x="3730752" y="2606040"/>
-            <a:ext cx="1920240" cy="274320"/>
-          </a:xfrm>
-          <a:prstGeom prst="rect">
-            <a:avLst/>
-          </a:prstGeom>
-          <a:noFill/>
-        </p:spPr>
-        <p:txBody>
-          <a:bodyPr wrap="square" lIns="0" rIns="0" tIns="0" bIns="0" anchor="t">
-            <a:spAutoFit/>
-          </a:bodyPr>
-          <a:lstStyle/>
-          <a:p>
-            <a:pPr algn="l">
-              <a:lnSpc>
-                <a:spcPct val="100000"/>
-              </a:lnSpc>
-            </a:pPr>
-            <a:r>
-              <a:rPr sz="1100" b="1">
-                <a:solidFill>
-                  <a:srgbClr val="0E6FD8"/>
-                </a:solidFill>
-                <a:latin typeface="Trebuchet MS"/>
-              </a:rPr>
-              <a:t>MORADOR</a:t>
-            </a:r>
-          </a:p>
-        </p:txBody>
-      </p:sp>
-      <p:sp>
-        <p:nvSpPr>
-          <p:cNvPr id="12" name="TextBox 11"/>
-          <p:cNvSpPr txBox="1"/>
-          <p:nvPr/>
-        </p:nvSpPr>
-        <p:spPr>
-          <a:xfrm>
-            <a:off x="3730752" y="2971800"/>
-            <a:ext cx="1965960" cy="1188720"/>
-          </a:xfrm>
-          <a:prstGeom prst="rect">
-            <a:avLst/>
-          </a:prstGeom>
-          <a:noFill/>
-        </p:spPr>
-        <p:txBody>
-          <a:bodyPr wrap="square" lIns="0" rIns="0" tIns="0" bIns="0" anchor="t">
-            <a:spAutoFit/>
-          </a:bodyPr>
-          <a:lstStyle/>
-          <a:p>
-            <a:pPr algn="l">
-              <a:lnSpc>
-                <a:spcPct val="125000"/>
-              </a:lnSpc>
-            </a:pPr>
-            <a:r>
-              <a:rPr sz="1350" b="0">
-                <a:solidFill>
-                  <a:srgbClr val="10151C"/>
-                </a:solidFill>
-                <a:latin typeface="Trebuchet MS"/>
-              </a:rPr>
-              <a:t>Guarda o carimbo</a:t>
-            </a:r>
-          </a:p>
-          <a:p>
-            <a:pPr algn="l">
-              <a:lnSpc>
-                <a:spcPct val="125000"/>
-              </a:lnSpc>
-            </a:pPr>
-            <a:r>
-              <a:rPr sz="1350" b="0">
-                <a:solidFill>
-                  <a:srgbClr val="10151C"/>
-                </a:solidFill>
-                <a:latin typeface="Trebuchet MS"/>
-              </a:rPr>
-              <a:t>na carteira do</a:t>
-            </a:r>
-          </a:p>
-          <a:p>
-            <a:pPr algn="l">
-              <a:lnSpc>
-                <a:spcPct val="125000"/>
-              </a:lnSpc>
-            </a:pPr>
-            <a:r>
-              <a:rPr sz="1350" b="0">
-                <a:solidFill>
-                  <a:srgbClr val="10151C"/>
-                </a:solidFill>
-                <a:latin typeface="Trebuchet MS"/>
-              </a:rPr>
-              <a:t>seu aparelho</a:t>
-            </a:r>
-          </a:p>
-        </p:txBody>
-      </p:sp>
-      <p:sp>
-        <p:nvSpPr>
-          <p:cNvPr id="13" name="TextBox 12"/>
-          <p:cNvSpPr txBox="1"/>
-          <p:nvPr/>
-        </p:nvSpPr>
-        <p:spPr>
-          <a:xfrm>
-            <a:off x="5897880" y="3108960"/>
-            <a:ext cx="320040" cy="365760"/>
-          </a:xfrm>
-          <a:prstGeom prst="rect">
-            <a:avLst/>
-          </a:prstGeom>
-          <a:noFill/>
-        </p:spPr>
-        <p:txBody>
-          <a:bodyPr wrap="square" lIns="0" rIns="0" tIns="0" bIns="0" anchor="t">
-            <a:spAutoFit/>
-          </a:bodyPr>
-          <a:lstStyle/>
-          <a:p>
-            <a:pPr algn="ctr">
-              <a:lnSpc>
-                <a:spcPct val="100000"/>
-              </a:lnSpc>
-            </a:pPr>
-            <a:r>
-              <a:rPr sz="2200" b="1">
-                <a:solidFill>
-                  <a:srgbClr val="8A939E"/>
-                </a:solidFill>
-                <a:latin typeface="Trebuchet MS"/>
-              </a:rPr>
-              <a:t>→</a:t>
-            </a:r>
-          </a:p>
-        </p:txBody>
-      </p:sp>
-      <p:sp>
-        <p:nvSpPr>
-          <p:cNvPr id="14" name="Rounded Rectangle 13"/>
-          <p:cNvSpPr/>
-          <p:nvPr/>
-        </p:nvSpPr>
-        <p:spPr>
-          <a:xfrm>
-            <a:off x="6227064" y="2377440"/>
-            <a:ext cx="2377440" cy="1920240"/>
-          </a:xfrm>
-          <a:prstGeom prst="roundRect">
-            <a:avLst>
-              <a:gd name="adj" fmla="val 6000"/>
-            </a:avLst>
-          </a:prstGeom>
-          <a:solidFill>
-            <a:srgbClr val="FFFFFF"/>
-          </a:solidFill>
-          <a:ln w="12700">
-            <a:solidFill>
-              <a:srgbClr val="D9E0E9"/>
-            </a:solidFill>
-          </a:ln>
-          <a:effectLst/>
-        </p:spPr>
-        <p:style>
-          <a:lnRef idx="1">
-            <a:schemeClr val="accent1"/>
-          </a:lnRef>
-          <a:fillRef idx="3">
-            <a:schemeClr val="accent1"/>
-          </a:fillRef>
-          <a:effectRef idx="2">
-            <a:schemeClr val="accent1"/>
-          </a:effectRef>
-          <a:fontRef idx="minor">
-            <a:schemeClr val="lt1"/>
-          </a:fontRef>
-        </p:style>
-        <p:txBody>
-          <a:bodyPr rtlCol="0" anchor="ctr"/>
-          <a:lstStyle/>
-          <a:p/>
-        </p:txBody>
-      </p:sp>
-      <p:sp>
-        <p:nvSpPr>
-          <p:cNvPr id="15" name="TextBox 14"/>
-          <p:cNvSpPr txBox="1"/>
-          <p:nvPr/>
-        </p:nvSpPr>
-        <p:spPr>
-          <a:xfrm>
-            <a:off x="6455664" y="2606040"/>
-            <a:ext cx="1920240" cy="274320"/>
-          </a:xfrm>
-          <a:prstGeom prst="rect">
-            <a:avLst/>
-          </a:prstGeom>
-          <a:noFill/>
-        </p:spPr>
-        <p:txBody>
-          <a:bodyPr wrap="square" lIns="0" rIns="0" tIns="0" bIns="0" anchor="t">
-            <a:spAutoFit/>
-          </a:bodyPr>
-          <a:lstStyle/>
-          <a:p>
-            <a:pPr algn="l">
-              <a:lnSpc>
-                <a:spcPct val="100000"/>
-              </a:lnSpc>
-            </a:pPr>
-            <a:r>
-              <a:rPr sz="1100" b="1">
-                <a:solidFill>
-                  <a:srgbClr val="128040"/>
-                </a:solidFill>
-                <a:latin typeface="Trebuchet MS"/>
-              </a:rPr>
-              <a:t>LOJA B</a:t>
-            </a:r>
-          </a:p>
-        </p:txBody>
-      </p:sp>
-      <p:sp>
-        <p:nvSpPr>
-          <p:cNvPr id="16" name="TextBox 15"/>
-          <p:cNvSpPr txBox="1"/>
-          <p:nvPr/>
-        </p:nvSpPr>
-        <p:spPr>
-          <a:xfrm>
-            <a:off x="6455664" y="2971800"/>
-            <a:ext cx="1965960" cy="1188720"/>
-          </a:xfrm>
-          <a:prstGeom prst="rect">
-            <a:avLst/>
-          </a:prstGeom>
-          <a:noFill/>
-        </p:spPr>
-        <p:txBody>
-          <a:bodyPr wrap="square" lIns="0" rIns="0" tIns="0" bIns="0" anchor="t">
-            <a:spAutoFit/>
-          </a:bodyPr>
-          <a:lstStyle/>
-          <a:p>
-            <a:pPr algn="l">
-              <a:lnSpc>
-                <a:spcPct val="125000"/>
-              </a:lnSpc>
-            </a:pPr>
-            <a:r>
-              <a:rPr sz="1350" b="0">
-                <a:solidFill>
-                  <a:srgbClr val="10151C"/>
-                </a:solidFill>
-                <a:latin typeface="Trebuchet MS"/>
-              </a:rPr>
-              <a:t>Verifica o carimbo</a:t>
-            </a:r>
-          </a:p>
-          <a:p>
-            <a:pPr algn="l">
-              <a:lnSpc>
-                <a:spcPct val="125000"/>
-              </a:lnSpc>
-            </a:pPr>
-            <a:r>
-              <a:rPr sz="1350" b="0">
-                <a:solidFill>
-                  <a:srgbClr val="10151C"/>
-                </a:solidFill>
-                <a:latin typeface="Trebuchet MS"/>
-              </a:rPr>
-              <a:t>da Loja A sozinha,</a:t>
-            </a:r>
-          </a:p>
-          <a:p>
-            <a:pPr algn="l">
-              <a:lnSpc>
-                <a:spcPct val="125000"/>
-              </a:lnSpc>
-            </a:pPr>
-            <a:r>
-              <a:rPr sz="1350" b="0">
-                <a:solidFill>
-                  <a:srgbClr val="10151C"/>
-                </a:solidFill>
-                <a:latin typeface="Trebuchet MS"/>
-              </a:rPr>
-              <a:t>sem consultar a Loja A</a:t>
-            </a:r>
-          </a:p>
-        </p:txBody>
-      </p:sp>
-      <p:sp>
-        <p:nvSpPr>
-          <p:cNvPr id="17" name="TextBox 16"/>
-          <p:cNvSpPr txBox="1"/>
-          <p:nvPr/>
-        </p:nvSpPr>
-        <p:spPr>
-          <a:xfrm>
-            <a:off x="8622792" y="3108960"/>
-            <a:ext cx="320040" cy="365760"/>
-          </a:xfrm>
-          <a:prstGeom prst="rect">
-            <a:avLst/>
-          </a:prstGeom>
-          <a:noFill/>
-        </p:spPr>
-        <p:txBody>
-          <a:bodyPr wrap="square" lIns="0" rIns="0" tIns="0" bIns="0" anchor="t">
-            <a:spAutoFit/>
-          </a:bodyPr>
-          <a:lstStyle/>
-          <a:p>
-            <a:pPr algn="ctr">
-              <a:lnSpc>
-                <a:spcPct val="100000"/>
-              </a:lnSpc>
-            </a:pPr>
-            <a:r>
-              <a:rPr sz="2200" b="1">
-                <a:solidFill>
-                  <a:srgbClr val="8A939E"/>
-                </a:solidFill>
-                <a:latin typeface="Trebuchet MS"/>
-              </a:rPr>
-              <a:t>→</a:t>
-            </a:r>
-          </a:p>
-        </p:txBody>
-      </p:sp>
-      <p:sp>
-        <p:nvSpPr>
-          <p:cNvPr id="18" name="Rounded Rectangle 17"/>
-          <p:cNvSpPr/>
-          <p:nvPr/>
-        </p:nvSpPr>
-        <p:spPr>
-          <a:xfrm>
-            <a:off x="8951976" y="2377440"/>
-            <a:ext cx="2377440" cy="1920240"/>
-          </a:xfrm>
-          <a:prstGeom prst="roundRect">
-            <a:avLst>
-              <a:gd name="adj" fmla="val 6000"/>
-            </a:avLst>
-          </a:prstGeom>
-          <a:solidFill>
-            <a:srgbClr val="FFFFFF"/>
-          </a:solidFill>
-          <a:ln w="12700">
-            <a:solidFill>
-              <a:srgbClr val="D9E0E9"/>
-            </a:solidFill>
-          </a:ln>
-          <a:effectLst/>
-        </p:spPr>
-        <p:style>
-          <a:lnRef idx="1">
-            <a:schemeClr val="accent1"/>
-          </a:lnRef>
-          <a:fillRef idx="3">
-            <a:schemeClr val="accent1"/>
-          </a:fillRef>
-          <a:effectRef idx="2">
-            <a:schemeClr val="accent1"/>
-          </a:effectRef>
-          <a:fontRef idx="minor">
-            <a:schemeClr val="lt1"/>
-          </a:fontRef>
-        </p:style>
-        <p:txBody>
-          <a:bodyPr rtlCol="0" anchor="ctr"/>
-          <a:lstStyle/>
-          <a:p/>
-        </p:txBody>
-      </p:sp>
-      <p:sp>
-        <p:nvSpPr>
-          <p:cNvPr id="19" name="TextBox 18"/>
-          <p:cNvSpPr txBox="1"/>
-          <p:nvPr/>
-        </p:nvSpPr>
-        <p:spPr>
-          <a:xfrm>
-            <a:off x="9180576" y="2606040"/>
-            <a:ext cx="1920240" cy="274320"/>
-          </a:xfrm>
-          <a:prstGeom prst="rect">
-            <a:avLst/>
-          </a:prstGeom>
-          <a:noFill/>
-        </p:spPr>
-        <p:txBody>
-          <a:bodyPr wrap="square" lIns="0" rIns="0" tIns="0" bIns="0" anchor="t">
-            <a:spAutoFit/>
-          </a:bodyPr>
-          <a:lstStyle/>
-          <a:p>
-            <a:pPr algn="l">
-              <a:lnSpc>
-                <a:spcPct val="100000"/>
-              </a:lnSpc>
-            </a:pPr>
-            <a:r>
-              <a:rPr sz="1100" b="1">
-                <a:solidFill>
-                  <a:srgbClr val="E07A00"/>
-                </a:solidFill>
-                <a:latin typeface="Trebuchet MS"/>
-              </a:rPr>
-              <a:t>REDE</a:t>
-            </a:r>
-          </a:p>
-        </p:txBody>
-      </p:sp>
-      <p:sp>
-        <p:nvSpPr>
-          <p:cNvPr id="20" name="TextBox 19"/>
-          <p:cNvSpPr txBox="1"/>
-          <p:nvPr/>
-        </p:nvSpPr>
-        <p:spPr>
-          <a:xfrm>
-            <a:off x="9180576" y="2971800"/>
-            <a:ext cx="1965960" cy="1188720"/>
-          </a:xfrm>
-          <a:prstGeom prst="rect">
-            <a:avLst/>
-          </a:prstGeom>
-          <a:noFill/>
-        </p:spPr>
-        <p:txBody>
-          <a:bodyPr wrap="square" lIns="0" rIns="0" tIns="0" bIns="0" anchor="t">
-            <a:spAutoFit/>
-          </a:bodyPr>
-          <a:lstStyle/>
-          <a:p>
-            <a:pPr algn="l">
-              <a:lnSpc>
-                <a:spcPct val="125000"/>
-              </a:lnSpc>
-            </a:pPr>
-            <a:r>
-              <a:rPr sz="1350" b="0">
-                <a:solidFill>
-                  <a:srgbClr val="10151C"/>
-                </a:solidFill>
-                <a:latin typeface="Trebuchet MS"/>
-              </a:rPr>
-              <a:t>Fecha a cartela,</a:t>
-            </a:r>
-          </a:p>
-          <a:p>
-            <a:pPr algn="l">
-              <a:lnSpc>
-                <a:spcPct val="125000"/>
-              </a:lnSpc>
-            </a:pPr>
-            <a:r>
-              <a:rPr sz="1350" b="0">
-                <a:solidFill>
-                  <a:srgbClr val="10151C"/>
-                </a:solidFill>
-                <a:latin typeface="Trebuchet MS"/>
-              </a:rPr>
-              <a:t>emite o vale e</a:t>
-            </a:r>
-          </a:p>
-          <a:p>
-            <a:pPr algn="l">
-              <a:lnSpc>
-                <a:spcPct val="125000"/>
-              </a:lnSpc>
-            </a:pPr>
-            <a:r>
-              <a:rPr sz="1350" b="0">
-                <a:solidFill>
-                  <a:srgbClr val="10151C"/>
-                </a:solidFill>
-                <a:latin typeface="Trebuchet MS"/>
-              </a:rPr>
-              <a:t>impede resgate duplo</a:t>
-            </a:r>
-          </a:p>
-        </p:txBody>
-      </p:sp>
-      <p:sp>
-        <p:nvSpPr>
-          <p:cNvPr id="21" name="Rounded Rectangle 20"/>
-          <p:cNvSpPr/>
-          <p:nvPr/>
-        </p:nvSpPr>
-        <p:spPr>
-          <a:xfrm>
-            <a:off x="777240" y="4572000"/>
-            <a:ext cx="10607040" cy="1234440"/>
-          </a:xfrm>
-          <a:prstGeom prst="roundRect">
-            <a:avLst>
-              <a:gd name="adj" fmla="val 8000"/>
-            </a:avLst>
-          </a:prstGeom>
-          <a:solidFill>
-            <a:srgbClr val="E7F1FD"/>
-          </a:solidFill>
-          <a:ln>
-            <a:noFill/>
-          </a:ln>
-          <a:effectLst/>
-        </p:spPr>
-        <p:style>
-          <a:lnRef idx="1">
-            <a:schemeClr val="accent1"/>
-          </a:lnRef>
-          <a:fillRef idx="3">
-            <a:schemeClr val="accent1"/>
-          </a:fillRef>
-          <a:effectRef idx="2">
-            <a:schemeClr val="accent1"/>
-          </a:effectRef>
-          <a:fontRef idx="minor">
-            <a:schemeClr val="lt1"/>
-          </a:fontRef>
-        </p:style>
-        <p:txBody>
-          <a:bodyPr rtlCol="0" anchor="ctr"/>
-          <a:lstStyle/>
-          <a:p/>
-        </p:txBody>
-      </p:sp>
-      <p:sp>
-        <p:nvSpPr>
-          <p:cNvPr id="22" name="TextBox 21"/>
-          <p:cNvSpPr txBox="1"/>
-          <p:nvPr/>
-        </p:nvSpPr>
-        <p:spPr>
-          <a:xfrm>
-            <a:off x="1097280" y="4800600"/>
-            <a:ext cx="10058400" cy="822960"/>
-          </a:xfrm>
-          <a:prstGeom prst="rect">
-            <a:avLst/>
-          </a:prstGeom>
-          <a:noFill/>
-        </p:spPr>
-        <p:txBody>
-          <a:bodyPr wrap="square" lIns="0" rIns="0" tIns="0" bIns="0" anchor="t">
-            <a:spAutoFit/>
-          </a:bodyPr>
-          <a:lstStyle/>
-          <a:p>
-            <a:pPr algn="l">
-              <a:lnSpc>
-                <a:spcPct val="130000"/>
-              </a:lnSpc>
-            </a:pPr>
-            <a:r>
-              <a:rPr sz="1500" b="0">
-                <a:solidFill>
-                  <a:srgbClr val="0A4C96"/>
-                </a:solidFill>
-                <a:latin typeface="Trebuchet MS"/>
-              </a:rPr>
-              <a:t>O ponto está no terceiro quadro: a Loja B confia num registro emitido pela Loja A sem precisar confiar na Loja A,</a:t>
-            </a:r>
-          </a:p>
-          <a:p>
-            <a:pPr algn="l">
-              <a:lnSpc>
-                <a:spcPct val="130000"/>
-              </a:lnSpc>
-            </a:pPr>
-            <a:r>
-              <a:rPr sz="1500" b="0">
-                <a:solidFill>
-                  <a:srgbClr val="0A4C96"/>
-                </a:solidFill>
-                <a:latin typeface="Trebuchet MS"/>
-              </a:rPr>
-              <a:t>e sem que exista uma planilha central que alguém precise manter. É isso que substitui o grupo de WhatsApp.</a:t>
-            </a:r>
-          </a:p>
-        </p:txBody>
-      </p:sp>
-      <p:sp>
-        <p:nvSpPr>
-          <p:cNvPr id="23" name="TextBox 22"/>
+                  <a:srgbClr val="49535F"/>
+                </a:solidFill>
+                <a:latin typeface="Trebuchet MS"/>
+              </a:rPr>
+              <a:t>Balcão: carimbar, verificar e resgatar</a:t>
+            </a:r>
+          </a:p>
+        </p:txBody>
+      </p:sp>
+      <p:sp>
+        <p:nvSpPr>
+          <p:cNvPr id="10" name="TextBox 9"/>
           <p:cNvSpPr txBox="1"/>
           <p:nvPr/>
         </p:nvSpPr>
@@ -11097,7 +8216,7 @@
       </p:sp>
       <p:sp>
         <p:nvSpPr>
-          <p:cNvPr id="24" name="TextBox 23"/>
+          <p:cNvPr id="11" name="TextBox 10"/>
           <p:cNvSpPr txBox="1"/>
           <p:nvPr/>
         </p:nvSpPr>
@@ -11230,7 +8349,7 @@
                 </a:solidFill>
                 <a:latin typeface="Trebuchet MS"/>
               </a:rPr>
-              <a:t>POR QUE NÃO É MAIS UM CASHBACK</a:t>
+              <a:t>ENTREGA OBRIGATÓRIA</a:t>
             </a:r>
           </a:p>
         </p:txBody>
@@ -11269,7 +8388,7 @@
                 </a:solidFill>
                 <a:latin typeface="Trebuchet MS"/>
               </a:rPr>
-              <a:t>A recompensa cresce com o número</a:t>
+              <a:t>Sistema rodando, sem servidor</a:t>
             </a:r>
           </a:p>
           <a:p>
@@ -11285,7 +8404,7 @@
                 </a:solidFill>
                 <a:latin typeface="Trebuchet MS"/>
               </a:rPr>
-              <a:t>de lojas, não com o valor gasto</a:t>
+              <a:t>e sem internet</a:t>
             </a:r>
           </a:p>
         </p:txBody>
@@ -11334,52 +8453,39 @@
           </a:p>
         </p:txBody>
       </p:sp>
-      <p:sp>
-        <p:nvSpPr>
-          <p:cNvPr id="6" name="Rounded Rectangle 5"/>
-          <p:cNvSpPr/>
-          <p:nvPr/>
-        </p:nvSpPr>
-        <p:spPr>
-          <a:xfrm>
-            <a:off x="777240" y="2834640"/>
-            <a:ext cx="5120640" cy="2377440"/>
-          </a:xfrm>
-          <a:prstGeom prst="roundRect">
-            <a:avLst>
-              <a:gd name="adj" fmla="val 6000"/>
-            </a:avLst>
-          </a:prstGeom>
-          <a:solidFill>
-            <a:srgbClr val="FBECEC"/>
-          </a:solidFill>
-          <a:ln w="12700">
-            <a:solidFill>
-              <a:srgbClr val="E8C6C4"/>
-            </a:solidFill>
-          </a:ln>
-          <a:effectLst/>
-        </p:spPr>
-        <p:style>
-          <a:lnRef idx="1">
-            <a:schemeClr val="accent1"/>
-          </a:lnRef>
-          <a:fillRef idx="3">
-            <a:schemeClr val="accent1"/>
-          </a:fillRef>
-          <a:effectRef idx="2">
-            <a:schemeClr val="accent1"/>
-          </a:effectRef>
-          <a:fontRef idx="minor">
-            <a:schemeClr val="lt1"/>
-          </a:fontRef>
-        </p:style>
-        <p:txBody>
-          <a:bodyPr rtlCol="0" anchor="ctr"/>
-          <a:lstStyle/>
-          <a:p/>
-        </p:txBody>
-      </p:sp>
+      <p:pic>
+        <p:nvPicPr>
+          <p:cNvPr id="6" name="Sou+Olimpia-demo-narrado.mp4">
+            <a:hlinkClick r:id="" action="ppaction://media"/>
+          </p:cNvPr>
+          <p:cNvPicPr>
+            <a:picLocks noChangeAspect="1"/>
+          </p:cNvPicPr>
+          <p:nvPr>
+            <a:videoFile r:link="rId3"/>
+            <p:extLst>
+              <p:ext uri="{DAA4B4D4-6D71-4841-9C94-3DE7FCFB9230}">
+                <p14:media xmlns:p14="http://schemas.microsoft.com/office/powerpoint/2010/main" r:embed="rId2"/>
+              </p:ext>
+            </p:extLst>
+          </p:nvPr>
+        </p:nvPicPr>
+        <p:blipFill>
+          <a:blip r:embed="rId4"/>
+          <a:stretch>
+            <a:fillRect/>
+          </a:stretch>
+        </p:blipFill>
+        <p:spPr>
+          <a:xfrm>
+            <a:off x="3108960" y="2148840"/>
+            <a:ext cx="5943600" cy="3200400"/>
+          </a:xfrm>
+          <a:prstGeom prst="rect">
+            <a:avLst/>
+          </a:prstGeom>
+        </p:spPr>
+      </p:pic>
       <p:sp>
         <p:nvSpPr>
           <p:cNvPr id="7" name="TextBox 6"/>
@@ -11388,33 +8494,49 @@
         </p:nvSpPr>
         <p:spPr>
           <a:xfrm>
-            <a:off x="1097280" y="3063240"/>
-            <a:ext cx="4572000" cy="320040"/>
-          </a:xfrm>
-          <a:prstGeom prst="rect">
-            <a:avLst/>
-          </a:prstGeom>
-          <a:noFill/>
-        </p:spPr>
-        <p:txBody>
-          <a:bodyPr wrap="square" lIns="0" rIns="0" tIns="0" bIns="0" anchor="t">
-            <a:spAutoFit/>
-          </a:bodyPr>
-          <a:lstStyle/>
-          <a:p>
-            <a:pPr algn="l">
-              <a:lnSpc>
-                <a:spcPct val="100000"/>
-              </a:lnSpc>
-            </a:pPr>
-            <a:r>
-              <a:rPr sz="1800" b="1">
-                <a:solidFill>
-                  <a:srgbClr val="D62718"/>
-                </a:solidFill>
-                <a:latin typeface="Trebuchet MS"/>
-              </a:rPr>
-              <a:t>Desconto linear é soma zero</a:t>
+            <a:off x="777240" y="5486400"/>
+            <a:ext cx="10607040" cy="777240"/>
+          </a:xfrm>
+          <a:prstGeom prst="rect">
+            <a:avLst/>
+          </a:prstGeom>
+          <a:noFill/>
+        </p:spPr>
+        <p:txBody>
+          <a:bodyPr wrap="square" lIns="0" rIns="0" tIns="0" bIns="0" anchor="t">
+            <a:spAutoFit/>
+          </a:bodyPr>
+          <a:lstStyle/>
+          <a:p>
+            <a:pPr algn="ctr">
+              <a:lnSpc>
+                <a:spcPct val="130000"/>
+              </a:lnSpc>
+            </a:pPr>
+            <a:r>
+              <a:rPr sz="1450" b="0">
+                <a:solidFill>
+                  <a:srgbClr val="49535F"/>
+                </a:solidFill>
+                <a:latin typeface="Trebuchet MS"/>
+              </a:rPr>
+              <a:t>Toda a criptografia acontece no navegador. Um restaurante valida o carimbo do outro usando só a chave pública</a:t>
+            </a:r>
+          </a:p>
+          <a:p>
+            <a:pPr algn="ctr">
+              <a:lnSpc>
+                <a:spcPct val="130000"/>
+              </a:lnSpc>
+            </a:pPr>
+            <a:r>
+              <a:rPr sz="1450" b="0">
+                <a:solidFill>
+                  <a:srgbClr val="49535F"/>
+                </a:solidFill>
+                <a:latin typeface="Trebuchet MS"/>
+              </a:rPr>
+              <a:t>da prefeitura. Resgate duplo é recusado e carimbo adulterado é rejeitado na hora.</a:t>
             </a:r>
           </a:p>
         </p:txBody>
@@ -11422,208 +8544,6 @@
       <p:sp>
         <p:nvSpPr>
           <p:cNvPr id="8" name="TextBox 7"/>
-          <p:cNvSpPr txBox="1"/>
-          <p:nvPr/>
-        </p:nvSpPr>
-        <p:spPr>
-          <a:xfrm>
-            <a:off x="1097280" y="3520440"/>
-            <a:ext cx="4526280" cy="1554480"/>
-          </a:xfrm>
-          <a:prstGeom prst="rect">
-            <a:avLst/>
-          </a:prstGeom>
-          <a:noFill/>
-        </p:spPr>
-        <p:txBody>
-          <a:bodyPr wrap="square" lIns="0" rIns="0" tIns="0" bIns="0" anchor="t">
-            <a:spAutoFit/>
-          </a:bodyPr>
-          <a:lstStyle/>
-          <a:p>
-            <a:pPr algn="l">
-              <a:lnSpc>
-                <a:spcPct val="135000"/>
-              </a:lnSpc>
-            </a:pPr>
-            <a:r>
-              <a:rPr sz="1400" b="0">
-                <a:solidFill>
-                  <a:srgbClr val="49535F"/>
-                </a:solidFill>
-                <a:latin typeface="Trebuchet MS"/>
-              </a:rPr>
-              <a:t>Se todas as lojas dão 10%, ninguém ganha participação. Redistribui o mesmo cliente entre concorrentes e a cidade inteira vende mais barato no mês em que já tem menos caixa.</a:t>
-            </a:r>
-          </a:p>
-        </p:txBody>
-      </p:sp>
-      <p:sp>
-        <p:nvSpPr>
-          <p:cNvPr id="9" name="Rounded Rectangle 8"/>
-          <p:cNvSpPr/>
-          <p:nvPr/>
-        </p:nvSpPr>
-        <p:spPr>
-          <a:xfrm>
-            <a:off x="6263640" y="2834640"/>
-            <a:ext cx="5120640" cy="2377440"/>
-          </a:xfrm>
-          <a:prstGeom prst="roundRect">
-            <a:avLst>
-              <a:gd name="adj" fmla="val 6000"/>
-            </a:avLst>
-          </a:prstGeom>
-          <a:solidFill>
-            <a:srgbClr val="EDF7F0"/>
-          </a:solidFill>
-          <a:ln w="12700">
-            <a:solidFill>
-              <a:srgbClr val="B8DDC6"/>
-            </a:solidFill>
-          </a:ln>
-          <a:effectLst/>
-        </p:spPr>
-        <p:style>
-          <a:lnRef idx="1">
-            <a:schemeClr val="accent1"/>
-          </a:lnRef>
-          <a:fillRef idx="3">
-            <a:schemeClr val="accent1"/>
-          </a:fillRef>
-          <a:effectRef idx="2">
-            <a:schemeClr val="accent1"/>
-          </a:effectRef>
-          <a:fontRef idx="minor">
-            <a:schemeClr val="lt1"/>
-          </a:fontRef>
-        </p:style>
-        <p:txBody>
-          <a:bodyPr rtlCol="0" anchor="ctr"/>
-          <a:lstStyle/>
-          <a:p/>
-        </p:txBody>
-      </p:sp>
-      <p:sp>
-        <p:nvSpPr>
-          <p:cNvPr id="10" name="TextBox 9"/>
-          <p:cNvSpPr txBox="1"/>
-          <p:nvPr/>
-        </p:nvSpPr>
-        <p:spPr>
-          <a:xfrm>
-            <a:off x="6583680" y="3063240"/>
-            <a:ext cx="4572000" cy="320040"/>
-          </a:xfrm>
-          <a:prstGeom prst="rect">
-            <a:avLst/>
-          </a:prstGeom>
-          <a:noFill/>
-        </p:spPr>
-        <p:txBody>
-          <a:bodyPr wrap="square" lIns="0" rIns="0" tIns="0" bIns="0" anchor="t">
-            <a:spAutoFit/>
-          </a:bodyPr>
-          <a:lstStyle/>
-          <a:p>
-            <a:pPr algn="l">
-              <a:lnSpc>
-                <a:spcPct val="100000"/>
-              </a:lnSpc>
-            </a:pPr>
-            <a:r>
-              <a:rPr sz="1800" b="1">
-                <a:solidFill>
-                  <a:srgbClr val="128040"/>
-                </a:solidFill>
-                <a:latin typeface="Trebuchet MS"/>
-              </a:rPr>
-              <a:t>Progressão por lojas é circulação</a:t>
-            </a:r>
-          </a:p>
-        </p:txBody>
-      </p:sp>
-      <p:sp>
-        <p:nvSpPr>
-          <p:cNvPr id="11" name="TextBox 10"/>
-          <p:cNvSpPr txBox="1"/>
-          <p:nvPr/>
-        </p:nvSpPr>
-        <p:spPr>
-          <a:xfrm>
-            <a:off x="6583680" y="3520440"/>
-            <a:ext cx="4526280" cy="1554480"/>
-          </a:xfrm>
-          <a:prstGeom prst="rect">
-            <a:avLst/>
-          </a:prstGeom>
-          <a:noFill/>
-        </p:spPr>
-        <p:txBody>
-          <a:bodyPr wrap="square" lIns="0" rIns="0" tIns="0" bIns="0" anchor="t">
-            <a:spAutoFit/>
-          </a:bodyPr>
-          <a:lstStyle/>
-          <a:p>
-            <a:pPr algn="l">
-              <a:lnSpc>
-                <a:spcPct val="135000"/>
-              </a:lnSpc>
-            </a:pPr>
-            <a:r>
-              <a:rPr sz="1400" b="0">
-                <a:solidFill>
-                  <a:srgbClr val="49535F"/>
-                </a:solidFill>
-                <a:latin typeface="Trebuchet MS"/>
-              </a:rPr>
-              <a:t>Aumenta o número de estabelecimentos por cliente em vez de redistribuir o mesmo cliente. E é a única coisa que uma placa de 10% na porta não consegue fazer.</a:t>
-            </a:r>
-          </a:p>
-        </p:txBody>
-      </p:sp>
-      <p:sp>
-        <p:nvSpPr>
-          <p:cNvPr id="12" name="TextBox 11"/>
-          <p:cNvSpPr txBox="1"/>
-          <p:nvPr/>
-        </p:nvSpPr>
-        <p:spPr>
-          <a:xfrm>
-            <a:off x="777240" y="5532120"/>
-            <a:ext cx="10607040" cy="548640"/>
-          </a:xfrm>
-          <a:prstGeom prst="rect">
-            <a:avLst/>
-          </a:prstGeom>
-          <a:noFill/>
-        </p:spPr>
-        <p:txBody>
-          <a:bodyPr wrap="square" lIns="0" rIns="0" tIns="0" bIns="0" anchor="t">
-            <a:spAutoFit/>
-          </a:bodyPr>
-          <a:lstStyle/>
-          <a:p>
-            <a:pPr algn="l">
-              <a:lnSpc>
-                <a:spcPct val="120000"/>
-              </a:lnSpc>
-            </a:pPr>
-            <a:r>
-              <a:rPr sz="1400" b="0">
-                <a:solidFill>
-                  <a:srgbClr val="49535F"/>
-                </a:solidFill>
-                <a:latin typeface="Trebuchet MS"/>
-              </a:rPr>
-              <a:t>O vale é em reais, não em percentual: R$ 30 é legível para quem tem mediana de admissão de R$ 2.100.</a:t>
-            </a:r>
-          </a:p>
-        </p:txBody>
-      </p:sp>
-      <p:sp>
-        <p:nvSpPr>
-          <p:cNvPr id="13" name="TextBox 12"/>
           <p:cNvSpPr txBox="1"/>
           <p:nvPr/>
         </p:nvSpPr>
@@ -11662,7 +8582,7 @@
       </p:sp>
       <p:sp>
         <p:nvSpPr>
-          <p:cNvPr id="14" name="TextBox 13"/>
+          <p:cNvPr id="9" name="TextBox 8"/>
           <p:cNvSpPr txBox="1"/>
           <p:nvPr/>
         </p:nvSpPr>
@@ -11704,6 +8624,28 @@
   <p:clrMapOvr>
     <a:masterClrMapping/>
   </p:clrMapOvr>
+  <p:timing>
+    <p:tnLst>
+      <p:par>
+        <p:cTn id="1" dur="indefinite" restart="never" nodeType="tmRoot">
+          <p:childTnLst>
+            <p:video>
+              <p:cMediaNode vol="80000">
+                <p:cTn id="2" fill="hold" display="0">
+                  <p:stCondLst>
+                    <p:cond delay="indefinite"/>
+                  </p:stCondLst>
+                </p:cTn>
+                <p:tgtEl>
+                  <p:spTgt spid="6"/>
+                </p:tgtEl>
+              </p:cMediaNode>
+            </p:video>
+          </p:childTnLst>
+        </p:cTn>
+      </p:par>
+    </p:tnLst>
+  </p:timing>
 </p:sld>
 </file>
 
@@ -11795,7 +8737,7 @@
                 </a:solidFill>
                 <a:latin typeface="Trebuchet MS"/>
               </a:rPr>
-              <a:t>SEGURANÇA DE DADOS</a:t>
+              <a:t>QUANTO RENDE</a:t>
             </a:r>
           </a:p>
         </p:txBody>
@@ -11834,23 +8776,7 @@
                 </a:solidFill>
                 <a:latin typeface="Trebuchet MS"/>
               </a:rPr>
-              <a:t>A rede funciona sabendo</a:t>
-            </a:r>
-          </a:p>
-          <a:p>
-            <a:pPr algn="l">
-              <a:lnSpc>
-                <a:spcPct val="102000"/>
-              </a:lnSpc>
-            </a:pPr>
-            <a:r>
-              <a:rPr sz="3400" b="1">
-                <a:solidFill>
-                  <a:srgbClr val="10151C"/>
-                </a:solidFill>
-                <a:latin typeface="Trebuchet MS"/>
-              </a:rPr>
-              <a:t>o mínimo sobre as pessoas</a:t>
+              <a:t>20 mil cenários simulados</a:t>
             </a:r>
           </a:p>
         </p:txBody>
@@ -11907,18 +8833,18 @@
         </p:nvSpPr>
         <p:spPr>
           <a:xfrm>
-            <a:off x="777240" y="2240280"/>
-            <a:ext cx="10607040" cy="512064"/>
+            <a:off x="777240" y="2194560"/>
+            <a:ext cx="3337560" cy="1280160"/>
           </a:xfrm>
           <a:prstGeom prst="roundRect">
             <a:avLst>
-              <a:gd name="adj" fmla="val 20000"/>
+              <a:gd name="adj" fmla="val 8000"/>
             </a:avLst>
           </a:prstGeom>
           <a:solidFill>
             <a:srgbClr val="FFFFFF"/>
           </a:solidFill>
-          <a:ln w="9525">
+          <a:ln w="12700">
             <a:solidFill>
               <a:srgbClr val="D9E0E9"/>
             </a:solidFill>
@@ -11953,8 +8879,8 @@
         </p:nvSpPr>
         <p:spPr>
           <a:xfrm>
-            <a:off x="1051560" y="2368296"/>
-            <a:ext cx="4206240" cy="274320"/>
+            <a:off x="1051560" y="2377440"/>
+            <a:ext cx="2788920" cy="457200"/>
           </a:xfrm>
           <a:prstGeom prst="rect">
             <a:avLst/>
@@ -11973,13 +8899,13 @@
               </a:lnSpc>
             </a:pPr>
             <a:r>
-              <a:rPr sz="1450" b="1">
-                <a:solidFill>
-                  <a:srgbClr val="10151C"/>
-                </a:solidFill>
-                <a:latin typeface="Trebuchet MS"/>
-              </a:rPr>
-              <a:t>Nome do morador</a:t>
+              <a:rPr sz="2800" b="1">
+                <a:solidFill>
+                  <a:srgbClr val="0A4C96"/>
+                </a:solidFill>
+                <a:latin typeface="Trebuchet MS"/>
+              </a:rPr>
+              <a:t>R$ 4,82</a:t>
             </a:r>
           </a:p>
         </p:txBody>
@@ -11992,8 +8918,8 @@
         </p:nvSpPr>
         <p:spPr>
           <a:xfrm>
-            <a:off x="5394960" y="2368296"/>
-            <a:ext cx="5760720" cy="274320"/>
+            <a:off x="1051560" y="2889504"/>
+            <a:ext cx="2880360" cy="457200"/>
           </a:xfrm>
           <a:prstGeom prst="rect">
             <a:avLst/>
@@ -12008,17 +8934,33 @@
           <a:p>
             <a:pPr algn="l">
               <a:lnSpc>
-                <a:spcPct val="100000"/>
-              </a:lnSpc>
-            </a:pPr>
-            <a:r>
-              <a:rPr sz="1350" b="0">
-                <a:solidFill>
-                  <a:srgbClr val="128040"/>
-                </a:solidFill>
-                <a:latin typeface="Trebuchet MS"/>
-              </a:rPr>
-              <a:t>não guardamos</a:t>
+                <a:spcPct val="120000"/>
+              </a:lnSpc>
+            </a:pPr>
+            <a:r>
+              <a:rPr sz="1250" b="0">
+                <a:solidFill>
+                  <a:srgbClr val="49535F"/>
+                </a:solidFill>
+                <a:latin typeface="Trebuchet MS"/>
+              </a:rPr>
+              <a:t>de receita incremental para</a:t>
+            </a:r>
+          </a:p>
+          <a:p>
+            <a:pPr algn="l">
+              <a:lnSpc>
+                <a:spcPct val="120000"/>
+              </a:lnSpc>
+            </a:pPr>
+            <a:r>
+              <a:rPr sz="1250" b="0">
+                <a:solidFill>
+                  <a:srgbClr val="49535F"/>
+                </a:solidFill>
+                <a:latin typeface="Trebuchet MS"/>
+              </a:rPr>
+              <a:t>cada real concedido em vale</a:t>
             </a:r>
           </a:p>
         </p:txBody>
@@ -12031,18 +8973,18 @@
         </p:nvSpPr>
         <p:spPr>
           <a:xfrm>
-            <a:off x="777240" y="2843784"/>
-            <a:ext cx="10607040" cy="512064"/>
+            <a:off x="4389120" y="2194560"/>
+            <a:ext cx="3337560" cy="1280160"/>
           </a:xfrm>
           <a:prstGeom prst="roundRect">
             <a:avLst>
-              <a:gd name="adj" fmla="val 20000"/>
+              <a:gd name="adj" fmla="val 8000"/>
             </a:avLst>
           </a:prstGeom>
           <a:solidFill>
             <a:srgbClr val="FFFFFF"/>
           </a:solidFill>
-          <a:ln w="9525">
+          <a:ln w="12700">
             <a:solidFill>
               <a:srgbClr val="D9E0E9"/>
             </a:solidFill>
@@ -12077,8 +9019,8 @@
         </p:nvSpPr>
         <p:spPr>
           <a:xfrm>
-            <a:off x="1051560" y="2971800"/>
-            <a:ext cx="4206240" cy="274320"/>
+            <a:off x="4663440" y="2377440"/>
+            <a:ext cx="2788920" cy="457200"/>
           </a:xfrm>
           <a:prstGeom prst="rect">
             <a:avLst/>
@@ -12097,13 +9039,13 @@
               </a:lnSpc>
             </a:pPr>
             <a:r>
-              <a:rPr sz="1450" b="1">
-                <a:solidFill>
-                  <a:srgbClr val="10151C"/>
-                </a:solidFill>
-                <a:latin typeface="Trebuchet MS"/>
-              </a:rPr>
-              <a:t>CPF</a:t>
+              <a:rPr sz="2800" b="1">
+                <a:solidFill>
+                  <a:srgbClr val="0A4C96"/>
+                </a:solidFill>
+                <a:latin typeface="Trebuchet MS"/>
+              </a:rPr>
+              <a:t>81%</a:t>
             </a:r>
           </a:p>
         </p:txBody>
@@ -12116,8 +9058,8 @@
         </p:nvSpPr>
         <p:spPr>
           <a:xfrm>
-            <a:off x="5394960" y="2971800"/>
-            <a:ext cx="5760720" cy="274320"/>
+            <a:off x="4663440" y="2889504"/>
+            <a:ext cx="2880360" cy="457200"/>
           </a:xfrm>
           <a:prstGeom prst="rect">
             <a:avLst/>
@@ -12132,17 +9074,33 @@
           <a:p>
             <a:pPr algn="l">
               <a:lnSpc>
-                <a:spcPct val="100000"/>
-              </a:lnSpc>
-            </a:pPr>
-            <a:r>
-              <a:rPr sz="1350" b="0">
-                <a:solidFill>
-                  <a:srgbClr val="128040"/>
-                </a:solidFill>
-                <a:latin typeface="Trebuchet MS"/>
-              </a:rPr>
-              <a:t>não guardamos</a:t>
+                <a:spcPct val="120000"/>
+              </a:lnSpc>
+            </a:pPr>
+            <a:r>
+              <a:rPr sz="1250" b="0">
+                <a:solidFill>
+                  <a:srgbClr val="49535F"/>
+                </a:solidFill>
+                <a:latin typeface="Trebuchet MS"/>
+              </a:rPr>
+              <a:t>das simulações dão lucro</a:t>
+            </a:r>
+          </a:p>
+          <a:p>
+            <a:pPr algn="l">
+              <a:lnSpc>
+                <a:spcPct val="120000"/>
+              </a:lnSpc>
+            </a:pPr>
+            <a:r>
+              <a:rPr sz="1250" b="0">
+                <a:solidFill>
+                  <a:srgbClr val="49535F"/>
+                </a:solidFill>
+                <a:latin typeface="Trebuchet MS"/>
+              </a:rPr>
+              <a:t>para o restaurante</a:t>
             </a:r>
           </a:p>
         </p:txBody>
@@ -12155,18 +9113,18 @@
         </p:nvSpPr>
         <p:spPr>
           <a:xfrm>
-            <a:off x="777240" y="3447288"/>
-            <a:ext cx="10607040" cy="512064"/>
+            <a:off x="8001000" y="2194560"/>
+            <a:ext cx="3337560" cy="1280160"/>
           </a:xfrm>
           <a:prstGeom prst="roundRect">
             <a:avLst>
-              <a:gd name="adj" fmla="val 20000"/>
+              <a:gd name="adj" fmla="val 8000"/>
             </a:avLst>
           </a:prstGeom>
           <a:solidFill>
             <a:srgbClr val="FFFFFF"/>
           </a:solidFill>
-          <a:ln w="9525">
+          <a:ln w="12700">
             <a:solidFill>
               <a:srgbClr val="D9E0E9"/>
             </a:solidFill>
@@ -12201,8 +9159,8 @@
         </p:nvSpPr>
         <p:spPr>
           <a:xfrm>
-            <a:off x="1051560" y="3575304"/>
-            <a:ext cx="4206240" cy="274320"/>
+            <a:off x="8275320" y="2377440"/>
+            <a:ext cx="2788920" cy="457200"/>
           </a:xfrm>
           <a:prstGeom prst="rect">
             <a:avLst/>
@@ -12221,13 +9179,13 @@
               </a:lnSpc>
             </a:pPr>
             <a:r>
-              <a:rPr sz="1450" b="1">
-                <a:solidFill>
-                  <a:srgbClr val="10151C"/>
-                </a:solidFill>
-                <a:latin typeface="Trebuchet MS"/>
-              </a:rPr>
-              <a:t>Valor exato da compra</a:t>
+              <a:rPr sz="2800" b="1">
+                <a:solidFill>
+                  <a:srgbClr val="0A4C96"/>
+                </a:solidFill>
+                <a:latin typeface="Trebuchet MS"/>
+              </a:rPr>
+              <a:t>20%</a:t>
             </a:r>
           </a:p>
         </p:txBody>
@@ -12240,8 +9198,8 @@
         </p:nvSpPr>
         <p:spPr>
           <a:xfrm>
-            <a:off x="5394960" y="3575304"/>
-            <a:ext cx="5760720" cy="274320"/>
+            <a:off x="8275320" y="2889504"/>
+            <a:ext cx="2880360" cy="457200"/>
           </a:xfrm>
           <a:prstGeom prst="rect">
             <a:avLst/>
@@ -12256,44 +9214,251 @@
           <a:p>
             <a:pPr algn="l">
               <a:lnSpc>
+                <a:spcPct val="120000"/>
+              </a:lnSpc>
+            </a:pPr>
+            <a:r>
+              <a:rPr sz="1250" b="0">
+                <a:solidFill>
+                  <a:srgbClr val="49535F"/>
+                </a:solidFill>
+                <a:latin typeface="Trebuchet MS"/>
+              </a:rPr>
+              <a:t>de incrementalidade é</a:t>
+            </a:r>
+          </a:p>
+          <a:p>
+            <a:pPr algn="l">
+              <a:lnSpc>
+                <a:spcPct val="120000"/>
+              </a:lnSpc>
+            </a:pPr>
+            <a:r>
+              <a:rPr sz="1250" b="0">
+                <a:solidFill>
+                  <a:srgbClr val="49535F"/>
+                </a:solidFill>
+                <a:latin typeface="Trebuchet MS"/>
+              </a:rPr>
+              <a:t>o ponto de virada</a:t>
+            </a:r>
+          </a:p>
+        </p:txBody>
+      </p:sp>
+      <p:sp>
+        <p:nvSpPr>
+          <p:cNvPr id="15" name="TextBox 14"/>
+          <p:cNvSpPr txBox="1"/>
+          <p:nvPr/>
+        </p:nvSpPr>
+        <p:spPr>
+          <a:xfrm>
+            <a:off x="777240" y="3749039"/>
+            <a:ext cx="10607040" cy="365760"/>
+          </a:xfrm>
+          <a:prstGeom prst="rect">
+            <a:avLst/>
+          </a:prstGeom>
+          <a:noFill/>
+        </p:spPr>
+        <p:txBody>
+          <a:bodyPr wrap="square" lIns="0" rIns="0" tIns="0" bIns="0" anchor="t">
+            <a:spAutoFit/>
+          </a:bodyPr>
+          <a:lstStyle/>
+          <a:p>
+            <a:pPr algn="l">
+              <a:lnSpc>
                 <a:spcPct val="100000"/>
               </a:lnSpc>
             </a:pPr>
             <a:r>
-              <a:rPr sz="1350" b="0">
-                <a:solidFill>
-                  <a:srgbClr val="128040"/>
-                </a:solidFill>
-                <a:latin typeface="Trebuchet MS"/>
-              </a:rPr>
-              <a:t>não guardamos — só a faixa</a:t>
-            </a:r>
-          </a:p>
-        </p:txBody>
-      </p:sp>
-      <p:sp>
-        <p:nvSpPr>
-          <p:cNvPr id="15" name="Rounded Rectangle 14"/>
+              <a:rPr sz="1400" b="0">
+                <a:solidFill>
+                  <a:srgbClr val="49535F"/>
+                </a:solidFill>
+                <a:latin typeface="Trebuchet MS"/>
+              </a:rPr>
+              <a:t>Incrementalidade mínima para o restaurante não perder, margem bruta de 28%:</a:t>
+            </a:r>
+          </a:p>
+        </p:txBody>
+      </p:sp>
+      <p:sp>
+        <p:nvSpPr>
+          <p:cNvPr id="16" name="TextBox 15"/>
+          <p:cNvSpPr txBox="1"/>
+          <p:nvPr/>
+        </p:nvSpPr>
+        <p:spPr>
+          <a:xfrm>
+            <a:off x="777240" y="4224528"/>
+            <a:ext cx="4846320" cy="256032"/>
+          </a:xfrm>
+          <a:prstGeom prst="rect">
+            <a:avLst/>
+          </a:prstGeom>
+          <a:noFill/>
+        </p:spPr>
+        <p:txBody>
+          <a:bodyPr wrap="square" lIns="0" rIns="0" tIns="0" bIns="0" anchor="t">
+            <a:spAutoFit/>
+          </a:bodyPr>
+          <a:lstStyle/>
+          <a:p>
+            <a:pPr algn="l">
+              <a:lnSpc>
+                <a:spcPct val="100000"/>
+              </a:lnSpc>
+            </a:pPr>
+            <a:r>
+              <a:rPr sz="950" b="1">
+                <a:solidFill>
+                  <a:srgbClr val="8A939E"/>
+                </a:solidFill>
+                <a:latin typeface="Trebuchet MS"/>
+              </a:rPr>
+              <a:t>DESENHO DA CARTELA</a:t>
+            </a:r>
+          </a:p>
+        </p:txBody>
+      </p:sp>
+      <p:sp>
+        <p:nvSpPr>
+          <p:cNvPr id="17" name="TextBox 16"/>
+          <p:cNvSpPr txBox="1"/>
+          <p:nvPr/>
+        </p:nvSpPr>
+        <p:spPr>
+          <a:xfrm>
+            <a:off x="5623560" y="4224528"/>
+            <a:ext cx="1920240" cy="256032"/>
+          </a:xfrm>
+          <a:prstGeom prst="rect">
+            <a:avLst/>
+          </a:prstGeom>
+          <a:noFill/>
+        </p:spPr>
+        <p:txBody>
+          <a:bodyPr wrap="square" lIns="0" rIns="0" tIns="0" bIns="0" anchor="t">
+            <a:spAutoFit/>
+          </a:bodyPr>
+          <a:lstStyle/>
+          <a:p>
+            <a:pPr algn="ctr">
+              <a:lnSpc>
+                <a:spcPct val="100000"/>
+              </a:lnSpc>
+            </a:pPr>
+            <a:r>
+              <a:rPr sz="950" b="1">
+                <a:solidFill>
+                  <a:srgbClr val="8A939E"/>
+                </a:solidFill>
+                <a:latin typeface="Trebuchet MS"/>
+              </a:rPr>
+              <a:t>TICKET R$ 40</a:t>
+            </a:r>
+          </a:p>
+        </p:txBody>
+      </p:sp>
+      <p:sp>
+        <p:nvSpPr>
+          <p:cNvPr id="18" name="TextBox 17"/>
+          <p:cNvSpPr txBox="1"/>
+          <p:nvPr/>
+        </p:nvSpPr>
+        <p:spPr>
+          <a:xfrm>
+            <a:off x="7543800" y="4224528"/>
+            <a:ext cx="1920240" cy="256032"/>
+          </a:xfrm>
+          <a:prstGeom prst="rect">
+            <a:avLst/>
+          </a:prstGeom>
+          <a:noFill/>
+        </p:spPr>
+        <p:txBody>
+          <a:bodyPr wrap="square" lIns="0" rIns="0" tIns="0" bIns="0" anchor="t">
+            <a:spAutoFit/>
+          </a:bodyPr>
+          <a:lstStyle/>
+          <a:p>
+            <a:pPr algn="ctr">
+              <a:lnSpc>
+                <a:spcPct val="100000"/>
+              </a:lnSpc>
+            </a:pPr>
+            <a:r>
+              <a:rPr sz="950" b="1">
+                <a:solidFill>
+                  <a:srgbClr val="8A939E"/>
+                </a:solidFill>
+                <a:latin typeface="Trebuchet MS"/>
+              </a:rPr>
+              <a:t>R$ 60</a:t>
+            </a:r>
+          </a:p>
+        </p:txBody>
+      </p:sp>
+      <p:sp>
+        <p:nvSpPr>
+          <p:cNvPr id="19" name="TextBox 18"/>
+          <p:cNvSpPr txBox="1"/>
+          <p:nvPr/>
+        </p:nvSpPr>
+        <p:spPr>
+          <a:xfrm>
+            <a:off x="9464040" y="4224528"/>
+            <a:ext cx="1920240" cy="256032"/>
+          </a:xfrm>
+          <a:prstGeom prst="rect">
+            <a:avLst/>
+          </a:prstGeom>
+          <a:noFill/>
+        </p:spPr>
+        <p:txBody>
+          <a:bodyPr wrap="square" lIns="0" rIns="0" tIns="0" bIns="0" anchor="t">
+            <a:spAutoFit/>
+          </a:bodyPr>
+          <a:lstStyle/>
+          <a:p>
+            <a:pPr algn="ctr">
+              <a:lnSpc>
+                <a:spcPct val="100000"/>
+              </a:lnSpc>
+            </a:pPr>
+            <a:r>
+              <a:rPr sz="950" b="1">
+                <a:solidFill>
+                  <a:srgbClr val="8A939E"/>
+                </a:solidFill>
+                <a:latin typeface="Trebuchet MS"/>
+              </a:rPr>
+              <a:t>R$ 90</a:t>
+            </a:r>
+          </a:p>
+        </p:txBody>
+      </p:sp>
+      <p:sp>
+        <p:nvSpPr>
+          <p:cNvPr id="20" name="Rectangle 19"/>
           <p:cNvSpPr/>
           <p:nvPr/>
         </p:nvSpPr>
         <p:spPr>
           <a:xfrm>
-            <a:off x="777240" y="4050792"/>
-            <a:ext cx="10607040" cy="512064"/>
-          </a:xfrm>
-          <a:prstGeom prst="roundRect">
-            <a:avLst>
-              <a:gd name="adj" fmla="val 20000"/>
-            </a:avLst>
+            <a:off x="777240" y="4526280"/>
+            <a:ext cx="10607040" cy="18288"/>
+          </a:xfrm>
+          <a:prstGeom prst="rect">
+            <a:avLst/>
           </a:prstGeom>
           <a:solidFill>
-            <a:srgbClr val="FFFFFF"/>
+            <a:srgbClr val="10151C"/>
           </a:solidFill>
-          <a:ln w="9525">
-            <a:solidFill>
-              <a:srgbClr val="D9E0E9"/>
-            </a:solidFill>
+          <a:ln>
+            <a:noFill/>
           </a:ln>
           <a:effectLst/>
         </p:spPr>
@@ -12314,110 +9479,32 @@
         <p:txBody>
           <a:bodyPr rtlCol="0" anchor="ctr"/>
           <a:lstStyle/>
-          <a:p/>
-        </p:txBody>
-      </p:sp>
-      <p:sp>
-        <p:nvSpPr>
-          <p:cNvPr id="16" name="TextBox 15"/>
-          <p:cNvSpPr txBox="1"/>
-          <p:nvPr/>
-        </p:nvSpPr>
-        <p:spPr>
-          <a:xfrm>
-            <a:off x="1051560" y="4178808"/>
-            <a:ext cx="4206240" cy="274320"/>
-          </a:xfrm>
-          <a:prstGeom prst="rect">
-            <a:avLst/>
-          </a:prstGeom>
-          <a:noFill/>
-        </p:spPr>
-        <p:txBody>
-          <a:bodyPr wrap="square" lIns="0" rIns="0" tIns="0" bIns="0" anchor="t">
-            <a:spAutoFit/>
-          </a:bodyPr>
-          <a:lstStyle/>
-          <a:p>
-            <a:pPr algn="l">
-              <a:lnSpc>
-                <a:spcPct val="100000"/>
-              </a:lnSpc>
-            </a:pPr>
-            <a:r>
-              <a:rPr sz="1450" b="1">
-                <a:solidFill>
-                  <a:srgbClr val="10151C"/>
-                </a:solidFill>
-                <a:latin typeface="Trebuchet MS"/>
-              </a:rPr>
-              <a:t>O que foi comprado</a:t>
-            </a:r>
-          </a:p>
-        </p:txBody>
-      </p:sp>
-      <p:sp>
-        <p:nvSpPr>
-          <p:cNvPr id="17" name="TextBox 16"/>
-          <p:cNvSpPr txBox="1"/>
-          <p:nvPr/>
-        </p:nvSpPr>
-        <p:spPr>
-          <a:xfrm>
-            <a:off x="5394960" y="4178808"/>
-            <a:ext cx="5760720" cy="274320"/>
-          </a:xfrm>
-          <a:prstGeom prst="rect">
-            <a:avLst/>
-          </a:prstGeom>
-          <a:noFill/>
-        </p:spPr>
-        <p:txBody>
-          <a:bodyPr wrap="square" lIns="0" rIns="0" tIns="0" bIns="0" anchor="t">
-            <a:spAutoFit/>
-          </a:bodyPr>
-          <a:lstStyle/>
-          <a:p>
-            <a:pPr algn="l">
-              <a:lnSpc>
-                <a:spcPct val="100000"/>
-              </a:lnSpc>
-            </a:pPr>
-            <a:r>
-              <a:rPr sz="1350" b="0">
-                <a:solidFill>
-                  <a:srgbClr val="128040"/>
-                </a:solidFill>
-                <a:latin typeface="Trebuchet MS"/>
-              </a:rPr>
-              <a:t>não guardamos</a:t>
-            </a:r>
-          </a:p>
-        </p:txBody>
-      </p:sp>
-      <p:sp>
-        <p:nvSpPr>
-          <p:cNvPr id="18" name="Rounded Rectangle 17"/>
+          <a:p>
+            <a:pPr algn="ctr"/>
+          </a:p>
+        </p:txBody>
+      </p:sp>
+      <p:sp>
+        <p:nvSpPr>
+          <p:cNvPr id="21" name="Rounded Rectangle 20"/>
           <p:cNvSpPr/>
           <p:nvPr/>
         </p:nvSpPr>
         <p:spPr>
           <a:xfrm>
-            <a:off x="777240" y="4654296"/>
-            <a:ext cx="10607040" cy="512064"/>
+            <a:off x="731520" y="4590288"/>
+            <a:ext cx="10698480" cy="512064"/>
           </a:xfrm>
           <a:prstGeom prst="roundRect">
             <a:avLst>
-              <a:gd name="adj" fmla="val 20000"/>
+              <a:gd name="adj" fmla="val 14000"/>
             </a:avLst>
           </a:prstGeom>
           <a:solidFill>
-            <a:srgbClr val="FFFFFF"/>
+            <a:srgbClr val="FBECEC"/>
           </a:solidFill>
-          <a:ln w="9525">
-            <a:solidFill>
-              <a:srgbClr val="D9E0E9"/>
-            </a:solidFill>
+          <a:ln>
+            <a:noFill/>
           </a:ln>
           <a:effectLst/>
         </p:spPr>
@@ -12443,14 +9530,14 @@
       </p:sp>
       <p:sp>
         <p:nvSpPr>
-          <p:cNvPr id="19" name="TextBox 18"/>
-          <p:cNvSpPr txBox="1"/>
-          <p:nvPr/>
-        </p:nvSpPr>
-        <p:spPr>
-          <a:xfrm>
-            <a:off x="1051560" y="4782312"/>
-            <a:ext cx="4206240" cy="274320"/>
+          <p:cNvPr id="22" name="TextBox 21"/>
+          <p:cNvSpPr txBox="1"/>
+          <p:nvPr/>
+        </p:nvSpPr>
+        <p:spPr>
+          <a:xfrm>
+            <a:off x="777240" y="4663440"/>
+            <a:ext cx="4846320" cy="310896"/>
           </a:xfrm>
           <a:prstGeom prst="rect">
             <a:avLst/>
@@ -12475,73 +9562,149 @@
                 </a:solidFill>
                 <a:latin typeface="Trebuchet MS"/>
               </a:rPr>
-              <a:t>Loja, data e faixa de valor</a:t>
-            </a:r>
-          </a:p>
-        </p:txBody>
-      </p:sp>
-      <p:sp>
-        <p:nvSpPr>
-          <p:cNvPr id="20" name="TextBox 19"/>
-          <p:cNvSpPr txBox="1"/>
-          <p:nvPr/>
-        </p:nvSpPr>
-        <p:spPr>
-          <a:xfrm>
-            <a:off x="5394960" y="4782312"/>
-            <a:ext cx="5760720" cy="274320"/>
-          </a:xfrm>
-          <a:prstGeom prst="rect">
-            <a:avLst/>
-          </a:prstGeom>
-          <a:noFill/>
-        </p:spPr>
-        <p:txBody>
-          <a:bodyPr wrap="square" lIns="0" rIns="0" tIns="0" bIns="0" anchor="t">
-            <a:spAutoFit/>
-          </a:bodyPr>
-          <a:lstStyle/>
-          <a:p>
-            <a:pPr algn="l">
+              <a:t>3 carimbos · vale R$ 30</a:t>
+            </a:r>
+          </a:p>
+        </p:txBody>
+      </p:sp>
+      <p:sp>
+        <p:nvSpPr>
+          <p:cNvPr id="23" name="TextBox 22"/>
+          <p:cNvSpPr txBox="1"/>
+          <p:nvPr/>
+        </p:nvSpPr>
+        <p:spPr>
+          <a:xfrm>
+            <a:off x="5623560" y="4663440"/>
+            <a:ext cx="1920240" cy="310896"/>
+          </a:xfrm>
+          <a:prstGeom prst="rect">
+            <a:avLst/>
+          </a:prstGeom>
+          <a:noFill/>
+        </p:spPr>
+        <p:txBody>
+          <a:bodyPr wrap="square" lIns="0" rIns="0" tIns="0" bIns="0" anchor="t">
+            <a:spAutoFit/>
+          </a:bodyPr>
+          <a:lstStyle/>
+          <a:p>
+            <a:pPr algn="ctr">
               <a:lnSpc>
                 <a:spcPct val="100000"/>
               </a:lnSpc>
             </a:pPr>
             <a:r>
-              <a:rPr sz="1350" b="0">
-                <a:solidFill>
-                  <a:srgbClr val="49535F"/>
-                </a:solidFill>
-                <a:latin typeface="Trebuchet MS"/>
-              </a:rPr>
-              <a:t>guardamos — é o que define o carimbo</a:t>
-            </a:r>
-          </a:p>
-        </p:txBody>
-      </p:sp>
-      <p:sp>
-        <p:nvSpPr>
-          <p:cNvPr id="21" name="Rounded Rectangle 20"/>
+              <a:rPr sz="1500" b="1">
+                <a:solidFill>
+                  <a:srgbClr val="D62718"/>
+                </a:solidFill>
+                <a:latin typeface="Trebuchet MS"/>
+              </a:rPr>
+              <a:t>60%</a:t>
+            </a:r>
+          </a:p>
+        </p:txBody>
+      </p:sp>
+      <p:sp>
+        <p:nvSpPr>
+          <p:cNvPr id="24" name="TextBox 23"/>
+          <p:cNvSpPr txBox="1"/>
+          <p:nvPr/>
+        </p:nvSpPr>
+        <p:spPr>
+          <a:xfrm>
+            <a:off x="7543800" y="4663440"/>
+            <a:ext cx="1920240" cy="310896"/>
+          </a:xfrm>
+          <a:prstGeom prst="rect">
+            <a:avLst/>
+          </a:prstGeom>
+          <a:noFill/>
+        </p:spPr>
+        <p:txBody>
+          <a:bodyPr wrap="square" lIns="0" rIns="0" tIns="0" bIns="0" anchor="t">
+            <a:spAutoFit/>
+          </a:bodyPr>
+          <a:lstStyle/>
+          <a:p>
+            <a:pPr algn="ctr">
+              <a:lnSpc>
+                <a:spcPct val="100000"/>
+              </a:lnSpc>
+            </a:pPr>
+            <a:r>
+              <a:rPr sz="1500" b="1">
+                <a:solidFill>
+                  <a:srgbClr val="D62718"/>
+                </a:solidFill>
+                <a:latin typeface="Trebuchet MS"/>
+              </a:rPr>
+              <a:t>45%</a:t>
+            </a:r>
+          </a:p>
+        </p:txBody>
+      </p:sp>
+      <p:sp>
+        <p:nvSpPr>
+          <p:cNvPr id="25" name="TextBox 24"/>
+          <p:cNvSpPr txBox="1"/>
+          <p:nvPr/>
+        </p:nvSpPr>
+        <p:spPr>
+          <a:xfrm>
+            <a:off x="9464040" y="4663440"/>
+            <a:ext cx="1920240" cy="310896"/>
+          </a:xfrm>
+          <a:prstGeom prst="rect">
+            <a:avLst/>
+          </a:prstGeom>
+          <a:noFill/>
+        </p:spPr>
+        <p:txBody>
+          <a:bodyPr wrap="square" lIns="0" rIns="0" tIns="0" bIns="0" anchor="t">
+            <a:spAutoFit/>
+          </a:bodyPr>
+          <a:lstStyle/>
+          <a:p>
+            <a:pPr algn="ctr">
+              <a:lnSpc>
+                <a:spcPct val="100000"/>
+              </a:lnSpc>
+            </a:pPr>
+            <a:r>
+              <a:rPr sz="1500" b="1">
+                <a:solidFill>
+                  <a:srgbClr val="D62718"/>
+                </a:solidFill>
+                <a:latin typeface="Trebuchet MS"/>
+              </a:rPr>
+              <a:t>30%</a:t>
+            </a:r>
+          </a:p>
+        </p:txBody>
+      </p:sp>
+      <p:sp>
+        <p:nvSpPr>
+          <p:cNvPr id="26" name="Rounded Rectangle 25"/>
           <p:cNvSpPr/>
           <p:nvPr/>
         </p:nvSpPr>
         <p:spPr>
           <a:xfrm>
-            <a:off x="777240" y="5257800"/>
-            <a:ext cx="10607040" cy="512064"/>
+            <a:off x="731520" y="5212079"/>
+            <a:ext cx="10698480" cy="512064"/>
           </a:xfrm>
           <a:prstGeom prst="roundRect">
             <a:avLst>
-              <a:gd name="adj" fmla="val 20000"/>
+              <a:gd name="adj" fmla="val 14000"/>
             </a:avLst>
           </a:prstGeom>
           <a:solidFill>
-            <a:srgbClr val="FFFFFF"/>
+            <a:srgbClr val="EDF7F0"/>
           </a:solidFill>
-          <a:ln w="9525">
-            <a:solidFill>
-              <a:srgbClr val="D9E0E9"/>
-            </a:solidFill>
+          <a:ln>
+            <a:noFill/>
           </a:ln>
           <a:effectLst/>
         </p:spPr>
@@ -12567,14 +9730,14 @@
       </p:sp>
       <p:sp>
         <p:nvSpPr>
-          <p:cNvPr id="22" name="TextBox 21"/>
-          <p:cNvSpPr txBox="1"/>
-          <p:nvPr/>
-        </p:nvSpPr>
-        <p:spPr>
-          <a:xfrm>
-            <a:off x="1051560" y="5385816"/>
-            <a:ext cx="4206240" cy="274320"/>
+          <p:cNvPr id="27" name="TextBox 26"/>
+          <p:cNvSpPr txBox="1"/>
+          <p:nvPr/>
+        </p:nvSpPr>
+        <p:spPr>
+          <a:xfrm>
+            <a:off x="777240" y="5285231"/>
+            <a:ext cx="4846320" cy="310896"/>
           </a:xfrm>
           <a:prstGeom prst="rect">
             <a:avLst/>
@@ -12599,21 +9762,138 @@
                 </a:solidFill>
                 <a:latin typeface="Trebuchet MS"/>
               </a:rPr>
-              <a:t>Identificador aleatório da carteira</a:t>
-            </a:r>
-          </a:p>
-        </p:txBody>
-      </p:sp>
-      <p:sp>
-        <p:nvSpPr>
-          <p:cNvPr id="23" name="TextBox 22"/>
-          <p:cNvSpPr txBox="1"/>
-          <p:nvPr/>
-        </p:nvSpPr>
-        <p:spPr>
-          <a:xfrm>
-            <a:off x="5394960" y="5385816"/>
-            <a:ext cx="5760720" cy="274320"/>
+              <a:t>5 carimbos · vale R$ 20</a:t>
+            </a:r>
+          </a:p>
+        </p:txBody>
+      </p:sp>
+      <p:sp>
+        <p:nvSpPr>
+          <p:cNvPr id="28" name="TextBox 27"/>
+          <p:cNvSpPr txBox="1"/>
+          <p:nvPr/>
+        </p:nvSpPr>
+        <p:spPr>
+          <a:xfrm>
+            <a:off x="5623560" y="5285231"/>
+            <a:ext cx="1920240" cy="310896"/>
+          </a:xfrm>
+          <a:prstGeom prst="rect">
+            <a:avLst/>
+          </a:prstGeom>
+          <a:noFill/>
+        </p:spPr>
+        <p:txBody>
+          <a:bodyPr wrap="square" lIns="0" rIns="0" tIns="0" bIns="0" anchor="t">
+            <a:spAutoFit/>
+          </a:bodyPr>
+          <a:lstStyle/>
+          <a:p>
+            <a:pPr algn="ctr">
+              <a:lnSpc>
+                <a:spcPct val="100000"/>
+              </a:lnSpc>
+            </a:pPr>
+            <a:r>
+              <a:rPr sz="1500" b="1">
+                <a:solidFill>
+                  <a:srgbClr val="128040"/>
+                </a:solidFill>
+                <a:latin typeface="Trebuchet MS"/>
+              </a:rPr>
+              <a:t>30%</a:t>
+            </a:r>
+          </a:p>
+        </p:txBody>
+      </p:sp>
+      <p:sp>
+        <p:nvSpPr>
+          <p:cNvPr id="29" name="TextBox 28"/>
+          <p:cNvSpPr txBox="1"/>
+          <p:nvPr/>
+        </p:nvSpPr>
+        <p:spPr>
+          <a:xfrm>
+            <a:off x="7543800" y="5285231"/>
+            <a:ext cx="1920240" cy="310896"/>
+          </a:xfrm>
+          <a:prstGeom prst="rect">
+            <a:avLst/>
+          </a:prstGeom>
+          <a:noFill/>
+        </p:spPr>
+        <p:txBody>
+          <a:bodyPr wrap="square" lIns="0" rIns="0" tIns="0" bIns="0" anchor="t">
+            <a:spAutoFit/>
+          </a:bodyPr>
+          <a:lstStyle/>
+          <a:p>
+            <a:pPr algn="ctr">
+              <a:lnSpc>
+                <a:spcPct val="100000"/>
+              </a:lnSpc>
+            </a:pPr>
+            <a:r>
+              <a:rPr sz="1500" b="1">
+                <a:solidFill>
+                  <a:srgbClr val="128040"/>
+                </a:solidFill>
+                <a:latin typeface="Trebuchet MS"/>
+              </a:rPr>
+              <a:t>20%</a:t>
+            </a:r>
+          </a:p>
+        </p:txBody>
+      </p:sp>
+      <p:sp>
+        <p:nvSpPr>
+          <p:cNvPr id="30" name="TextBox 29"/>
+          <p:cNvSpPr txBox="1"/>
+          <p:nvPr/>
+        </p:nvSpPr>
+        <p:spPr>
+          <a:xfrm>
+            <a:off x="9464040" y="5285231"/>
+            <a:ext cx="1920240" cy="310896"/>
+          </a:xfrm>
+          <a:prstGeom prst="rect">
+            <a:avLst/>
+          </a:prstGeom>
+          <a:noFill/>
+        </p:spPr>
+        <p:txBody>
+          <a:bodyPr wrap="square" lIns="0" rIns="0" tIns="0" bIns="0" anchor="t">
+            <a:spAutoFit/>
+          </a:bodyPr>
+          <a:lstStyle/>
+          <a:p>
+            <a:pPr algn="ctr">
+              <a:lnSpc>
+                <a:spcPct val="100000"/>
+              </a:lnSpc>
+            </a:pPr>
+            <a:r>
+              <a:rPr sz="1500" b="1">
+                <a:solidFill>
+                  <a:srgbClr val="128040"/>
+                </a:solidFill>
+                <a:latin typeface="Trebuchet MS"/>
+              </a:rPr>
+              <a:t>13%</a:t>
+            </a:r>
+          </a:p>
+        </p:txBody>
+      </p:sp>
+      <p:sp>
+        <p:nvSpPr>
+          <p:cNvPr id="31" name="TextBox 30"/>
+          <p:cNvSpPr txBox="1"/>
+          <p:nvPr/>
+        </p:nvSpPr>
+        <p:spPr>
+          <a:xfrm>
+            <a:off x="777240" y="5952743"/>
+            <a:ext cx="10607040" cy="457200"/>
           </a:xfrm>
           <a:prstGeom prst="rect">
             <a:avLst/>
@@ -12628,79 +9908,24 @@
           <a:p>
             <a:pPr algn="l">
               <a:lnSpc>
-                <a:spcPct val="100000"/>
-              </a:lnSpc>
-            </a:pPr>
-            <a:r>
-              <a:rPr sz="1350" b="0">
+                <a:spcPct val="120000"/>
+              </a:lnSpc>
+            </a:pPr>
+            <a:r>
+              <a:rPr sz="1400" b="0">
                 <a:solidFill>
                   <a:srgbClr val="49535F"/>
                 </a:solidFill>
                 <a:latin typeface="Trebuchet MS"/>
               </a:rPr>
-              <a:t>guardamos — descartável, o morador gera outro</a:t>
-            </a:r>
-          </a:p>
-        </p:txBody>
-      </p:sp>
-      <p:sp>
-        <p:nvSpPr>
-          <p:cNvPr id="24" name="TextBox 23"/>
-          <p:cNvSpPr txBox="1"/>
-          <p:nvPr/>
-        </p:nvSpPr>
-        <p:spPr>
-          <a:xfrm>
-            <a:off x="777240" y="5952744"/>
-            <a:ext cx="10607040" cy="822960"/>
-          </a:xfrm>
-          <a:prstGeom prst="rect">
-            <a:avLst/>
-          </a:prstGeom>
-          <a:noFill/>
-        </p:spPr>
-        <p:txBody>
-          <a:bodyPr wrap="square" lIns="0" rIns="0" tIns="0" bIns="0" anchor="t">
-            <a:spAutoFit/>
-          </a:bodyPr>
-          <a:lstStyle/>
-          <a:p>
-            <a:pPr algn="l">
-              <a:lnSpc>
-                <a:spcPct val="130000"/>
-              </a:lnSpc>
-            </a:pPr>
-            <a:r>
-              <a:rPr sz="1400" b="0">
-                <a:solidFill>
-                  <a:srgbClr val="49535F"/>
-                </a:solidFill>
-                <a:latin typeface="Trebuchet MS"/>
-              </a:rPr>
-              <a:t>Assinatura ECDSA P-256 gerada no próprio navegador · verificação offline · credencial revogável a qualquer momento</a:t>
-            </a:r>
-          </a:p>
-          <a:p>
-            <a:pPr algn="l">
-              <a:lnSpc>
-                <a:spcPct val="130000"/>
-              </a:lnSpc>
-            </a:pPr>
-            <a:r>
-              <a:rPr sz="1400" b="0">
-                <a:solidFill>
-                  <a:srgbClr val="49535F"/>
-                </a:solidFill>
-                <a:latin typeface="Trebuchet MS"/>
-              </a:rPr>
-              <a:t>· vale com número de série que só pode ser resgatado uma vez.</a:t>
-            </a:r>
-          </a:p>
-        </p:txBody>
-      </p:sp>
-      <p:sp>
-        <p:nvSpPr>
-          <p:cNvPr id="25" name="TextBox 24"/>
+              <a:t>Fidelidade entrega de 10% a 30%. O desenho de 3 carimbos com vale de R$ 30 não fecha; cartela de 5 com vale de R$ 20 fecha.</a:t>
+            </a:r>
+          </a:p>
+        </p:txBody>
+      </p:sp>
+      <p:sp>
+        <p:nvSpPr>
+          <p:cNvPr id="32" name="TextBox 31"/>
           <p:cNvSpPr txBox="1"/>
           <p:nvPr/>
         </p:nvSpPr>
@@ -12739,7 +9964,7 @@
       </p:sp>
       <p:sp>
         <p:nvSpPr>
-          <p:cNvPr id="26" name="TextBox 25"/>
+          <p:cNvPr id="33" name="TextBox 32"/>
           <p:cNvSpPr txBox="1"/>
           <p:nvPr/>
         </p:nvSpPr>
@@ -12872,7 +10097,7 @@
                 </a:solidFill>
                 <a:latin typeface="Trebuchet MS"/>
               </a:rPr>
-              <a:t>ACESSIBILIDADE</a:t>
+              <a:t>COMO TESTAMOS E VALIDAMOS</a:t>
             </a:r>
           </a:p>
         </p:txBody>
@@ -12911,7 +10136,7 @@
                 </a:solidFill>
                 <a:latin typeface="Trebuchet MS"/>
               </a:rPr>
-              <a:t>Feito para ser usado no balcão,</a:t>
+              <a:t>Um teste de campo em 30 dias,</a:t>
             </a:r>
           </a:p>
           <a:p>
@@ -12927,7 +10152,7 @@
                 </a:solidFill>
                 <a:latin typeface="Trebuchet MS"/>
               </a:rPr>
-              <a:t>por qualquer pessoa</a:t>
+              <a:t>com custo perto de zero</a:t>
             </a:r>
           </a:p>
         </p:txBody>
@@ -12978,16 +10203,62 @@
       </p:sp>
       <p:sp>
         <p:nvSpPr>
-          <p:cNvPr id="6" name="Oval 5"/>
+          <p:cNvPr id="6" name="Rounded Rectangle 5"/>
           <p:cNvSpPr/>
           <p:nvPr/>
         </p:nvSpPr>
         <p:spPr>
           <a:xfrm>
-            <a:off x="777240" y="2697479"/>
-            <a:ext cx="256032" cy="256032"/>
-          </a:xfrm>
-          <a:prstGeom prst="ellipse">
+            <a:off x="777240" y="2148840"/>
+            <a:ext cx="3337560" cy="3200400"/>
+          </a:xfrm>
+          <a:prstGeom prst="roundRect">
+            <a:avLst>
+              <a:gd name="adj" fmla="val 6000"/>
+            </a:avLst>
+          </a:prstGeom>
+          <a:solidFill>
+            <a:srgbClr val="FFFFFF"/>
+          </a:solidFill>
+          <a:ln w="12700">
+            <a:solidFill>
+              <a:srgbClr val="D9E0E9"/>
+            </a:solidFill>
+          </a:ln>
+          <a:effectLst/>
+        </p:spPr>
+        <p:style>
+          <a:lnRef idx="1">
+            <a:schemeClr val="accent1"/>
+          </a:lnRef>
+          <a:fillRef idx="3">
+            <a:schemeClr val="accent1"/>
+          </a:fillRef>
+          <a:effectRef idx="2">
+            <a:schemeClr val="accent1"/>
+          </a:effectRef>
+          <a:fontRef idx="minor">
+            <a:schemeClr val="lt1"/>
+          </a:fontRef>
+        </p:style>
+        <p:txBody>
+          <a:bodyPr rtlCol="0" anchor="ctr"/>
+          <a:lstStyle/>
+          <a:p/>
+        </p:txBody>
+      </p:sp>
+      <p:sp>
+        <p:nvSpPr>
+          <p:cNvPr id="7" name="Rectangle 6"/>
+          <p:cNvSpPr/>
+          <p:nvPr/>
+        </p:nvSpPr>
+        <p:spPr>
+          <a:xfrm>
+            <a:off x="777240" y="2148840"/>
+            <a:ext cx="3337560" cy="82296"/>
+          </a:xfrm>
+          <a:prstGeom prst="rect">
             <a:avLst/>
           </a:prstGeom>
           <a:solidFill>
@@ -13022,53 +10293,53 @@
       </p:sp>
       <p:sp>
         <p:nvSpPr>
-          <p:cNvPr id="7" name="TextBox 6"/>
-          <p:cNvSpPr txBox="1"/>
-          <p:nvPr/>
-        </p:nvSpPr>
-        <p:spPr>
-          <a:xfrm>
-            <a:off x="777240" y="2734056"/>
-            <a:ext cx="256032" cy="228600"/>
-          </a:xfrm>
-          <a:prstGeom prst="rect">
-            <a:avLst/>
-          </a:prstGeom>
-          <a:noFill/>
-        </p:spPr>
-        <p:txBody>
-          <a:bodyPr wrap="square" lIns="0" rIns="0" tIns="0" bIns="0" anchor="t">
-            <a:spAutoFit/>
-          </a:bodyPr>
-          <a:lstStyle/>
-          <a:p>
-            <a:pPr algn="ctr">
+          <p:cNvPr id="8" name="TextBox 7"/>
+          <p:cNvSpPr txBox="1"/>
+          <p:nvPr/>
+        </p:nvSpPr>
+        <p:spPr>
+          <a:xfrm>
+            <a:off x="1033271" y="2395728"/>
+            <a:ext cx="2834640" cy="320040"/>
+          </a:xfrm>
+          <a:prstGeom prst="rect">
+            <a:avLst/>
+          </a:prstGeom>
+          <a:noFill/>
+        </p:spPr>
+        <p:txBody>
+          <a:bodyPr wrap="square" lIns="0" rIns="0" tIns="0" bIns="0" anchor="t">
+            <a:spAutoFit/>
+          </a:bodyPr>
+          <a:lstStyle/>
+          <a:p>
+            <a:pPr algn="l">
               <a:lnSpc>
                 <a:spcPct val="100000"/>
               </a:lnSpc>
             </a:pPr>
             <a:r>
-              <a:rPr sz="1100" b="1">
-                <a:solidFill>
-                  <a:srgbClr val="FFFFFF"/>
-                </a:solidFill>
-                <a:latin typeface="Trebuchet MS"/>
-              </a:rPr>
-              <a:t>✓</a:t>
-            </a:r>
-          </a:p>
-        </p:txBody>
-      </p:sp>
-      <p:sp>
-        <p:nvSpPr>
-          <p:cNvPr id="8" name="TextBox 7"/>
-          <p:cNvSpPr txBox="1"/>
-          <p:nvPr/>
-        </p:nvSpPr>
-        <p:spPr>
-          <a:xfrm>
-            <a:off x="1188720" y="2651760"/>
-            <a:ext cx="4663440" cy="731520"/>
+              <a:rPr sz="1600" b="1">
+                <a:solidFill>
+                  <a:srgbClr val="10151C"/>
+                </a:solidFill>
+                <a:latin typeface="Trebuchet MS"/>
+              </a:rPr>
+              <a:t>Já validado</a:t>
+            </a:r>
+          </a:p>
+        </p:txBody>
+      </p:sp>
+      <p:sp>
+        <p:nvSpPr>
+          <p:cNvPr id="9" name="TextBox 8"/>
+          <p:cNvSpPr txBox="1"/>
+          <p:nvPr/>
+        </p:nvSpPr>
+        <p:spPr>
+          <a:xfrm>
+            <a:off x="1033271" y="2834640"/>
+            <a:ext cx="2834640" cy="2377440"/>
           </a:xfrm>
           <a:prstGeom prst="rect">
             <a:avLst/>
@@ -13087,33 +10358,143 @@
               </a:lnSpc>
             </a:pPr>
             <a:r>
-              <a:rPr sz="1450" b="0">
-                <a:solidFill>
-                  <a:srgbClr val="10151C"/>
-                </a:solidFill>
-                <a:latin typeface="Trebuchet MS"/>
-              </a:rPr>
-              <a:t>Navegação completa por teclado, com foco sempre visível</a:t>
-            </a:r>
-          </a:p>
-        </p:txBody>
-      </p:sp>
-      <p:sp>
-        <p:nvSpPr>
-          <p:cNvPr id="9" name="Oval 8"/>
+              <a:rPr sz="1250" b="0">
+                <a:solidFill>
+                  <a:srgbClr val="49535F"/>
+                </a:solidFill>
+                <a:latin typeface="Trebuchet MS"/>
+              </a:rPr>
+              <a:t>O protótipo roda: credencial assinada,</a:t>
+            </a:r>
+          </a:p>
+          <a:p>
+            <a:pPr algn="l">
+              <a:lnSpc>
+                <a:spcPct val="130000"/>
+              </a:lnSpc>
+            </a:pPr>
+            <a:r>
+              <a:rPr sz="1250" b="0">
+                <a:solidFill>
+                  <a:srgbClr val="49535F"/>
+                </a:solidFill>
+                <a:latin typeface="Trebuchet MS"/>
+              </a:rPr>
+              <a:t>verificação offline entre restaurantes,</a:t>
+            </a:r>
+          </a:p>
+          <a:p>
+            <a:pPr algn="l">
+              <a:lnSpc>
+                <a:spcPct val="130000"/>
+              </a:lnSpc>
+            </a:pPr>
+            <a:r>
+              <a:rPr sz="1250" b="0">
+                <a:solidFill>
+                  <a:srgbClr val="49535F"/>
+                </a:solidFill>
+                <a:latin typeface="Trebuchet MS"/>
+              </a:rPr>
+              <a:t>resgate único e carimbo adulterado rejeitado.</a:t>
+            </a:r>
+          </a:p>
+          <a:p>
+            <a:pPr algn="l">
+              <a:lnSpc>
+                <a:spcPct val="130000"/>
+              </a:lnSpc>
+            </a:pPr>
+            <a:r>
+              <a:rPr sz="1250" b="0">
+                <a:solidFill>
+                  <a:srgbClr val="49535F"/>
+                </a:solidFill>
+                <a:latin typeface="Trebuchet MS"/>
+              </a:rPr>
+              <a:t/>
+            </a:r>
+          </a:p>
+          <a:p>
+            <a:pPr algn="l">
+              <a:lnSpc>
+                <a:spcPct val="130000"/>
+              </a:lnSpc>
+            </a:pPr>
+            <a:r>
+              <a:rPr sz="1250" b="0">
+                <a:solidFill>
+                  <a:srgbClr val="49535F"/>
+                </a:solidFill>
+                <a:latin typeface="Trebuchet MS"/>
+              </a:rPr>
+              <a:t>Testado por script em dois navegadores.</a:t>
+            </a:r>
+          </a:p>
+        </p:txBody>
+      </p:sp>
+      <p:sp>
+        <p:nvSpPr>
+          <p:cNvPr id="10" name="Rounded Rectangle 9"/>
           <p:cNvSpPr/>
           <p:nvPr/>
         </p:nvSpPr>
         <p:spPr>
           <a:xfrm>
-            <a:off x="6172200" y="2697479"/>
-            <a:ext cx="256032" cy="256032"/>
-          </a:xfrm>
-          <a:prstGeom prst="ellipse">
-            <a:avLst/>
+            <a:off x="4389120" y="2148840"/>
+            <a:ext cx="3337560" cy="3200400"/>
+          </a:xfrm>
+          <a:prstGeom prst="roundRect">
+            <a:avLst>
+              <a:gd name="adj" fmla="val 6000"/>
+            </a:avLst>
           </a:prstGeom>
           <a:solidFill>
-            <a:srgbClr val="128040"/>
+            <a:srgbClr val="FFFFFF"/>
+          </a:solidFill>
+          <a:ln w="12700">
+            <a:solidFill>
+              <a:srgbClr val="D9E0E9"/>
+            </a:solidFill>
+          </a:ln>
+          <a:effectLst/>
+        </p:spPr>
+        <p:style>
+          <a:lnRef idx="1">
+            <a:schemeClr val="accent1"/>
+          </a:lnRef>
+          <a:fillRef idx="3">
+            <a:schemeClr val="accent1"/>
+          </a:fillRef>
+          <a:effectRef idx="2">
+            <a:schemeClr val="accent1"/>
+          </a:effectRef>
+          <a:fontRef idx="minor">
+            <a:schemeClr val="lt1"/>
+          </a:fontRef>
+        </p:style>
+        <p:txBody>
+          <a:bodyPr rtlCol="0" anchor="ctr"/>
+          <a:lstStyle/>
+          <a:p/>
+        </p:txBody>
+      </p:sp>
+      <p:sp>
+        <p:nvSpPr>
+          <p:cNvPr id="11" name="Rectangle 10"/>
+          <p:cNvSpPr/>
+          <p:nvPr/>
+        </p:nvSpPr>
+        <p:spPr>
+          <a:xfrm>
+            <a:off x="4389120" y="2148840"/>
+            <a:ext cx="3337560" cy="82296"/>
+          </a:xfrm>
+          <a:prstGeom prst="rect">
+            <a:avLst/>
+          </a:prstGeom>
+          <a:solidFill>
+            <a:srgbClr val="0E6FD8"/>
           </a:solidFill>
           <a:ln>
             <a:noFill/>
@@ -13144,53 +10525,53 @@
       </p:sp>
       <p:sp>
         <p:nvSpPr>
-          <p:cNvPr id="10" name="TextBox 9"/>
-          <p:cNvSpPr txBox="1"/>
-          <p:nvPr/>
-        </p:nvSpPr>
-        <p:spPr>
-          <a:xfrm>
-            <a:off x="6172200" y="2734056"/>
-            <a:ext cx="256032" cy="228600"/>
-          </a:xfrm>
-          <a:prstGeom prst="rect">
-            <a:avLst/>
-          </a:prstGeom>
-          <a:noFill/>
-        </p:spPr>
-        <p:txBody>
-          <a:bodyPr wrap="square" lIns="0" rIns="0" tIns="0" bIns="0" anchor="t">
-            <a:spAutoFit/>
-          </a:bodyPr>
-          <a:lstStyle/>
-          <a:p>
-            <a:pPr algn="ctr">
+          <p:cNvPr id="12" name="TextBox 11"/>
+          <p:cNvSpPr txBox="1"/>
+          <p:nvPr/>
+        </p:nvSpPr>
+        <p:spPr>
+          <a:xfrm>
+            <a:off x="4645152" y="2395728"/>
+            <a:ext cx="2834640" cy="320040"/>
+          </a:xfrm>
+          <a:prstGeom prst="rect">
+            <a:avLst/>
+          </a:prstGeom>
+          <a:noFill/>
+        </p:spPr>
+        <p:txBody>
+          <a:bodyPr wrap="square" lIns="0" rIns="0" tIns="0" bIns="0" anchor="t">
+            <a:spAutoFit/>
+          </a:bodyPr>
+          <a:lstStyle/>
+          <a:p>
+            <a:pPr algn="l">
               <a:lnSpc>
                 <a:spcPct val="100000"/>
               </a:lnSpc>
             </a:pPr>
             <a:r>
-              <a:rPr sz="1100" b="1">
-                <a:solidFill>
-                  <a:srgbClr val="FFFFFF"/>
-                </a:solidFill>
-                <a:latin typeface="Trebuchet MS"/>
-              </a:rPr>
-              <a:t>✓</a:t>
-            </a:r>
-          </a:p>
-        </p:txBody>
-      </p:sp>
-      <p:sp>
-        <p:nvSpPr>
-          <p:cNvPr id="11" name="TextBox 10"/>
-          <p:cNvSpPr txBox="1"/>
-          <p:nvPr/>
-        </p:nvSpPr>
-        <p:spPr>
-          <a:xfrm>
-            <a:off x="6583680" y="2651760"/>
-            <a:ext cx="4663440" cy="731520"/>
+              <a:rPr sz="1600" b="1">
+                <a:solidFill>
+                  <a:srgbClr val="10151C"/>
+                </a:solidFill>
+                <a:latin typeface="Trebuchet MS"/>
+              </a:rPr>
+              <a:t>O teste de campo</a:t>
+            </a:r>
+          </a:p>
+        </p:txBody>
+      </p:sp>
+      <p:sp>
+        <p:nvSpPr>
+          <p:cNvPr id="13" name="TextBox 12"/>
+          <p:cNvSpPr txBox="1"/>
+          <p:nvPr/>
+        </p:nvSpPr>
+        <p:spPr>
+          <a:xfrm>
+            <a:off x="4645152" y="2834640"/>
+            <a:ext cx="2834640" cy="2377440"/>
           </a:xfrm>
           <a:prstGeom prst="rect">
             <a:avLst/>
@@ -13209,33 +10590,159 @@
               </a:lnSpc>
             </a:pPr>
             <a:r>
-              <a:rPr sz="1450" b="0">
-                <a:solidFill>
-                  <a:srgbClr val="10151C"/>
-                </a:solidFill>
-                <a:latin typeface="Trebuchet MS"/>
-              </a:rPr>
-              <a:t>Cada verificação é anunciada por leitor de tela</a:t>
-            </a:r>
-          </a:p>
-        </p:txBody>
-      </p:sp>
-      <p:sp>
-        <p:nvSpPr>
-          <p:cNvPr id="12" name="Oval 11"/>
+              <a:rPr sz="1250" b="0">
+                <a:solidFill>
+                  <a:srgbClr val="49535F"/>
+                </a:solidFill>
+                <a:latin typeface="Trebuchet MS"/>
+              </a:rPr>
+              <a:t>3 a 5 restaurantes na mesma rua,</a:t>
+            </a:r>
+          </a:p>
+          <a:p>
+            <a:pPr algn="l">
+              <a:lnSpc>
+                <a:spcPct val="130000"/>
+              </a:lnSpc>
+            </a:pPr>
+            <a:r>
+              <a:rPr sz="1250" b="0">
+                <a:solidFill>
+                  <a:srgbClr val="49535F"/>
+                </a:solidFill>
+                <a:latin typeface="Trebuchet MS"/>
+              </a:rPr>
+              <a:t>15% para morador, duas semanas de um</a:t>
+            </a:r>
+          </a:p>
+          <a:p>
+            <a:pPr algn="l">
+              <a:lnSpc>
+                <a:spcPct val="130000"/>
+              </a:lnSpc>
+            </a:pPr>
+            <a:r>
+              <a:rPr sz="1250" b="0">
+                <a:solidFill>
+                  <a:srgbClr val="49535F"/>
+                </a:solidFill>
+                <a:latin typeface="Trebuchet MS"/>
+              </a:rPr>
+              <a:t>mês de vale (maio ou junho).</a:t>
+            </a:r>
+          </a:p>
+          <a:p>
+            <a:pPr algn="l">
+              <a:lnSpc>
+                <a:spcPct val="130000"/>
+              </a:lnSpc>
+            </a:pPr>
+            <a:r>
+              <a:rPr sz="1250" b="0">
+                <a:solidFill>
+                  <a:srgbClr val="49535F"/>
+                </a:solidFill>
+                <a:latin typeface="Trebuchet MS"/>
+              </a:rPr>
+              <a:t/>
+            </a:r>
+          </a:p>
+          <a:p>
+            <a:pPr algn="l">
+              <a:lnSpc>
+                <a:spcPct val="130000"/>
+              </a:lnSpc>
+            </a:pPr>
+            <a:r>
+              <a:rPr sz="1250" b="0">
+                <a:solidFill>
+                  <a:srgbClr val="49535F"/>
+                </a:solidFill>
+                <a:latin typeface="Trebuchet MS"/>
+              </a:rPr>
+              <a:t>Grupo de controle: restaurantes parecidos</a:t>
+            </a:r>
+          </a:p>
+          <a:p>
+            <a:pPr algn="l">
+              <a:lnSpc>
+                <a:spcPct val="130000"/>
+              </a:lnSpc>
+            </a:pPr>
+            <a:r>
+              <a:rPr sz="1250" b="0">
+                <a:solidFill>
+                  <a:srgbClr val="49535F"/>
+                </a:solidFill>
+                <a:latin typeface="Trebuchet MS"/>
+              </a:rPr>
+              <a:t>que não participam.</a:t>
+            </a:r>
+          </a:p>
+        </p:txBody>
+      </p:sp>
+      <p:sp>
+        <p:nvSpPr>
+          <p:cNvPr id="14" name="Rounded Rectangle 13"/>
           <p:cNvSpPr/>
           <p:nvPr/>
         </p:nvSpPr>
         <p:spPr>
           <a:xfrm>
-            <a:off x="777240" y="3566159"/>
-            <a:ext cx="256032" cy="256032"/>
-          </a:xfrm>
-          <a:prstGeom prst="ellipse">
-            <a:avLst/>
+            <a:off x="8001000" y="2148840"/>
+            <a:ext cx="3337560" cy="3200400"/>
+          </a:xfrm>
+          <a:prstGeom prst="roundRect">
+            <a:avLst>
+              <a:gd name="adj" fmla="val 6000"/>
+            </a:avLst>
           </a:prstGeom>
           <a:solidFill>
-            <a:srgbClr val="128040"/>
+            <a:srgbClr val="FFFFFF"/>
+          </a:solidFill>
+          <a:ln w="12700">
+            <a:solidFill>
+              <a:srgbClr val="D9E0E9"/>
+            </a:solidFill>
+          </a:ln>
+          <a:effectLst/>
+        </p:spPr>
+        <p:style>
+          <a:lnRef idx="1">
+            <a:schemeClr val="accent1"/>
+          </a:lnRef>
+          <a:fillRef idx="3">
+            <a:schemeClr val="accent1"/>
+          </a:fillRef>
+          <a:effectRef idx="2">
+            <a:schemeClr val="accent1"/>
+          </a:effectRef>
+          <a:fontRef idx="minor">
+            <a:schemeClr val="lt1"/>
+          </a:fontRef>
+        </p:style>
+        <p:txBody>
+          <a:bodyPr rtlCol="0" anchor="ctr"/>
+          <a:lstStyle/>
+          <a:p/>
+        </p:txBody>
+      </p:sp>
+      <p:sp>
+        <p:nvSpPr>
+          <p:cNvPr id="15" name="Rectangle 14"/>
+          <p:cNvSpPr/>
+          <p:nvPr/>
+        </p:nvSpPr>
+        <p:spPr>
+          <a:xfrm>
+            <a:off x="8001000" y="2148840"/>
+            <a:ext cx="3337560" cy="82296"/>
+          </a:xfrm>
+          <a:prstGeom prst="rect">
+            <a:avLst/>
+          </a:prstGeom>
+          <a:solidFill>
+            <a:srgbClr val="E07A00"/>
           </a:solidFill>
           <a:ln>
             <a:noFill/>
@@ -13266,53 +10773,53 @@
       </p:sp>
       <p:sp>
         <p:nvSpPr>
-          <p:cNvPr id="13" name="TextBox 12"/>
-          <p:cNvSpPr txBox="1"/>
-          <p:nvPr/>
-        </p:nvSpPr>
-        <p:spPr>
-          <a:xfrm>
-            <a:off x="777240" y="3602735"/>
-            <a:ext cx="256032" cy="228600"/>
-          </a:xfrm>
-          <a:prstGeom prst="rect">
-            <a:avLst/>
-          </a:prstGeom>
-          <a:noFill/>
-        </p:spPr>
-        <p:txBody>
-          <a:bodyPr wrap="square" lIns="0" rIns="0" tIns="0" bIns="0" anchor="t">
-            <a:spAutoFit/>
-          </a:bodyPr>
-          <a:lstStyle/>
-          <a:p>
-            <a:pPr algn="ctr">
+          <p:cNvPr id="16" name="TextBox 15"/>
+          <p:cNvSpPr txBox="1"/>
+          <p:nvPr/>
+        </p:nvSpPr>
+        <p:spPr>
+          <a:xfrm>
+            <a:off x="8257031" y="2395728"/>
+            <a:ext cx="2834640" cy="320040"/>
+          </a:xfrm>
+          <a:prstGeom prst="rect">
+            <a:avLst/>
+          </a:prstGeom>
+          <a:noFill/>
+        </p:spPr>
+        <p:txBody>
+          <a:bodyPr wrap="square" lIns="0" rIns="0" tIns="0" bIns="0" anchor="t">
+            <a:spAutoFit/>
+          </a:bodyPr>
+          <a:lstStyle/>
+          <a:p>
+            <a:pPr algn="l">
               <a:lnSpc>
                 <a:spcPct val="100000"/>
               </a:lnSpc>
             </a:pPr>
             <a:r>
-              <a:rPr sz="1100" b="1">
-                <a:solidFill>
-                  <a:srgbClr val="FFFFFF"/>
-                </a:solidFill>
-                <a:latin typeface="Trebuchet MS"/>
-              </a:rPr>
-              <a:t>✓</a:t>
-            </a:r>
-          </a:p>
-        </p:txBody>
-      </p:sp>
-      <p:sp>
-        <p:nvSpPr>
-          <p:cNvPr id="14" name="TextBox 13"/>
-          <p:cNvSpPr txBox="1"/>
-          <p:nvPr/>
-        </p:nvSpPr>
-        <p:spPr>
-          <a:xfrm>
-            <a:off x="1188720" y="3520439"/>
-            <a:ext cx="4663440" cy="731520"/>
+              <a:rPr sz="1600" b="1">
+                <a:solidFill>
+                  <a:srgbClr val="10151C"/>
+                </a:solidFill>
+                <a:latin typeface="Trebuchet MS"/>
+              </a:rPr>
+              <a:t>O critério, definido antes</a:t>
+            </a:r>
+          </a:p>
+        </p:txBody>
+      </p:sp>
+      <p:sp>
+        <p:nvSpPr>
+          <p:cNvPr id="17" name="TextBox 16"/>
+          <p:cNvSpPr txBox="1"/>
+          <p:nvPr/>
+        </p:nvSpPr>
+        <p:spPr>
+          <a:xfrm>
+            <a:off x="8257031" y="2834640"/>
+            <a:ext cx="2834640" cy="2377440"/>
           </a:xfrm>
           <a:prstGeom prst="rect">
             <a:avLst/>
@@ -13331,33 +10838,131 @@
               </a:lnSpc>
             </a:pPr>
             <a:r>
-              <a:rPr sz="1450" b="0">
-                <a:solidFill>
-                  <a:srgbClr val="10151C"/>
-                </a:solidFill>
-                <a:latin typeface="Trebuchet MS"/>
-              </a:rPr>
-              <a:t>Contraste WCAG AA — amarelo e laranja da marca nunca viram texto</a:t>
-            </a:r>
-          </a:p>
-        </p:txBody>
-      </p:sp>
-      <p:sp>
-        <p:nvSpPr>
-          <p:cNvPr id="15" name="Oval 14"/>
+              <a:rPr sz="1250" b="0">
+                <a:solidFill>
+                  <a:srgbClr val="49535F"/>
+                </a:solidFill>
+                <a:latin typeface="Trebuchet MS"/>
+              </a:rPr>
+              <a:t>Restaurantes distintos por cliente —</a:t>
+            </a:r>
+          </a:p>
+          <a:p>
+            <a:pPr algn="l">
+              <a:lnSpc>
+                <a:spcPct val="130000"/>
+              </a:lnSpc>
+            </a:pPr>
+            <a:r>
+              <a:rPr sz="1250" b="0">
+                <a:solidFill>
+                  <a:srgbClr val="49535F"/>
+                </a:solidFill>
+                <a:latin typeface="Trebuchet MS"/>
+              </a:rPr>
+              <a:t>é o que o programa promete mudar.</a:t>
+            </a:r>
+          </a:p>
+          <a:p>
+            <a:pPr algn="l">
+              <a:lnSpc>
+                <a:spcPct val="130000"/>
+              </a:lnSpc>
+            </a:pPr>
+            <a:r>
+              <a:rPr sz="1250" b="0">
+                <a:solidFill>
+                  <a:srgbClr val="49535F"/>
+                </a:solidFill>
+                <a:latin typeface="Trebuchet MS"/>
+              </a:rPr>
+              <a:t/>
+            </a:r>
+          </a:p>
+          <a:p>
+            <a:pPr algn="l">
+              <a:lnSpc>
+                <a:spcPct val="130000"/>
+              </a:lnSpc>
+            </a:pPr>
+            <a:r>
+              <a:rPr sz="1250" b="0">
+                <a:solidFill>
+                  <a:srgbClr val="49535F"/>
+                </a:solidFill>
+                <a:latin typeface="Trebuchet MS"/>
+              </a:rPr>
+              <a:t>Transações por dia contra as duas semanas</a:t>
+            </a:r>
+          </a:p>
+          <a:p>
+            <a:pPr algn="l">
+              <a:lnSpc>
+                <a:spcPct val="130000"/>
+              </a:lnSpc>
+            </a:pPr>
+            <a:r>
+              <a:rPr sz="1250" b="0">
+                <a:solidFill>
+                  <a:srgbClr val="49535F"/>
+                </a:solidFill>
+                <a:latin typeface="Trebuchet MS"/>
+              </a:rPr>
+              <a:t>anteriores e contra o ano passado.</a:t>
+            </a:r>
+          </a:p>
+          <a:p>
+            <a:pPr algn="l">
+              <a:lnSpc>
+                <a:spcPct val="130000"/>
+              </a:lnSpc>
+            </a:pPr>
+            <a:r>
+              <a:rPr sz="1250" b="0">
+                <a:solidFill>
+                  <a:srgbClr val="49535F"/>
+                </a:solidFill>
+                <a:latin typeface="Trebuchet MS"/>
+              </a:rPr>
+              <a:t/>
+            </a:r>
+          </a:p>
+          <a:p>
+            <a:pPr algn="l">
+              <a:lnSpc>
+                <a:spcPct val="130000"/>
+              </a:lnSpc>
+            </a:pPr>
+            <a:r>
+              <a:rPr sz="1250" b="0">
+                <a:solidFill>
+                  <a:srgbClr val="49535F"/>
+                </a:solidFill>
+                <a:latin typeface="Trebuchet MS"/>
+              </a:rPr>
+              <a:t>Sucesso: +15% no tratado sobre o controle.</a:t>
+            </a:r>
+          </a:p>
+        </p:txBody>
+      </p:sp>
+      <p:sp>
+        <p:nvSpPr>
+          <p:cNvPr id="18" name="Rounded Rectangle 17"/>
           <p:cNvSpPr/>
           <p:nvPr/>
         </p:nvSpPr>
         <p:spPr>
           <a:xfrm>
-            <a:off x="6172200" y="3566159"/>
-            <a:ext cx="256032" cy="256032"/>
-          </a:xfrm>
-          <a:prstGeom prst="ellipse">
-            <a:avLst/>
+            <a:off x="777240" y="5532120"/>
+            <a:ext cx="10607040" cy="685800"/>
+          </a:xfrm>
+          <a:prstGeom prst="roundRect">
+            <a:avLst>
+              <a:gd name="adj" fmla="val 10000"/>
+            </a:avLst>
           </a:prstGeom>
           <a:solidFill>
-            <a:srgbClr val="128040"/>
+            <a:srgbClr val="E7F1FD"/>
           </a:solidFill>
           <a:ln>
             <a:noFill/>
@@ -13381,168 +10986,44 @@
         <p:txBody>
           <a:bodyPr rtlCol="0" anchor="ctr"/>
           <a:lstStyle/>
-          <a:p>
-            <a:pPr algn="ctr"/>
-          </a:p>
-        </p:txBody>
-      </p:sp>
-      <p:sp>
-        <p:nvSpPr>
-          <p:cNvPr id="16" name="TextBox 15"/>
-          <p:cNvSpPr txBox="1"/>
-          <p:nvPr/>
-        </p:nvSpPr>
-        <p:spPr>
-          <a:xfrm>
-            <a:off x="6172200" y="3602735"/>
-            <a:ext cx="256032" cy="228600"/>
-          </a:xfrm>
-          <a:prstGeom prst="rect">
-            <a:avLst/>
-          </a:prstGeom>
-          <a:noFill/>
-        </p:spPr>
-        <p:txBody>
-          <a:bodyPr wrap="square" lIns="0" rIns="0" tIns="0" bIns="0" anchor="t">
-            <a:spAutoFit/>
-          </a:bodyPr>
-          <a:lstStyle/>
-          <a:p>
-            <a:pPr algn="ctr">
+          <a:p/>
+        </p:txBody>
+      </p:sp>
+      <p:sp>
+        <p:nvSpPr>
+          <p:cNvPr id="19" name="TextBox 18"/>
+          <p:cNvSpPr txBox="1"/>
+          <p:nvPr/>
+        </p:nvSpPr>
+        <p:spPr>
+          <a:xfrm>
+            <a:off x="1097280" y="5705856"/>
+            <a:ext cx="10058400" cy="411480"/>
+          </a:xfrm>
+          <a:prstGeom prst="rect">
+            <a:avLst/>
+          </a:prstGeom>
+          <a:noFill/>
+        </p:spPr>
+        <p:txBody>
+          <a:bodyPr wrap="square" lIns="0" rIns="0" tIns="0" bIns="0" anchor="t">
+            <a:spAutoFit/>
+          </a:bodyPr>
+          <a:lstStyle/>
+          <a:p>
+            <a:pPr algn="l">
               <a:lnSpc>
                 <a:spcPct val="100000"/>
               </a:lnSpc>
             </a:pPr>
             <a:r>
-              <a:rPr sz="1100" b="1">
-                <a:solidFill>
-                  <a:srgbClr val="FFFFFF"/>
-                </a:solidFill>
-                <a:latin typeface="Trebuchet MS"/>
-              </a:rPr>
-              <a:t>✓</a:t>
-            </a:r>
-          </a:p>
-        </p:txBody>
-      </p:sp>
-      <p:sp>
-        <p:nvSpPr>
-          <p:cNvPr id="17" name="TextBox 16"/>
-          <p:cNvSpPr txBox="1"/>
-          <p:nvPr/>
-        </p:nvSpPr>
-        <p:spPr>
-          <a:xfrm>
-            <a:off x="6583680" y="3520439"/>
-            <a:ext cx="4663440" cy="731520"/>
-          </a:xfrm>
-          <a:prstGeom prst="rect">
-            <a:avLst/>
-          </a:prstGeom>
-          <a:noFill/>
-        </p:spPr>
-        <p:txBody>
-          <a:bodyPr wrap="square" lIns="0" rIns="0" tIns="0" bIns="0" anchor="t">
-            <a:spAutoFit/>
-          </a:bodyPr>
-          <a:lstStyle/>
-          <a:p>
-            <a:pPr algn="l">
-              <a:lnSpc>
-                <a:spcPct val="130000"/>
-              </a:lnSpc>
-            </a:pPr>
-            <a:r>
-              <a:rPr sz="1450" b="0">
-                <a:solidFill>
-                  <a:srgbClr val="10151C"/>
-                </a:solidFill>
-                <a:latin typeface="Trebuchet MS"/>
-              </a:rPr>
-              <a:t>Alvos de toque de 46 pixels, para usar com uma mão só</a:t>
-            </a:r>
-          </a:p>
-        </p:txBody>
-      </p:sp>
-      <p:sp>
-        <p:nvSpPr>
-          <p:cNvPr id="18" name="Oval 17"/>
-          <p:cNvSpPr/>
-          <p:nvPr/>
-        </p:nvSpPr>
-        <p:spPr>
-          <a:xfrm>
-            <a:off x="777240" y="4434840"/>
-            <a:ext cx="256032" cy="256032"/>
-          </a:xfrm>
-          <a:prstGeom prst="ellipse">
-            <a:avLst/>
-          </a:prstGeom>
-          <a:solidFill>
-            <a:srgbClr val="128040"/>
-          </a:solidFill>
-          <a:ln>
-            <a:noFill/>
-          </a:ln>
-          <a:effectLst/>
-        </p:spPr>
-        <p:style>
-          <a:lnRef idx="1">
-            <a:schemeClr val="accent1"/>
-          </a:lnRef>
-          <a:fillRef idx="3">
-            <a:schemeClr val="accent1"/>
-          </a:fillRef>
-          <a:effectRef idx="2">
-            <a:schemeClr val="accent1"/>
-          </a:effectRef>
-          <a:fontRef idx="minor">
-            <a:schemeClr val="lt1"/>
-          </a:fontRef>
-        </p:style>
-        <p:txBody>
-          <a:bodyPr rtlCol="0" anchor="ctr"/>
-          <a:lstStyle/>
-          <a:p>
-            <a:pPr algn="ctr"/>
-          </a:p>
-        </p:txBody>
-      </p:sp>
-      <p:sp>
-        <p:nvSpPr>
-          <p:cNvPr id="19" name="TextBox 18"/>
-          <p:cNvSpPr txBox="1"/>
-          <p:nvPr/>
-        </p:nvSpPr>
-        <p:spPr>
-          <a:xfrm>
-            <a:off x="777240" y="4471416"/>
-            <a:ext cx="256032" cy="228600"/>
-          </a:xfrm>
-          <a:prstGeom prst="rect">
-            <a:avLst/>
-          </a:prstGeom>
-          <a:noFill/>
-        </p:spPr>
-        <p:txBody>
-          <a:bodyPr wrap="square" lIns="0" rIns="0" tIns="0" bIns="0" anchor="t">
-            <a:spAutoFit/>
-          </a:bodyPr>
-          <a:lstStyle/>
-          <a:p>
-            <a:pPr algn="ctr">
-              <a:lnSpc>
-                <a:spcPct val="100000"/>
-              </a:lnSpc>
-            </a:pPr>
-            <a:r>
-              <a:rPr sz="1100" b="1">
-                <a:solidFill>
-                  <a:srgbClr val="FFFFFF"/>
-                </a:solidFill>
-                <a:latin typeface="Trebuchet MS"/>
-              </a:rPr>
-              <a:t>✓</a:t>
+              <a:rPr sz="1500" b="1">
+                <a:solidFill>
+                  <a:srgbClr val="0A4C96"/>
+                </a:solidFill>
+                <a:latin typeface="Trebuchet MS"/>
+              </a:rPr>
+              <a:t>Se o movimento não subir, a ideia morre custando zero — e descobrimos algo que ninguém em Olímpia sabia.</a:t>
             </a:r>
           </a:p>
         </p:txBody>
@@ -13550,167 +11031,6 @@
       <p:sp>
         <p:nvSpPr>
           <p:cNvPr id="20" name="TextBox 19"/>
-          <p:cNvSpPr txBox="1"/>
-          <p:nvPr/>
-        </p:nvSpPr>
-        <p:spPr>
-          <a:xfrm>
-            <a:off x="1188720" y="4389120"/>
-            <a:ext cx="4663440" cy="731520"/>
-          </a:xfrm>
-          <a:prstGeom prst="rect">
-            <a:avLst/>
-          </a:prstGeom>
-          <a:noFill/>
-        </p:spPr>
-        <p:txBody>
-          <a:bodyPr wrap="square" lIns="0" rIns="0" tIns="0" bIns="0" anchor="t">
-            <a:spAutoFit/>
-          </a:bodyPr>
-          <a:lstStyle/>
-          <a:p>
-            <a:pPr algn="l">
-              <a:lnSpc>
-                <a:spcPct val="130000"/>
-              </a:lnSpc>
-            </a:pPr>
-            <a:r>
-              <a:rPr sz="1450" b="0">
-                <a:solidFill>
-                  <a:srgbClr val="10151C"/>
-                </a:solidFill>
-                <a:latin typeface="Trebuchet MS"/>
-              </a:rPr>
-              <a:t>Nenhum estado é comunicado apenas por cor</a:t>
-            </a:r>
-          </a:p>
-        </p:txBody>
-      </p:sp>
-      <p:sp>
-        <p:nvSpPr>
-          <p:cNvPr id="21" name="Oval 20"/>
-          <p:cNvSpPr/>
-          <p:nvPr/>
-        </p:nvSpPr>
-        <p:spPr>
-          <a:xfrm>
-            <a:off x="6172200" y="4434840"/>
-            <a:ext cx="256032" cy="256032"/>
-          </a:xfrm>
-          <a:prstGeom prst="ellipse">
-            <a:avLst/>
-          </a:prstGeom>
-          <a:solidFill>
-            <a:srgbClr val="128040"/>
-          </a:solidFill>
-          <a:ln>
-            <a:noFill/>
-          </a:ln>
-          <a:effectLst/>
-        </p:spPr>
-        <p:style>
-          <a:lnRef idx="1">
-            <a:schemeClr val="accent1"/>
-          </a:lnRef>
-          <a:fillRef idx="3">
-            <a:schemeClr val="accent1"/>
-          </a:fillRef>
-          <a:effectRef idx="2">
-            <a:schemeClr val="accent1"/>
-          </a:effectRef>
-          <a:fontRef idx="minor">
-            <a:schemeClr val="lt1"/>
-          </a:fontRef>
-        </p:style>
-        <p:txBody>
-          <a:bodyPr rtlCol="0" anchor="ctr"/>
-          <a:lstStyle/>
-          <a:p>
-            <a:pPr algn="ctr"/>
-          </a:p>
-        </p:txBody>
-      </p:sp>
-      <p:sp>
-        <p:nvSpPr>
-          <p:cNvPr id="22" name="TextBox 21"/>
-          <p:cNvSpPr txBox="1"/>
-          <p:nvPr/>
-        </p:nvSpPr>
-        <p:spPr>
-          <a:xfrm>
-            <a:off x="6172200" y="4471416"/>
-            <a:ext cx="256032" cy="228600"/>
-          </a:xfrm>
-          <a:prstGeom prst="rect">
-            <a:avLst/>
-          </a:prstGeom>
-          <a:noFill/>
-        </p:spPr>
-        <p:txBody>
-          <a:bodyPr wrap="square" lIns="0" rIns="0" tIns="0" bIns="0" anchor="t">
-            <a:spAutoFit/>
-          </a:bodyPr>
-          <a:lstStyle/>
-          <a:p>
-            <a:pPr algn="ctr">
-              <a:lnSpc>
-                <a:spcPct val="100000"/>
-              </a:lnSpc>
-            </a:pPr>
-            <a:r>
-              <a:rPr sz="1100" b="1">
-                <a:solidFill>
-                  <a:srgbClr val="FFFFFF"/>
-                </a:solidFill>
-                <a:latin typeface="Trebuchet MS"/>
-              </a:rPr>
-              <a:t>✓</a:t>
-            </a:r>
-          </a:p>
-        </p:txBody>
-      </p:sp>
-      <p:sp>
-        <p:nvSpPr>
-          <p:cNvPr id="23" name="TextBox 22"/>
-          <p:cNvSpPr txBox="1"/>
-          <p:nvPr/>
-        </p:nvSpPr>
-        <p:spPr>
-          <a:xfrm>
-            <a:off x="6583680" y="4389120"/>
-            <a:ext cx="4663440" cy="731520"/>
-          </a:xfrm>
-          <a:prstGeom prst="rect">
-            <a:avLst/>
-          </a:prstGeom>
-          <a:noFill/>
-        </p:spPr>
-        <p:txBody>
-          <a:bodyPr wrap="square" lIns="0" rIns="0" tIns="0" bIns="0" anchor="t">
-            <a:spAutoFit/>
-          </a:bodyPr>
-          <a:lstStyle/>
-          <a:p>
-            <a:pPr algn="l">
-              <a:lnSpc>
-                <a:spcPct val="130000"/>
-              </a:lnSpc>
-            </a:pPr>
-            <a:r>
-              <a:rPr sz="1450" b="0">
-                <a:solidFill>
-                  <a:srgbClr val="10151C"/>
-                </a:solidFill>
-                <a:latin typeface="Trebuchet MS"/>
-              </a:rPr>
-              <a:t>Animação desligada para quem pediu redução de movimento</a:t>
-            </a:r>
-          </a:p>
-        </p:txBody>
-      </p:sp>
-      <p:sp>
-        <p:nvSpPr>
-          <p:cNvPr id="24" name="TextBox 23"/>
           <p:cNvSpPr txBox="1"/>
           <p:nvPr/>
         </p:nvSpPr>
@@ -13749,7 +11069,7 @@
       </p:sp>
       <p:sp>
         <p:nvSpPr>
-          <p:cNvPr id="25" name="TextBox 24"/>
+          <p:cNvPr id="21" name="TextBox 20"/>
           <p:cNvSpPr txBox="1"/>
           <p:nvPr/>
         </p:nvSpPr>
@@ -13819,7 +11139,7 @@
             <a:avLst/>
           </a:prstGeom>
           <a:solidFill>
-            <a:srgbClr val="F1F4F8"/>
+            <a:srgbClr val="FFFFFF"/>
           </a:solidFill>
           <a:ln>
             <a:noFill/>
@@ -13850,92 +11170,14 @@
       </p:sp>
       <p:sp>
         <p:nvSpPr>
-          <p:cNvPr id="3" name="TextBox 2"/>
-          <p:cNvSpPr txBox="1"/>
-          <p:nvPr/>
-        </p:nvSpPr>
-        <p:spPr>
-          <a:xfrm>
-            <a:off x="777240" y="502920"/>
-            <a:ext cx="10607040" cy="274320"/>
-          </a:xfrm>
-          <a:prstGeom prst="rect">
-            <a:avLst/>
-          </a:prstGeom>
-          <a:noFill/>
-        </p:spPr>
-        <p:txBody>
-          <a:bodyPr wrap="square" lIns="0" rIns="0" tIns="0" bIns="0" anchor="t">
-            <a:spAutoFit/>
-          </a:bodyPr>
-          <a:lstStyle/>
-          <a:p>
-            <a:pPr algn="l">
-              <a:lnSpc>
-                <a:spcPct val="100000"/>
-              </a:lnSpc>
-            </a:pPr>
-            <a:r>
-              <a:rPr sz="1100" b="1">
-                <a:solidFill>
-                  <a:srgbClr val="0E6FD8"/>
-                </a:solidFill>
-                <a:latin typeface="Trebuchet MS"/>
-              </a:rPr>
-              <a:t>ENTREGA OBRIGATÓRIA</a:t>
-            </a:r>
-          </a:p>
-        </p:txBody>
-      </p:sp>
-      <p:sp>
-        <p:nvSpPr>
-          <p:cNvPr id="4" name="TextBox 3"/>
-          <p:cNvSpPr txBox="1"/>
-          <p:nvPr/>
-        </p:nvSpPr>
-        <p:spPr>
-          <a:xfrm>
-            <a:off x="777240" y="841248"/>
-            <a:ext cx="10607040" cy="914400"/>
-          </a:xfrm>
-          <a:prstGeom prst="rect">
-            <a:avLst/>
-          </a:prstGeom>
-          <a:noFill/>
-        </p:spPr>
-        <p:txBody>
-          <a:bodyPr wrap="square" lIns="0" rIns="0" tIns="0" bIns="0" anchor="t">
-            <a:spAutoFit/>
-          </a:bodyPr>
-          <a:lstStyle/>
-          <a:p>
-            <a:pPr algn="l">
-              <a:lnSpc>
-                <a:spcPct val="102000"/>
-              </a:lnSpc>
-            </a:pPr>
-            <a:r>
-              <a:rPr sz="3400" b="1">
-                <a:solidFill>
-                  <a:srgbClr val="10151C"/>
-                </a:solidFill>
-                <a:latin typeface="Trebuchet MS"/>
-              </a:rPr>
-              <a:t>O que vocês vão ver rodando</a:t>
-            </a:r>
-          </a:p>
-        </p:txBody>
-      </p:sp>
-      <p:sp>
-        <p:nvSpPr>
-          <p:cNvPr id="5" name="Rectangle 4"/>
+          <p:cNvPr id="3" name="Rectangle 2"/>
           <p:cNvSpPr/>
           <p:nvPr/>
         </p:nvSpPr>
         <p:spPr>
           <a:xfrm>
-            <a:off x="777240" y="1719072"/>
-            <a:ext cx="1005840" cy="54864"/>
+            <a:off x="0" y="0"/>
+            <a:ext cx="12191695" cy="201168"/>
           </a:xfrm>
           <a:prstGeom prst="rect">
             <a:avLst/>
@@ -13970,16 +11212,40 @@
           </a:p>
         </p:txBody>
       </p:sp>
-      <p:sp>
-        <p:nvSpPr>
-          <p:cNvPr id="6" name="TextBox 5"/>
-          <p:cNvSpPr txBox="1"/>
-          <p:nvPr/>
-        </p:nvSpPr>
-        <p:spPr>
-          <a:xfrm>
-            <a:off x="777240" y="1938528"/>
-            <a:ext cx="10241280" cy="731520"/>
+      <p:pic>
+        <p:nvPicPr>
+          <p:cNvPr id="4" name="Picture 3" descr="logo.jpg"/>
+          <p:cNvPicPr>
+            <a:picLocks noChangeAspect="1"/>
+          </p:cNvPicPr>
+          <p:nvPr/>
+        </p:nvPicPr>
+        <p:blipFill>
+          <a:blip r:embed="rId2"/>
+          <a:stretch>
+            <a:fillRect/>
+          </a:stretch>
+        </p:blipFill>
+        <p:spPr>
+          <a:xfrm>
+            <a:off x="914400" y="914400"/>
+            <a:ext cx="3511296" cy="1371600"/>
+          </a:xfrm>
+          <a:prstGeom prst="rect">
+            <a:avLst/>
+          </a:prstGeom>
+        </p:spPr>
+      </p:pic>
+      <p:sp>
+        <p:nvSpPr>
+          <p:cNvPr id="5" name="TextBox 4"/>
+          <p:cNvSpPr txBox="1"/>
+          <p:nvPr/>
+        </p:nvSpPr>
+        <p:spPr>
+          <a:xfrm>
+            <a:off x="914400" y="2743200"/>
+            <a:ext cx="10058400" cy="1737360"/>
           </a:xfrm>
           <a:prstGeom prst="rect">
             <a:avLst/>
@@ -13998,35 +11264,67 @@
               </a:lnSpc>
             </a:pPr>
             <a:r>
-              <a:rPr sz="1600" b="0">
-                <a:solidFill>
-                  <a:srgbClr val="49535F"/>
-                </a:solidFill>
-                <a:latin typeface="Trebuchet MS"/>
-              </a:rPr>
-              <a:t>Protótipo funcional, sem servidor e sem internet. Toda a criptografia acontece no navegador.</a:t>
-            </a:r>
-          </a:p>
-        </p:txBody>
-      </p:sp>
-      <p:sp>
-        <p:nvSpPr>
-          <p:cNvPr id="7" name="Rounded Rectangle 6"/>
+              <a:rPr sz="2800" b="1">
+                <a:solidFill>
+                  <a:srgbClr val="10151C"/>
+                </a:solidFill>
+                <a:latin typeface="Trebuchet MS"/>
+              </a:rPr>
+              <a:t>“Olímpia fatura 26% do seu ano de serviços em dois meses.</a:t>
+            </a:r>
+          </a:p>
+          <a:p>
+            <a:pPr algn="l">
+              <a:lnSpc>
+                <a:spcPct val="125000"/>
+              </a:lnSpc>
+            </a:pPr>
+            <a:r>
+              <a:rPr sz="2800" b="1">
+                <a:solidFill>
+                  <a:srgbClr val="10151C"/>
+                </a:solidFill>
+                <a:latin typeface="Trebuchet MS"/>
+              </a:rPr>
+              <a:t>O problema não é falta de cliente — é falta de uma camada</a:t>
+            </a:r>
+          </a:p>
+          <a:p>
+            <a:pPr algn="l">
+              <a:lnSpc>
+                <a:spcPct val="125000"/>
+              </a:lnSpc>
+            </a:pPr>
+            <a:r>
+              <a:rPr sz="2800" b="1">
+                <a:solidFill>
+                  <a:srgbClr val="10151C"/>
+                </a:solidFill>
+                <a:latin typeface="Trebuchet MS"/>
+              </a:rPr>
+              <a:t>que permita os negócios da cidade agirem juntos.”</a:t>
+            </a:r>
+          </a:p>
+        </p:txBody>
+      </p:sp>
+      <p:sp>
+        <p:nvSpPr>
+          <p:cNvPr id="6" name="Rounded Rectangle 5"/>
           <p:cNvSpPr/>
           <p:nvPr/>
         </p:nvSpPr>
         <p:spPr>
           <a:xfrm>
-            <a:off x="777240" y="2880360"/>
-            <a:ext cx="384048" cy="384048"/>
+            <a:off x="914400" y="4846320"/>
+            <a:ext cx="10332720" cy="914400"/>
           </a:xfrm>
           <a:prstGeom prst="roundRect">
             <a:avLst>
-              <a:gd name="adj" fmla="val 25000"/>
+              <a:gd name="adj" fmla="val 8000"/>
             </a:avLst>
           </a:prstGeom>
           <a:solidFill>
-            <a:srgbClr val="0E6FD8"/>
+            <a:srgbClr val="E7F1FD"/>
           </a:solidFill>
           <a:ln>
             <a:noFill/>
@@ -14050,8 +11348,45 @@
         <p:txBody>
           <a:bodyPr rtlCol="0" anchor="ctr"/>
           <a:lstStyle/>
-          <a:p>
-            <a:pPr algn="ctr"/>
+          <a:p/>
+        </p:txBody>
+      </p:sp>
+      <p:sp>
+        <p:nvSpPr>
+          <p:cNvPr id="7" name="TextBox 6"/>
+          <p:cNvSpPr txBox="1"/>
+          <p:nvPr/>
+        </p:nvSpPr>
+        <p:spPr>
+          <a:xfrm>
+            <a:off x="1234440" y="5074920"/>
+            <a:ext cx="9784080" cy="502920"/>
+          </a:xfrm>
+          <a:prstGeom prst="rect">
+            <a:avLst/>
+          </a:prstGeom>
+          <a:noFill/>
+        </p:spPr>
+        <p:txBody>
+          <a:bodyPr wrap="square" lIns="0" rIns="0" tIns="0" bIns="0" anchor="t">
+            <a:spAutoFit/>
+          </a:bodyPr>
+          <a:lstStyle/>
+          <a:p>
+            <a:pPr algn="l">
+              <a:lnSpc>
+                <a:spcPct val="120000"/>
+              </a:lnSpc>
+            </a:pPr>
+            <a:r>
+              <a:rPr sz="1600" b="1">
+                <a:solidFill>
+                  <a:srgbClr val="0A4C96"/>
+                </a:solidFill>
+                <a:latin typeface="Trebuchet MS"/>
+              </a:rPr>
+              <a:t>Sou+Olímpia · a rede de confiança que a cidade ainda não tem — e o programa de circulação que roda em cima dela.</a:t>
+            </a:r>
           </a:p>
         </p:txBody>
       </p:sp>
@@ -14063,809 +11398,33 @@
         </p:nvSpPr>
         <p:spPr>
           <a:xfrm>
-            <a:off x="777240" y="2953512"/>
-            <a:ext cx="384048" cy="274320"/>
-          </a:xfrm>
-          <a:prstGeom prst="rect">
-            <a:avLst/>
-          </a:prstGeom>
-          <a:noFill/>
-        </p:spPr>
-        <p:txBody>
-          <a:bodyPr wrap="square" lIns="0" rIns="0" tIns="0" bIns="0" anchor="t">
-            <a:spAutoFit/>
-          </a:bodyPr>
-          <a:lstStyle/>
-          <a:p>
-            <a:pPr algn="ctr">
+            <a:off x="914400" y="5989320"/>
+            <a:ext cx="10332720" cy="274320"/>
+          </a:xfrm>
+          <a:prstGeom prst="rect">
+            <a:avLst/>
+          </a:prstGeom>
+          <a:noFill/>
+        </p:spPr>
+        <p:txBody>
+          <a:bodyPr wrap="square" lIns="0" rIns="0" tIns="0" bIns="0" anchor="t">
+            <a:spAutoFit/>
+          </a:bodyPr>
+          <a:lstStyle/>
+          <a:p>
+            <a:pPr algn="l">
               <a:lnSpc>
                 <a:spcPct val="100000"/>
               </a:lnSpc>
             </a:pPr>
             <a:r>
-              <a:rPr sz="1300" b="1">
-                <a:solidFill>
-                  <a:srgbClr val="FFFFFF"/>
-                </a:solidFill>
-                <a:latin typeface="Trebuchet MS"/>
-              </a:rPr>
-              <a:t>1</a:t>
-            </a:r>
-          </a:p>
-        </p:txBody>
-      </p:sp>
-      <p:sp>
-        <p:nvSpPr>
-          <p:cNvPr id="9" name="TextBox 8"/>
-          <p:cNvSpPr txBox="1"/>
-          <p:nvPr/>
-        </p:nvSpPr>
-        <p:spPr>
-          <a:xfrm>
-            <a:off x="1325880" y="2935224"/>
-            <a:ext cx="9875520" cy="329184"/>
-          </a:xfrm>
-          <a:prstGeom prst="rect">
-            <a:avLst/>
-          </a:prstGeom>
-          <a:noFill/>
-        </p:spPr>
-        <p:txBody>
-          <a:bodyPr wrap="square" lIns="0" rIns="0" tIns="0" bIns="0" anchor="t">
-            <a:spAutoFit/>
-          </a:bodyPr>
-          <a:lstStyle/>
-          <a:p>
-            <a:pPr algn="l">
-              <a:lnSpc>
-                <a:spcPct val="100000"/>
-              </a:lnSpc>
-            </a:pPr>
-            <a:r>
-              <a:rPr sz="1600" b="0">
-                <a:solidFill>
-                  <a:srgbClr val="10151C"/>
-                </a:solidFill>
-                <a:latin typeface="Trebuchet MS"/>
-              </a:rPr>
-              <a:t>A prefeitura credencia os quatro negócios</a:t>
-            </a:r>
-          </a:p>
-        </p:txBody>
-      </p:sp>
-      <p:sp>
-        <p:nvSpPr>
-          <p:cNvPr id="10" name="Rounded Rectangle 9"/>
-          <p:cNvSpPr/>
-          <p:nvPr/>
-        </p:nvSpPr>
-        <p:spPr>
-          <a:xfrm>
-            <a:off x="777240" y="3392424"/>
-            <a:ext cx="384048" cy="384048"/>
-          </a:xfrm>
-          <a:prstGeom prst="roundRect">
-            <a:avLst>
-              <a:gd name="adj" fmla="val 25000"/>
-            </a:avLst>
-          </a:prstGeom>
-          <a:solidFill>
-            <a:srgbClr val="0E6FD8"/>
-          </a:solidFill>
-          <a:ln>
-            <a:noFill/>
-          </a:ln>
-          <a:effectLst/>
-        </p:spPr>
-        <p:style>
-          <a:lnRef idx="1">
-            <a:schemeClr val="accent1"/>
-          </a:lnRef>
-          <a:fillRef idx="3">
-            <a:schemeClr val="accent1"/>
-          </a:fillRef>
-          <a:effectRef idx="2">
-            <a:schemeClr val="accent1"/>
-          </a:effectRef>
-          <a:fontRef idx="minor">
-            <a:schemeClr val="lt1"/>
-          </a:fontRef>
-        </p:style>
-        <p:txBody>
-          <a:bodyPr rtlCol="0" anchor="ctr"/>
-          <a:lstStyle/>
-          <a:p>
-            <a:pPr algn="ctr"/>
-          </a:p>
-        </p:txBody>
-      </p:sp>
-      <p:sp>
-        <p:nvSpPr>
-          <p:cNvPr id="11" name="TextBox 10"/>
-          <p:cNvSpPr txBox="1"/>
-          <p:nvPr/>
-        </p:nvSpPr>
-        <p:spPr>
-          <a:xfrm>
-            <a:off x="777240" y="3465576"/>
-            <a:ext cx="384048" cy="274320"/>
-          </a:xfrm>
-          <a:prstGeom prst="rect">
-            <a:avLst/>
-          </a:prstGeom>
-          <a:noFill/>
-        </p:spPr>
-        <p:txBody>
-          <a:bodyPr wrap="square" lIns="0" rIns="0" tIns="0" bIns="0" anchor="t">
-            <a:spAutoFit/>
-          </a:bodyPr>
-          <a:lstStyle/>
-          <a:p>
-            <a:pPr algn="ctr">
-              <a:lnSpc>
-                <a:spcPct val="100000"/>
-              </a:lnSpc>
-            </a:pPr>
-            <a:r>
-              <a:rPr sz="1300" b="1">
-                <a:solidFill>
-                  <a:srgbClr val="FFFFFF"/>
-                </a:solidFill>
-                <a:latin typeface="Trebuchet MS"/>
-              </a:rPr>
-              <a:t>2</a:t>
-            </a:r>
-          </a:p>
-        </p:txBody>
-      </p:sp>
-      <p:sp>
-        <p:nvSpPr>
-          <p:cNvPr id="12" name="TextBox 11"/>
-          <p:cNvSpPr txBox="1"/>
-          <p:nvPr/>
-        </p:nvSpPr>
-        <p:spPr>
-          <a:xfrm>
-            <a:off x="1325880" y="3447288"/>
-            <a:ext cx="9875520" cy="329184"/>
-          </a:xfrm>
-          <a:prstGeom prst="rect">
-            <a:avLst/>
-          </a:prstGeom>
-          <a:noFill/>
-        </p:spPr>
-        <p:txBody>
-          <a:bodyPr wrap="square" lIns="0" rIns="0" tIns="0" bIns="0" anchor="t">
-            <a:spAutoFit/>
-          </a:bodyPr>
-          <a:lstStyle/>
-          <a:p>
-            <a:pPr algn="l">
-              <a:lnSpc>
-                <a:spcPct val="100000"/>
-              </a:lnSpc>
-            </a:pPr>
-            <a:r>
-              <a:rPr sz="1600" b="0">
-                <a:solidFill>
-                  <a:srgbClr val="10151C"/>
-                </a:solidFill>
-                <a:latin typeface="Trebuchet MS"/>
-              </a:rPr>
-              <a:t>A Padaria carimba a carteira do morador</a:t>
-            </a:r>
-          </a:p>
-        </p:txBody>
-      </p:sp>
-      <p:sp>
-        <p:nvSpPr>
-          <p:cNvPr id="13" name="Rounded Rectangle 12"/>
-          <p:cNvSpPr/>
-          <p:nvPr/>
-        </p:nvSpPr>
-        <p:spPr>
-          <a:xfrm>
-            <a:off x="777240" y="3904487"/>
-            <a:ext cx="384048" cy="384048"/>
-          </a:xfrm>
-          <a:prstGeom prst="roundRect">
-            <a:avLst>
-              <a:gd name="adj" fmla="val 25000"/>
-            </a:avLst>
-          </a:prstGeom>
-          <a:solidFill>
-            <a:srgbClr val="0E6FD8"/>
-          </a:solidFill>
-          <a:ln>
-            <a:noFill/>
-          </a:ln>
-          <a:effectLst/>
-        </p:spPr>
-        <p:style>
-          <a:lnRef idx="1">
-            <a:schemeClr val="accent1"/>
-          </a:lnRef>
-          <a:fillRef idx="3">
-            <a:schemeClr val="accent1"/>
-          </a:fillRef>
-          <a:effectRef idx="2">
-            <a:schemeClr val="accent1"/>
-          </a:effectRef>
-          <a:fontRef idx="minor">
-            <a:schemeClr val="lt1"/>
-          </a:fontRef>
-        </p:style>
-        <p:txBody>
-          <a:bodyPr rtlCol="0" anchor="ctr"/>
-          <a:lstStyle/>
-          <a:p>
-            <a:pPr algn="ctr"/>
-          </a:p>
-        </p:txBody>
-      </p:sp>
-      <p:sp>
-        <p:nvSpPr>
-          <p:cNvPr id="14" name="TextBox 13"/>
-          <p:cNvSpPr txBox="1"/>
-          <p:nvPr/>
-        </p:nvSpPr>
-        <p:spPr>
-          <a:xfrm>
-            <a:off x="777240" y="3977639"/>
-            <a:ext cx="384048" cy="274320"/>
-          </a:xfrm>
-          <a:prstGeom prst="rect">
-            <a:avLst/>
-          </a:prstGeom>
-          <a:noFill/>
-        </p:spPr>
-        <p:txBody>
-          <a:bodyPr wrap="square" lIns="0" rIns="0" tIns="0" bIns="0" anchor="t">
-            <a:spAutoFit/>
-          </a:bodyPr>
-          <a:lstStyle/>
-          <a:p>
-            <a:pPr algn="ctr">
-              <a:lnSpc>
-                <a:spcPct val="100000"/>
-              </a:lnSpc>
-            </a:pPr>
-            <a:r>
-              <a:rPr sz="1300" b="1">
-                <a:solidFill>
-                  <a:srgbClr val="FFFFFF"/>
-                </a:solidFill>
-                <a:latin typeface="Trebuchet MS"/>
-              </a:rPr>
-              <a:t>3</a:t>
-            </a:r>
-          </a:p>
-        </p:txBody>
-      </p:sp>
-      <p:sp>
-        <p:nvSpPr>
-          <p:cNvPr id="15" name="TextBox 14"/>
-          <p:cNvSpPr txBox="1"/>
-          <p:nvPr/>
-        </p:nvSpPr>
-        <p:spPr>
-          <a:xfrm>
-            <a:off x="1325880" y="3959351"/>
-            <a:ext cx="9875520" cy="329184"/>
-          </a:xfrm>
-          <a:prstGeom prst="rect">
-            <a:avLst/>
-          </a:prstGeom>
-          <a:noFill/>
-        </p:spPr>
-        <p:txBody>
-          <a:bodyPr wrap="square" lIns="0" rIns="0" tIns="0" bIns="0" anchor="t">
-            <a:spAutoFit/>
-          </a:bodyPr>
-          <a:lstStyle/>
-          <a:p>
-            <a:pPr algn="l">
-              <a:lnSpc>
-                <a:spcPct val="100000"/>
-              </a:lnSpc>
-            </a:pPr>
-            <a:r>
-              <a:rPr sz="1600" b="0">
-                <a:solidFill>
-                  <a:srgbClr val="10151C"/>
-                </a:solidFill>
-                <a:latin typeface="Trebuchet MS"/>
-              </a:rPr>
-              <a:t>A Farmácia verifica o carimbo da Padaria sozinha</a:t>
-            </a:r>
-          </a:p>
-        </p:txBody>
-      </p:sp>
-      <p:sp>
-        <p:nvSpPr>
-          <p:cNvPr id="16" name="Rounded Rectangle 15"/>
-          <p:cNvSpPr/>
-          <p:nvPr/>
-        </p:nvSpPr>
-        <p:spPr>
-          <a:xfrm>
-            <a:off x="777240" y="4416552"/>
-            <a:ext cx="384048" cy="384048"/>
-          </a:xfrm>
-          <a:prstGeom prst="roundRect">
-            <a:avLst>
-              <a:gd name="adj" fmla="val 25000"/>
-            </a:avLst>
-          </a:prstGeom>
-          <a:solidFill>
-            <a:srgbClr val="0E6FD8"/>
-          </a:solidFill>
-          <a:ln>
-            <a:noFill/>
-          </a:ln>
-          <a:effectLst/>
-        </p:spPr>
-        <p:style>
-          <a:lnRef idx="1">
-            <a:schemeClr val="accent1"/>
-          </a:lnRef>
-          <a:fillRef idx="3">
-            <a:schemeClr val="accent1"/>
-          </a:fillRef>
-          <a:effectRef idx="2">
-            <a:schemeClr val="accent1"/>
-          </a:effectRef>
-          <a:fontRef idx="minor">
-            <a:schemeClr val="lt1"/>
-          </a:fontRef>
-        </p:style>
-        <p:txBody>
-          <a:bodyPr rtlCol="0" anchor="ctr"/>
-          <a:lstStyle/>
-          <a:p>
-            <a:pPr algn="ctr"/>
-          </a:p>
-        </p:txBody>
-      </p:sp>
-      <p:sp>
-        <p:nvSpPr>
-          <p:cNvPr id="17" name="TextBox 16"/>
-          <p:cNvSpPr txBox="1"/>
-          <p:nvPr/>
-        </p:nvSpPr>
-        <p:spPr>
-          <a:xfrm>
-            <a:off x="777240" y="4489704"/>
-            <a:ext cx="384048" cy="274320"/>
-          </a:xfrm>
-          <a:prstGeom prst="rect">
-            <a:avLst/>
-          </a:prstGeom>
-          <a:noFill/>
-        </p:spPr>
-        <p:txBody>
-          <a:bodyPr wrap="square" lIns="0" rIns="0" tIns="0" bIns="0" anchor="t">
-            <a:spAutoFit/>
-          </a:bodyPr>
-          <a:lstStyle/>
-          <a:p>
-            <a:pPr algn="ctr">
-              <a:lnSpc>
-                <a:spcPct val="100000"/>
-              </a:lnSpc>
-            </a:pPr>
-            <a:r>
-              <a:rPr sz="1300" b="1">
-                <a:solidFill>
-                  <a:srgbClr val="FFFFFF"/>
-                </a:solidFill>
-                <a:latin typeface="Trebuchet MS"/>
-              </a:rPr>
-              <a:t>4</a:t>
-            </a:r>
-          </a:p>
-        </p:txBody>
-      </p:sp>
-      <p:sp>
-        <p:nvSpPr>
-          <p:cNvPr id="18" name="TextBox 17"/>
-          <p:cNvSpPr txBox="1"/>
-          <p:nvPr/>
-        </p:nvSpPr>
-        <p:spPr>
-          <a:xfrm>
-            <a:off x="1325880" y="4471416"/>
-            <a:ext cx="9875520" cy="329184"/>
-          </a:xfrm>
-          <a:prstGeom prst="rect">
-            <a:avLst/>
-          </a:prstGeom>
-          <a:noFill/>
-        </p:spPr>
-        <p:txBody>
-          <a:bodyPr wrap="square" lIns="0" rIns="0" tIns="0" bIns="0" anchor="t">
-            <a:spAutoFit/>
-          </a:bodyPr>
-          <a:lstStyle/>
-          <a:p>
-            <a:pPr algn="l">
-              <a:lnSpc>
-                <a:spcPct val="100000"/>
-              </a:lnSpc>
-            </a:pPr>
-            <a:r>
-              <a:rPr sz="1600" b="0">
-                <a:solidFill>
-                  <a:srgbClr val="10151C"/>
-                </a:solidFill>
-                <a:latin typeface="Trebuchet MS"/>
-              </a:rPr>
-              <a:t>Três lojas distintas fecham a cartela e liberam o vale</a:t>
-            </a:r>
-          </a:p>
-        </p:txBody>
-      </p:sp>
-      <p:sp>
-        <p:nvSpPr>
-          <p:cNvPr id="19" name="Rounded Rectangle 18"/>
-          <p:cNvSpPr/>
-          <p:nvPr/>
-        </p:nvSpPr>
-        <p:spPr>
-          <a:xfrm>
-            <a:off x="777240" y="4928616"/>
-            <a:ext cx="384048" cy="384048"/>
-          </a:xfrm>
-          <a:prstGeom prst="roundRect">
-            <a:avLst>
-              <a:gd name="adj" fmla="val 25000"/>
-            </a:avLst>
-          </a:prstGeom>
-          <a:solidFill>
-            <a:srgbClr val="D62718"/>
-          </a:solidFill>
-          <a:ln>
-            <a:noFill/>
-          </a:ln>
-          <a:effectLst/>
-        </p:spPr>
-        <p:style>
-          <a:lnRef idx="1">
-            <a:schemeClr val="accent1"/>
-          </a:lnRef>
-          <a:fillRef idx="3">
-            <a:schemeClr val="accent1"/>
-          </a:fillRef>
-          <a:effectRef idx="2">
-            <a:schemeClr val="accent1"/>
-          </a:effectRef>
-          <a:fontRef idx="minor">
-            <a:schemeClr val="lt1"/>
-          </a:fontRef>
-        </p:style>
-        <p:txBody>
-          <a:bodyPr rtlCol="0" anchor="ctr"/>
-          <a:lstStyle/>
-          <a:p>
-            <a:pPr algn="ctr"/>
-          </a:p>
-        </p:txBody>
-      </p:sp>
-      <p:sp>
-        <p:nvSpPr>
-          <p:cNvPr id="20" name="TextBox 19"/>
-          <p:cNvSpPr txBox="1"/>
-          <p:nvPr/>
-        </p:nvSpPr>
-        <p:spPr>
-          <a:xfrm>
-            <a:off x="777240" y="5001768"/>
-            <a:ext cx="384048" cy="274320"/>
-          </a:xfrm>
-          <a:prstGeom prst="rect">
-            <a:avLst/>
-          </a:prstGeom>
-          <a:noFill/>
-        </p:spPr>
-        <p:txBody>
-          <a:bodyPr wrap="square" lIns="0" rIns="0" tIns="0" bIns="0" anchor="t">
-            <a:spAutoFit/>
-          </a:bodyPr>
-          <a:lstStyle/>
-          <a:p>
-            <a:pPr algn="ctr">
-              <a:lnSpc>
-                <a:spcPct val="100000"/>
-              </a:lnSpc>
-            </a:pPr>
-            <a:r>
-              <a:rPr sz="1300" b="1">
-                <a:solidFill>
-                  <a:srgbClr val="FFFFFF"/>
-                </a:solidFill>
-                <a:latin typeface="Trebuchet MS"/>
-              </a:rPr>
-              <a:t>5</a:t>
-            </a:r>
-          </a:p>
-        </p:txBody>
-      </p:sp>
-      <p:sp>
-        <p:nvSpPr>
-          <p:cNvPr id="21" name="TextBox 20"/>
-          <p:cNvSpPr txBox="1"/>
-          <p:nvPr/>
-        </p:nvSpPr>
-        <p:spPr>
-          <a:xfrm>
-            <a:off x="1325880" y="4983480"/>
-            <a:ext cx="9875520" cy="329184"/>
-          </a:xfrm>
-          <a:prstGeom prst="rect">
-            <a:avLst/>
-          </a:prstGeom>
-          <a:noFill/>
-        </p:spPr>
-        <p:txBody>
-          <a:bodyPr wrap="square" lIns="0" rIns="0" tIns="0" bIns="0" anchor="t">
-            <a:spAutoFit/>
-          </a:bodyPr>
-          <a:lstStyle/>
-          <a:p>
-            <a:pPr algn="l">
-              <a:lnSpc>
-                <a:spcPct val="100000"/>
-              </a:lnSpc>
-            </a:pPr>
-            <a:r>
-              <a:rPr sz="1600" b="0">
-                <a:solidFill>
-                  <a:srgbClr val="10151C"/>
-                </a:solidFill>
-                <a:latin typeface="Trebuchet MS"/>
-              </a:rPr>
-              <a:t>O vale é resgatado — e a segunda tentativa é recusada</a:t>
-            </a:r>
-          </a:p>
-        </p:txBody>
-      </p:sp>
-      <p:sp>
-        <p:nvSpPr>
-          <p:cNvPr id="22" name="Rounded Rectangle 21"/>
-          <p:cNvSpPr/>
-          <p:nvPr/>
-        </p:nvSpPr>
-        <p:spPr>
-          <a:xfrm>
-            <a:off x="777240" y="5440680"/>
-            <a:ext cx="384048" cy="384048"/>
-          </a:xfrm>
-          <a:prstGeom prst="roundRect">
-            <a:avLst>
-              <a:gd name="adj" fmla="val 25000"/>
-            </a:avLst>
-          </a:prstGeom>
-          <a:solidFill>
-            <a:srgbClr val="D62718"/>
-          </a:solidFill>
-          <a:ln>
-            <a:noFill/>
-          </a:ln>
-          <a:effectLst/>
-        </p:spPr>
-        <p:style>
-          <a:lnRef idx="1">
-            <a:schemeClr val="accent1"/>
-          </a:lnRef>
-          <a:fillRef idx="3">
-            <a:schemeClr val="accent1"/>
-          </a:fillRef>
-          <a:effectRef idx="2">
-            <a:schemeClr val="accent1"/>
-          </a:effectRef>
-          <a:fontRef idx="minor">
-            <a:schemeClr val="lt1"/>
-          </a:fontRef>
-        </p:style>
-        <p:txBody>
-          <a:bodyPr rtlCol="0" anchor="ctr"/>
-          <a:lstStyle/>
-          <a:p>
-            <a:pPr algn="ctr"/>
-          </a:p>
-        </p:txBody>
-      </p:sp>
-      <p:sp>
-        <p:nvSpPr>
-          <p:cNvPr id="23" name="TextBox 22"/>
-          <p:cNvSpPr txBox="1"/>
-          <p:nvPr/>
-        </p:nvSpPr>
-        <p:spPr>
-          <a:xfrm>
-            <a:off x="777240" y="5513832"/>
-            <a:ext cx="384048" cy="274320"/>
-          </a:xfrm>
-          <a:prstGeom prst="rect">
-            <a:avLst/>
-          </a:prstGeom>
-          <a:noFill/>
-        </p:spPr>
-        <p:txBody>
-          <a:bodyPr wrap="square" lIns="0" rIns="0" tIns="0" bIns="0" anchor="t">
-            <a:spAutoFit/>
-          </a:bodyPr>
-          <a:lstStyle/>
-          <a:p>
-            <a:pPr algn="ctr">
-              <a:lnSpc>
-                <a:spcPct val="100000"/>
-              </a:lnSpc>
-            </a:pPr>
-            <a:r>
-              <a:rPr sz="1300" b="1">
-                <a:solidFill>
-                  <a:srgbClr val="FFFFFF"/>
-                </a:solidFill>
-                <a:latin typeface="Trebuchet MS"/>
-              </a:rPr>
-              <a:t>6</a:t>
-            </a:r>
-          </a:p>
-        </p:txBody>
-      </p:sp>
-      <p:sp>
-        <p:nvSpPr>
-          <p:cNvPr id="24" name="TextBox 23"/>
-          <p:cNvSpPr txBox="1"/>
-          <p:nvPr/>
-        </p:nvSpPr>
-        <p:spPr>
-          <a:xfrm>
-            <a:off x="1325880" y="5495544"/>
-            <a:ext cx="9875520" cy="329184"/>
-          </a:xfrm>
-          <a:prstGeom prst="rect">
-            <a:avLst/>
-          </a:prstGeom>
-          <a:noFill/>
-        </p:spPr>
-        <p:txBody>
-          <a:bodyPr wrap="square" lIns="0" rIns="0" tIns="0" bIns="0" anchor="t">
-            <a:spAutoFit/>
-          </a:bodyPr>
-          <a:lstStyle/>
-          <a:p>
-            <a:pPr algn="l">
-              <a:lnSpc>
-                <a:spcPct val="100000"/>
-              </a:lnSpc>
-            </a:pPr>
-            <a:r>
-              <a:rPr sz="1600" b="0">
-                <a:solidFill>
-                  <a:srgbClr val="10151C"/>
-                </a:solidFill>
-                <a:latin typeface="Trebuchet MS"/>
-              </a:rPr>
-              <a:t>Um carimbo adulterado é rejeitado na hora</a:t>
-            </a:r>
-          </a:p>
-        </p:txBody>
-      </p:sp>
-      <p:sp>
-        <p:nvSpPr>
-          <p:cNvPr id="25" name="TextBox 24"/>
-          <p:cNvSpPr txBox="1"/>
-          <p:nvPr/>
-        </p:nvSpPr>
-        <p:spPr>
-          <a:xfrm>
-            <a:off x="777240" y="6089904"/>
-            <a:ext cx="10607040" cy="457200"/>
-          </a:xfrm>
-          <a:prstGeom prst="rect">
-            <a:avLst/>
-          </a:prstGeom>
-          <a:noFill/>
-        </p:spPr>
-        <p:txBody>
-          <a:bodyPr wrap="square" lIns="0" rIns="0" tIns="0" bIns="0" anchor="t">
-            <a:spAutoFit/>
-          </a:bodyPr>
-          <a:lstStyle/>
-          <a:p>
-            <a:pPr algn="l">
-              <a:lnSpc>
-                <a:spcPct val="120000"/>
-              </a:lnSpc>
-            </a:pPr>
-            <a:r>
-              <a:rPr sz="1400" b="0">
-                <a:solidFill>
-                  <a:srgbClr val="49535F"/>
-                </a:solidFill>
-                <a:latin typeface="Trebuchet MS"/>
-              </a:rPr>
-              <a:t>Os dois últimos passos são os que provam a tese: a rede recusa o que não deveria aceitar.</a:t>
-            </a:r>
-          </a:p>
-        </p:txBody>
-      </p:sp>
-      <p:sp>
-        <p:nvSpPr>
-          <p:cNvPr id="26" name="TextBox 25"/>
-          <p:cNvSpPr txBox="1"/>
-          <p:nvPr/>
-        </p:nvSpPr>
-        <p:spPr>
-          <a:xfrm>
-            <a:off x="777240" y="6327648"/>
-            <a:ext cx="6400800" cy="256032"/>
-          </a:xfrm>
-          <a:prstGeom prst="rect">
-            <a:avLst/>
-          </a:prstGeom>
-          <a:noFill/>
-        </p:spPr>
-        <p:txBody>
-          <a:bodyPr wrap="square" lIns="0" rIns="0" tIns="0" bIns="0" anchor="t">
-            <a:spAutoFit/>
-          </a:bodyPr>
-          <a:lstStyle/>
-          <a:p>
-            <a:pPr algn="l">
-              <a:lnSpc>
-                <a:spcPct val="100000"/>
-              </a:lnSpc>
-            </a:pPr>
-            <a:r>
-              <a:rPr sz="900" b="0">
+              <a:rPr sz="1200" b="0">
                 <a:solidFill>
                   <a:srgbClr val="8A939E"/>
                 </a:solidFill>
                 <a:latin typeface="Trebuchet MS"/>
               </a:rPr>
-              <a:t>SOU+OLÍMPIA · GRUPO 4 · IDEATHON OLIMPIALAB 2026</a:t>
-            </a:r>
-          </a:p>
-        </p:txBody>
-      </p:sp>
-      <p:sp>
-        <p:nvSpPr>
-          <p:cNvPr id="27" name="TextBox 26"/>
-          <p:cNvSpPr txBox="1"/>
-          <p:nvPr/>
-        </p:nvSpPr>
-        <p:spPr>
-          <a:xfrm>
-            <a:off x="10058400" y="6327648"/>
-            <a:ext cx="1371600" cy="256032"/>
-          </a:xfrm>
-          <a:prstGeom prst="rect">
-            <a:avLst/>
-          </a:prstGeom>
-          <a:noFill/>
-        </p:spPr>
-        <p:txBody>
-          <a:bodyPr wrap="square" lIns="0" rIns="0" tIns="0" bIns="0" anchor="t">
-            <a:spAutoFit/>
-          </a:bodyPr>
-          <a:lstStyle/>
-          <a:p>
-            <a:pPr algn="r">
-              <a:lnSpc>
-                <a:spcPct val="100000"/>
-              </a:lnSpc>
-            </a:pPr>
-            <a:r>
-              <a:rPr sz="900" b="0">
-                <a:solidFill>
-                  <a:srgbClr val="8A939E"/>
-                </a:solidFill>
-                <a:latin typeface="Trebuchet MS"/>
-              </a:rPr>
-              <a:t>9</a:t>
+              <a:t>Grupo 4 · Ideathon OlimpiaLab 2026</a:t>
             </a:r>
           </a:p>
         </p:txBody>
